--- a/docs/proposals/presentations/Right-Away-for-colleagues.pptx
+++ b/docs/proposals/presentations/Right-Away-for-colleagues.pptx
@@ -4911,7 +4911,7 @@
                 <a:ea typeface="Inter" pitchFamily="34" charset="-122"/>
                 <a:cs typeface="Inter" pitchFamily="34" charset="-120"/>
               </a:rPr>
-              <a:t>Five of today’s times stay; slide 8 lists the new ones.</a:t>
+              <a:t>Five of today’s times stay — slide 8 lists the rest.</a:t>
             </a:r>
             <a:endParaRPr lang="en-US" sz="1250" dirty="0"/>
           </a:p>
@@ -5121,7 +5121,7 @@
                 <a:ea typeface="Inter" pitchFamily="34" charset="-122"/>
                 <a:cs typeface="Inter" pitchFamily="34" charset="-120"/>
               </a:rPr>
-              <a:t>On average and at worst, about the same as today.</a:t>
+              <a:t>Average and worst: about the same as today.</a:t>
             </a:r>
             <a:endParaRPr lang="en-US" sz="1250" dirty="0"/>
           </a:p>

--- a/docs/proposals/presentations/Right-Away-for-colleagues.pptx
+++ b/docs/proposals/presentations/Right-Away-for-colleagues.pptx
@@ -20,9 +20,10 @@
     <p:sldId id="268" r:id="rId14"/>
     <p:sldId id="269" r:id="rId15"/>
     <p:sldId id="270" r:id="rId16"/>
+    <p:sldId id="271" r:id="rId17"/>
   </p:sldIdLst>
   <p:notesMasterIdLst>
-    <p:notesMasterId r:id="rId17"/>
+    <p:notesMasterId r:id="rId18"/>
   </p:notesMasterIdLst>
   <p:sldSz cx="9144000" cy="5143500"/>
   <p:notesSz cx="5143500" cy="9144000"/>
@@ -604,7 +605,7 @@
           <a:p>
             <a:r>
               <a:rPr lang="en-US" dirty="0"/>
-              <a:t>Earlies here means a start before 11:00. Sundays: today 8 Sunday duties across 16 working weeks, Right Away 10 across 20 — the same one-in-two share of working weeks. Because cover weeks come round a little less often, that is about one more Sunday a year each (22 against 21).</a:t>
+              <a:t>A full weekend is Saturday and the following Sunday both off. Today that is 4 weekends in a 20-week cycle — one in five; Right Away gives 6 in 24 — one in four. Most weeks now keep the same shift time Monday to Friday, and all earlies or all lates, so you are not bouncing between earlies and lates inside a week. Rest days nearly always come in pairs now — 22 of the 24 rest-day breaks are two days or more, against 13 of 17 today — and there are no six-day weeks (today there is one).</a:t>
             </a:r>
             <a:endParaRPr lang="en-US" dirty="0"/>
           </a:p>
@@ -692,7 +693,7 @@
           <a:p>
             <a:r>
               <a:rPr lang="en-US" dirty="0"/>
-              <a:t>Leave is only needed on working days Monday to Saturday; rest days and Sundays cost nothing. Today there is one unusual stretch of the roster where 14 days buys 30 days off — Right Away spreads rest days more evenly, so its best is 28. On average it is about the same, and at its worst it is never worse than today. Four full weeks off (Sunday to Saturday) takes 15 days of leave instead of 14. The exact averages depend on where you count a booking as starting, so quote them as “about the same”.</a:t>
+              <a:t>Earlies here means a start before 11:00. Sundays: today 8 Sunday duties across 16 working weeks, Right Away 10 across 20 — the same one-in-two share of working weeks. Because cover weeks come round a little less often, that is about one more Sunday a year each (22 against 21).</a:t>
             </a:r>
             <a:endParaRPr lang="en-US" dirty="0"/>
           </a:p>
@@ -780,7 +781,7 @@
           <a:p>
             <a:r>
               <a:rPr lang="en-US" dirty="0"/>
-              <a:t>Right Away puts the people on the floor where the trains are: through the day, the number on the station floor rises and falls with the December timetable far more closely than today’s link does — on weekdays about half as far off, on a Saturday about a fifth. The Office of Rail and Road and the rail industry publish lists of rota patterns that tend to tire people. Today’s link shows five of them; Right Away shows none. Two more — early starts and a weekly rotation — come with every weekly link at a 06:20 station, so they are listed on the sheet for information but not counted against any design.</a:t>
+              <a:t>Leave is only needed on working days Monday to Saturday; rest days and Sundays cost nothing. Today there is one unusual stretch of the roster where 14 days buys 30 days off — Right Away spreads rest days more evenly, so its best is 28. On average it is about the same, and at its worst it is never worse than today. Four full weeks off (Sunday to Saturday) takes 15 days of leave instead of 14. The exact averages depend on where you count a booking as starting, so quote them as “about the same”.</a:t>
             </a:r>
             <a:endParaRPr lang="en-US" dirty="0"/>
           </a:p>
@@ -868,7 +869,7 @@
           <a:p>
             <a:r>
               <a:rPr lang="en-US" dirty="0"/>
-              <a:t>Saying the downsides out loud is what makes the rest believable. None of these is hidden on the full proposal sheet either.</a:t>
+              <a:t>Right Away puts the people on the floor where the trains are: through the day, the number on the station floor rises and falls with the December timetable far more closely than today’s link does — on weekdays about half as far off, on a Saturday about a fifth. The Office of Rail and Road and the rail industry publish lists of rota patterns that tend to tire people. Today’s link shows five of them; Right Away shows none. Two more — early starts and a weekly rotation — come with every weekly link at a 06:20 station, so they are listed on the sheet for information but not counted against any design.</a:t>
             </a:r>
             <a:endParaRPr lang="en-US" dirty="0"/>
           </a:p>
@@ -956,7 +957,7 @@
           <a:p>
             <a:r>
               <a:rPr lang="en-US" dirty="0"/>
-              <a:t>One page to leave on screen during questions. Every figure is on the earlier slides and on the full proposal sheet.</a:t>
+              <a:t>Saying the downsides out loud is what makes the rest believable. None of these is hidden on the full proposal sheet either.</a:t>
             </a:r>
             <a:endParaRPr lang="en-US" dirty="0"/>
           </a:p>
@@ -1044,7 +1045,7 @@
           <a:p>
             <a:r>
               <a:rPr lang="en-US" dirty="0"/>
-              <a:t>Hand out or point people at the eight-page proposal sheet. Collect questions — the ones nobody asks in the room are usually about a particular week, so encourage people to look up the line they would start on.</a:t>
+              <a:t>One page to leave on screen during questions. Every figure is on the earlier slides and on the full proposal sheet.</a:t>
             </a:r>
             <a:endParaRPr lang="en-US" dirty="0"/>
           </a:p>
@@ -1068,6 +1069,94 @@
             <a:fld id="{F7021451-1387-4CA6-816F-3879F97B5CBC}" type="slidenum">
               <a:rPr lang="en-US"/>
               <a:t>15</a:t>
+            </a:fld>
+            <a:endParaRPr lang="en-US"/>
+          </a:p>
+        </p:txBody>
+      </p:sp>
+    </p:spTree>
+    <p:extLst>
+      <p:ext uri="{BB962C8B-B14F-4D97-AF65-F5344CB8AC3E}">
+        <p14:creationId xmlns:p14="http://schemas.microsoft.com/office/powerpoint/2010/main" val="1024086991"/>
+      </p:ext>
+    </p:extLst>
+  </p:cSld>
+  <p:clrMapOvr>
+    <a:masterClrMapping/>
+  </p:clrMapOvr>
+</p:notes>
+</file>
+
+<file path=ppt/notesSlides/notesSlide16.xml><?xml version="1.0" encoding="utf-8"?>
+<p:notes xmlns:a="http://schemas.openxmlformats.org/drawingml/2006/main" xmlns:r="http://schemas.openxmlformats.org/officeDocument/2006/relationships" xmlns:p="http://schemas.openxmlformats.org/presentationml/2006/main">
+  <p:cSld>
+    <p:spTree>
+      <p:nvGrpSpPr>
+        <p:cNvPr id="1" name=""/>
+        <p:cNvGrpSpPr/>
+        <p:nvPr/>
+      </p:nvGrpSpPr>
+      <p:grpSpPr>
+        <a:xfrm>
+          <a:off x="0" y="0"/>
+          <a:ext cx="0" cy="0"/>
+          <a:chOff x="0" y="0"/>
+          <a:chExt cx="0" cy="0"/>
+        </a:xfrm>
+      </p:grpSpPr>
+      <p:sp>
+        <p:nvSpPr>
+          <p:cNvPr id="2" name="Slide Image Placeholder 1"/>
+          <p:cNvSpPr>
+            <a:spLocks noGrp="1" noRot="1" noChangeAspect="1"/>
+          </p:cNvSpPr>
+          <p:nvPr>
+            <p:ph type="sldImg"/>
+          </p:nvPr>
+        </p:nvSpPr>
+        <p:spPr/>
+      </p:sp>
+      <p:sp>
+        <p:nvSpPr>
+          <p:cNvPr id="3" name="Notes Placeholder 2"/>
+          <p:cNvSpPr>
+            <a:spLocks noGrp="1"/>
+          </p:cNvSpPr>
+          <p:nvPr>
+            <p:ph type="body" idx="1"/>
+          </p:nvPr>
+        </p:nvSpPr>
+        <p:spPr/>
+        <p:txBody>
+          <a:bodyPr/>
+          <a:lstStyle/>
+          <a:p>
+            <a:r>
+              <a:rPr lang="en-US" dirty="0"/>
+              <a:t>Hand out or point people at the eight-page proposal sheet. Collect questions — the ones nobody asks in the room are usually about a particular week, so encourage people to look up the line they would start on.</a:t>
+            </a:r>
+            <a:endParaRPr lang="en-US" dirty="0"/>
+          </a:p>
+        </p:txBody>
+      </p:sp>
+      <p:sp>
+        <p:nvSpPr>
+          <p:cNvPr id="4" name="Slide Number Placeholder 3"/>
+          <p:cNvSpPr>
+            <a:spLocks noGrp="1"/>
+          </p:cNvSpPr>
+          <p:nvPr>
+            <p:ph type="sldNum" sz="quarter" idx="10"/>
+          </p:nvPr>
+        </p:nvSpPr>
+        <p:spPr/>
+        <p:txBody>
+          <a:bodyPr/>
+          <a:lstStyle/>
+          <a:p>
+            <a:fld id="{F7021451-1387-4CA6-816F-3879F97B5CBC}" type="slidenum">
+              <a:rPr lang="en-US"/>
+              <a:t>16</a:t>
             </a:fld>
             <a:endParaRPr lang="en-US"/>
           </a:p>
@@ -1660,7 +1749,7 @@
           <a:p>
             <a:r>
               <a:rPr lang="en-US" dirty="0"/>
-              <a:t>Right Away was built to follow the trains rather than to keep today’s times, and this is where that shows: five of today’s eighteen times stay, and twelve are new. Several are small nudges — 06:20–14:30 is ten minutes on from 06:20–14:20, and the Sunday opener is fifteen minutes shorter — but some are genuinely new, including longer earlies of 9h 15m to 9h 30m. 15:45–23:55 is one time, the closer on weekdays and on Saturdays. The full list, day by day, is on page 4 of the proposal sheet.</a:t>
+              <a:t>Right Away was built to follow the trains rather than to keep today’s times, and this is where that shows: five of today’s eighteen times stay, and twelve are new. The next slide lists the twelve, day by day, with how each compares with a time worked today.</a:t>
             </a:r>
             <a:endParaRPr lang="en-US" dirty="0"/>
           </a:p>
@@ -1748,7 +1837,7 @@
           <a:p>
             <a:r>
               <a:rPr lang="en-US" dirty="0"/>
-              <a:t>A full weekend is Saturday and the following Sunday both off. Today that is 4 weekends in a 20-week cycle — one in five; Right Away gives 6 in 24 — one in four. Most weeks now keep the same shift time Monday to Friday, and all earlies or all lates, so you are not bouncing between earlies and lates inside a week. Rest days nearly always come in pairs now — 22 of the 24 rest-day breaks are two days or more, against 13 of 17 today — and there are no six-day weeks (today there is one).</a:t>
+              <a:t>Several are small nudges — 06:20–14:30 is ten minutes on from 06:20–14:20, and the Sunday opener is fifteen minutes shorter — but some are genuinely new, including longer earlies of 9h 15m to 9h 30m. 15:45–23:55 is one time, the closer on weekdays and on Saturdays, so it appears in both columns. The full list, day by day, is on page 4 of the proposal sheet.</a:t>
             </a:r>
             <a:endParaRPr lang="en-US" dirty="0"/>
           </a:p>
@@ -2352,7 +2441,7 @@
                 <a:ea typeface="Inter" pitchFamily="34" charset="-122"/>
                 <a:cs typeface="Inter" pitchFamily="34" charset="-120"/>
               </a:rPr>
-              <a:t>Earlies, lates and Sundays</a:t>
+              <a:t>Rest and weekends</a:t>
             </a:r>
             <a:endParaRPr lang="en-US" sz="3000" dirty="0"/>
           </a:p>
@@ -2391,7 +2480,7 @@
                 <a:ea typeface="Inter" pitchFamily="34" charset="-122"/>
                 <a:cs typeface="Inter" pitchFamily="34" charset="-120"/>
               </a:rPr>
-              <a:t>The balance you have now stays the same</a:t>
+              <a:t>The biggest improvement over today</a:t>
             </a:r>
             <a:endParaRPr lang="en-US" sz="1500" dirty="0"/>
           </a:p>
@@ -2399,18 +2488,96 @@
       </p:sp>
       <p:sp>
         <p:nvSpPr>
-          <p:cNvPr id="4" name="Shape 2"/>
+          <p:cNvPr id="4" name="Text 2"/>
+          <p:cNvSpPr txBox="1"/>
+          <p:nvPr/>
+        </p:nvSpPr>
+        <p:spPr>
+          <a:xfrm>
+            <a:off x="4663440" y="1417320"/>
+            <a:ext cx="2011680" cy="320040"/>
+          </a:xfrm>
+          <a:prstGeom prst="rect">
+            <a:avLst/>
+          </a:prstGeom>
+          <a:noFill/>
+          <a:ln/>
+        </p:spPr>
+        <p:txBody>
+          <a:bodyPr wrap="square" lIns="0" tIns="0" rIns="0" bIns="0" rtlCol="0" anchor="ctr"/>
+          <a:lstStyle/>
+          <a:p>
+            <a:pPr algn="ctr" indent="0" marL="0">
+              <a:buNone/>
+            </a:pPr>
+            <a:r>
+              <a:rPr lang="en-US" sz="1300" b="1" dirty="0">
+                <a:solidFill>
+                  <a:srgbClr val="5B6778"/>
+                </a:solidFill>
+                <a:latin typeface="Inter" pitchFamily="34" charset="0"/>
+                <a:ea typeface="Inter" pitchFamily="34" charset="-122"/>
+                <a:cs typeface="Inter" pitchFamily="34" charset="-120"/>
+              </a:rPr>
+              <a:t>Today</a:t>
+            </a:r>
+            <a:endParaRPr lang="en-US" sz="1300" dirty="0"/>
+          </a:p>
+        </p:txBody>
+      </p:sp>
+      <p:sp>
+        <p:nvSpPr>
+          <p:cNvPr id="5" name="Text 3"/>
+          <p:cNvSpPr txBox="1"/>
+          <p:nvPr/>
+        </p:nvSpPr>
+        <p:spPr>
+          <a:xfrm>
+            <a:off x="6675120" y="1417320"/>
+            <a:ext cx="2011680" cy="320040"/>
+          </a:xfrm>
+          <a:prstGeom prst="rect">
+            <a:avLst/>
+          </a:prstGeom>
+          <a:noFill/>
+          <a:ln/>
+        </p:spPr>
+        <p:txBody>
+          <a:bodyPr wrap="square" lIns="0" tIns="0" rIns="0" bIns="0" rtlCol="0" anchor="ctr"/>
+          <a:lstStyle/>
+          <a:p>
+            <a:pPr algn="ctr" indent="0" marL="0">
+              <a:buNone/>
+            </a:pPr>
+            <a:r>
+              <a:rPr lang="en-US" sz="1300" b="1" dirty="0">
+                <a:solidFill>
+                  <a:srgbClr val="001E3C"/>
+                </a:solidFill>
+                <a:latin typeface="Inter" pitchFamily="34" charset="0"/>
+                <a:ea typeface="Inter" pitchFamily="34" charset="-122"/>
+                <a:cs typeface="Inter" pitchFamily="34" charset="-120"/>
+              </a:rPr>
+              <a:t>Right Away</a:t>
+            </a:r>
+            <a:endParaRPr lang="en-US" sz="1300" dirty="0"/>
+          </a:p>
+        </p:txBody>
+      </p:sp>
+      <p:sp>
+        <p:nvSpPr>
+          <p:cNvPr id="6" name="Shape 4"/>
           <p:cNvSpPr/>
           <p:nvPr/>
         </p:nvSpPr>
         <p:spPr>
           <a:xfrm>
-            <a:off x="457200" y="1417320"/>
-            <a:ext cx="2606040" cy="2514600"/>
+            <a:off x="457200" y="1801368"/>
+            <a:ext cx="8229600" cy="365760"/>
           </a:xfrm>
           <a:prstGeom prst="roundRect">
             <a:avLst>
-              <a:gd name="adj" fmla="val 3636"/>
+              <a:gd name="adj" fmla="val 15000"/>
             </a:avLst>
           </a:prstGeom>
           <a:solidFill>
@@ -2426,63 +2593,158 @@
       </p:sp>
       <p:sp>
         <p:nvSpPr>
-          <p:cNvPr id="5" name="Shape 3"/>
+          <p:cNvPr id="7" name="Text 5"/>
+          <p:cNvSpPr txBox="1"/>
+          <p:nvPr/>
+        </p:nvSpPr>
+        <p:spPr>
+          <a:xfrm>
+            <a:off x="640080" y="1801368"/>
+            <a:ext cx="4023360" cy="365760"/>
+          </a:xfrm>
+          <a:prstGeom prst="rect">
+            <a:avLst/>
+          </a:prstGeom>
+          <a:noFill/>
+          <a:ln/>
+        </p:spPr>
+        <p:txBody>
+          <a:bodyPr wrap="square" lIns="0" tIns="0" rIns="0" bIns="0" rtlCol="0" anchor="ctr"/>
+          <a:lstStyle/>
+          <a:p>
+            <a:pPr indent="0" marL="0">
+              <a:buNone/>
+            </a:pPr>
+            <a:r>
+              <a:rPr lang="en-US" sz="1400" dirty="0">
+                <a:solidFill>
+                  <a:srgbClr val="1B2533"/>
+                </a:solidFill>
+                <a:latin typeface="Inter" pitchFamily="34" charset="0"/>
+                <a:ea typeface="Inter" pitchFamily="34" charset="-122"/>
+                <a:cs typeface="Inter" pitchFamily="34" charset="-120"/>
+              </a:rPr>
+              <a:t>Full weekends off</a:t>
+            </a:r>
+            <a:endParaRPr lang="en-US" sz="1400" dirty="0"/>
+          </a:p>
+        </p:txBody>
+      </p:sp>
+      <p:sp>
+        <p:nvSpPr>
+          <p:cNvPr id="8" name="Text 6"/>
+          <p:cNvSpPr txBox="1"/>
+          <p:nvPr/>
+        </p:nvSpPr>
+        <p:spPr>
+          <a:xfrm>
+            <a:off x="4663440" y="1801368"/>
+            <a:ext cx="2011680" cy="365760"/>
+          </a:xfrm>
+          <a:prstGeom prst="rect">
+            <a:avLst/>
+          </a:prstGeom>
+          <a:noFill/>
+          <a:ln/>
+        </p:spPr>
+        <p:txBody>
+          <a:bodyPr wrap="square" lIns="0" tIns="0" rIns="0" bIns="0" rtlCol="0" anchor="ctr"/>
+          <a:lstStyle/>
+          <a:p>
+            <a:pPr algn="ctr" indent="0" marL="0">
+              <a:buNone/>
+            </a:pPr>
+            <a:r>
+              <a:rPr lang="en-US" sz="1600" dirty="0">
+                <a:solidFill>
+                  <a:srgbClr val="5B6778"/>
+                </a:solidFill>
+                <a:latin typeface="Inter" pitchFamily="34" charset="0"/>
+                <a:ea typeface="Inter" pitchFamily="34" charset="-122"/>
+                <a:cs typeface="Inter" pitchFamily="34" charset="-120"/>
+              </a:rPr>
+              <a:t>4 in 20</a:t>
+            </a:r>
+            <a:endParaRPr lang="en-US" sz="1600" dirty="0"/>
+          </a:p>
+        </p:txBody>
+      </p:sp>
+      <p:sp>
+        <p:nvSpPr>
+          <p:cNvPr id="9" name="Text 7"/>
+          <p:cNvSpPr txBox="1"/>
+          <p:nvPr/>
+        </p:nvSpPr>
+        <p:spPr>
+          <a:xfrm>
+            <a:off x="6675120" y="1801368"/>
+            <a:ext cx="2011680" cy="365760"/>
+          </a:xfrm>
+          <a:prstGeom prst="rect">
+            <a:avLst/>
+          </a:prstGeom>
+          <a:noFill/>
+          <a:ln/>
+        </p:spPr>
+        <p:txBody>
+          <a:bodyPr wrap="square" lIns="0" tIns="0" rIns="0" bIns="0" rtlCol="0" anchor="ctr"/>
+          <a:lstStyle/>
+          <a:p>
+            <a:pPr algn="ctr" indent="0" marL="0">
+              <a:buNone/>
+            </a:pPr>
+            <a:r>
+              <a:rPr lang="en-US" sz="1800" b="1" dirty="0">
+                <a:solidFill>
+                  <a:srgbClr val="1E7B4B"/>
+                </a:solidFill>
+                <a:latin typeface="Inter" pitchFamily="34" charset="0"/>
+                <a:ea typeface="Inter" pitchFamily="34" charset="-122"/>
+                <a:cs typeface="Inter" pitchFamily="34" charset="-120"/>
+              </a:rPr>
+              <a:t>6 in 24</a:t>
+            </a:r>
+            <a:endParaRPr lang="en-US" sz="1800" dirty="0"/>
+          </a:p>
+        </p:txBody>
+      </p:sp>
+      <p:sp>
+        <p:nvSpPr>
+          <p:cNvPr id="10" name="Shape 8"/>
           <p:cNvSpPr/>
           <p:nvPr/>
         </p:nvSpPr>
         <p:spPr>
           <a:xfrm>
-            <a:off x="640080" y="1600200"/>
-            <a:ext cx="502920" cy="502920"/>
-          </a:xfrm>
-          <a:prstGeom prst="ellipse">
-            <a:avLst/>
+            <a:off x="457200" y="2258568"/>
+            <a:ext cx="8229600" cy="365760"/>
+          </a:xfrm>
+          <a:prstGeom prst="roundRect">
+            <a:avLst>
+              <a:gd name="adj" fmla="val 15000"/>
+            </a:avLst>
           </a:prstGeom>
           <a:solidFill>
-            <a:srgbClr val="F5C800"/>
+            <a:srgbClr val="FFFFFF"/>
           </a:solidFill>
           <a:ln w="12700">
             <a:solidFill>
-              <a:srgbClr val="F5C800"/>
+              <a:srgbClr val="DDE3EA"/>
             </a:solidFill>
             <a:prstDash val="solid"/>
           </a:ln>
         </p:spPr>
       </p:sp>
-      <p:pic>
-        <p:nvPicPr>
-          <p:cNvPr id="6" name="Image 0" descr="preencoded.png">    </p:cNvPr>
-          <p:cNvPicPr>
-            <a:picLocks noChangeAspect="1"/>
-          </p:cNvPicPr>
-          <p:nvPr/>
-        </p:nvPicPr>
-        <p:blipFill>
-          <a:blip r:embed="rId1"/>
-          <a:stretch>
-            <a:fillRect/>
-          </a:stretch>
-        </p:blipFill>
-        <p:spPr>
-          <a:xfrm>
-            <a:off x="750722" y="1710842"/>
-            <a:ext cx="281635" cy="281635"/>
-          </a:xfrm>
-          <a:prstGeom prst="rect">
-            <a:avLst/>
-          </a:prstGeom>
-        </p:spPr>
-      </p:pic>
-      <p:sp>
-        <p:nvSpPr>
-          <p:cNvPr id="7" name="Text 4"/>
-          <p:cNvSpPr txBox="1"/>
-          <p:nvPr/>
-        </p:nvSpPr>
-        <p:spPr>
-          <a:xfrm>
-            <a:off x="640080" y="2240280"/>
-            <a:ext cx="2240280" cy="548640"/>
+      <p:sp>
+        <p:nvSpPr>
+          <p:cNvPr id="11" name="Text 9"/>
+          <p:cNvSpPr txBox="1"/>
+          <p:nvPr/>
+        </p:nvSpPr>
+        <p:spPr>
+          <a:xfrm>
+            <a:off x="640080" y="2258568"/>
+            <a:ext cx="4023360" cy="365760"/>
           </a:xfrm>
           <a:prstGeom prst="rect">
             <a:avLst/>
@@ -2498,7 +2760,7 @@
               <a:buNone/>
             </a:pPr>
             <a:r>
-              <a:rPr lang="en-US" sz="1600" b="1" dirty="0">
+              <a:rPr lang="en-US" sz="1400" dirty="0">
                 <a:solidFill>
                   <a:srgbClr val="1B2533"/>
                 </a:solidFill>
@@ -2506,7 +2768,46 @@
                 <a:ea typeface="Inter" pitchFamily="34" charset="-122"/>
                 <a:cs typeface="Inter" pitchFamily="34" charset="-120"/>
               </a:rPr>
-              <a:t>Half earlies, half lates</a:t>
+              <a:t>Most days worked in a row</a:t>
+            </a:r>
+            <a:endParaRPr lang="en-US" sz="1400" dirty="0"/>
+          </a:p>
+        </p:txBody>
+      </p:sp>
+      <p:sp>
+        <p:nvSpPr>
+          <p:cNvPr id="12" name="Text 10"/>
+          <p:cNvSpPr txBox="1"/>
+          <p:nvPr/>
+        </p:nvSpPr>
+        <p:spPr>
+          <a:xfrm>
+            <a:off x="4663440" y="2258568"/>
+            <a:ext cx="2011680" cy="365760"/>
+          </a:xfrm>
+          <a:prstGeom prst="rect">
+            <a:avLst/>
+          </a:prstGeom>
+          <a:noFill/>
+          <a:ln/>
+        </p:spPr>
+        <p:txBody>
+          <a:bodyPr wrap="square" lIns="0" tIns="0" rIns="0" bIns="0" rtlCol="0" anchor="ctr"/>
+          <a:lstStyle/>
+          <a:p>
+            <a:pPr algn="ctr" indent="0" marL="0">
+              <a:buNone/>
+            </a:pPr>
+            <a:r>
+              <a:rPr lang="en-US" sz="1600" dirty="0">
+                <a:solidFill>
+                  <a:srgbClr val="5B6778"/>
+                </a:solidFill>
+                <a:latin typeface="Inter" pitchFamily="34" charset="0"/>
+                <a:ea typeface="Inter" pitchFamily="34" charset="-122"/>
+                <a:cs typeface="Inter" pitchFamily="34" charset="-120"/>
+              </a:rPr>
+              <a:t>9</a:t>
             </a:r>
             <a:endParaRPr lang="en-US" sz="1600" dirty="0"/>
           </a:p>
@@ -2514,57 +2815,57 @@
       </p:sp>
       <p:sp>
         <p:nvSpPr>
-          <p:cNvPr id="8" name="Text 5"/>
-          <p:cNvSpPr txBox="1"/>
-          <p:nvPr/>
-        </p:nvSpPr>
-        <p:spPr>
-          <a:xfrm>
-            <a:off x="640080" y="2788920"/>
-            <a:ext cx="2240280" cy="1097280"/>
-          </a:xfrm>
-          <a:prstGeom prst="rect">
-            <a:avLst/>
-          </a:prstGeom>
-          <a:noFill/>
-          <a:ln/>
-        </p:spPr>
-        <p:txBody>
-          <a:bodyPr wrap="square" lIns="0" tIns="0" rIns="0" bIns="0" rtlCol="0" anchor="t"/>
-          <a:lstStyle/>
-          <a:p>
-            <a:pPr indent="0" marL="0">
-              <a:buNone/>
-            </a:pPr>
-            <a:r>
-              <a:rPr lang="en-US" sz="1300" dirty="0">
-                <a:solidFill>
-                  <a:srgbClr val="5B6778"/>
-                </a:solidFill>
-                <a:latin typeface="Inter" pitchFamily="34" charset="0"/>
-                <a:ea typeface="Inter" pitchFamily="34" charset="-122"/>
-                <a:cs typeface="Inter" pitchFamily="34" charset="-120"/>
-              </a:rPr>
-              <a:t>The same split as today: every early Monday to Saturday is matched by a late.</a:t>
-            </a:r>
-            <a:endParaRPr lang="en-US" sz="1300" dirty="0"/>
-          </a:p>
-        </p:txBody>
-      </p:sp>
-      <p:sp>
-        <p:nvSpPr>
-          <p:cNvPr id="9" name="Shape 6"/>
+          <p:cNvPr id="13" name="Text 11"/>
+          <p:cNvSpPr txBox="1"/>
+          <p:nvPr/>
+        </p:nvSpPr>
+        <p:spPr>
+          <a:xfrm>
+            <a:off x="6675120" y="2258568"/>
+            <a:ext cx="2011680" cy="365760"/>
+          </a:xfrm>
+          <a:prstGeom prst="rect">
+            <a:avLst/>
+          </a:prstGeom>
+          <a:noFill/>
+          <a:ln/>
+        </p:spPr>
+        <p:txBody>
+          <a:bodyPr wrap="square" lIns="0" tIns="0" rIns="0" bIns="0" rtlCol="0" anchor="ctr"/>
+          <a:lstStyle/>
+          <a:p>
+            <a:pPr algn="ctr" indent="0" marL="0">
+              <a:buNone/>
+            </a:pPr>
+            <a:r>
+              <a:rPr lang="en-US" sz="1800" b="1" dirty="0">
+                <a:solidFill>
+                  <a:srgbClr val="1E7B4B"/>
+                </a:solidFill>
+                <a:latin typeface="Inter" pitchFamily="34" charset="0"/>
+                <a:ea typeface="Inter" pitchFamily="34" charset="-122"/>
+                <a:cs typeface="Inter" pitchFamily="34" charset="-120"/>
+              </a:rPr>
+              <a:t>6</a:t>
+            </a:r>
+            <a:endParaRPr lang="en-US" sz="1800" dirty="0"/>
+          </a:p>
+        </p:txBody>
+      </p:sp>
+      <p:sp>
+        <p:nvSpPr>
+          <p:cNvPr id="14" name="Shape 12"/>
           <p:cNvSpPr/>
           <p:nvPr/>
         </p:nvSpPr>
         <p:spPr>
           <a:xfrm>
-            <a:off x="3246120" y="1417320"/>
-            <a:ext cx="2606040" cy="2514600"/>
+            <a:off x="457200" y="2715768"/>
+            <a:ext cx="8229600" cy="365760"/>
           </a:xfrm>
           <a:prstGeom prst="roundRect">
             <a:avLst>
-              <a:gd name="adj" fmla="val 3636"/>
+              <a:gd name="adj" fmla="val 15000"/>
             </a:avLst>
           </a:prstGeom>
           <a:solidFill>
@@ -2580,63 +2881,158 @@
       </p:sp>
       <p:sp>
         <p:nvSpPr>
-          <p:cNvPr id="10" name="Shape 7"/>
+          <p:cNvPr id="15" name="Text 13"/>
+          <p:cNvSpPr txBox="1"/>
+          <p:nvPr/>
+        </p:nvSpPr>
+        <p:spPr>
+          <a:xfrm>
+            <a:off x="640080" y="2715768"/>
+            <a:ext cx="4023360" cy="365760"/>
+          </a:xfrm>
+          <a:prstGeom prst="rect">
+            <a:avLst/>
+          </a:prstGeom>
+          <a:noFill/>
+          <a:ln/>
+        </p:spPr>
+        <p:txBody>
+          <a:bodyPr wrap="square" lIns="0" tIns="0" rIns="0" bIns="0" rtlCol="0" anchor="ctr"/>
+          <a:lstStyle/>
+          <a:p>
+            <a:pPr indent="0" marL="0">
+              <a:buNone/>
+            </a:pPr>
+            <a:r>
+              <a:rPr lang="en-US" sz="1400" dirty="0">
+                <a:solidFill>
+                  <a:srgbClr val="1B2533"/>
+                </a:solidFill>
+                <a:latin typeface="Inter" pitchFamily="34" charset="0"/>
+                <a:ea typeface="Inter" pitchFamily="34" charset="-122"/>
+                <a:cs typeface="Inter" pitchFamily="34" charset="-120"/>
+              </a:rPr>
+              <a:t>Rest-day breaks of two days or more</a:t>
+            </a:r>
+            <a:endParaRPr lang="en-US" sz="1400" dirty="0"/>
+          </a:p>
+        </p:txBody>
+      </p:sp>
+      <p:sp>
+        <p:nvSpPr>
+          <p:cNvPr id="16" name="Text 14"/>
+          <p:cNvSpPr txBox="1"/>
+          <p:nvPr/>
+        </p:nvSpPr>
+        <p:spPr>
+          <a:xfrm>
+            <a:off x="4663440" y="2715768"/>
+            <a:ext cx="2011680" cy="365760"/>
+          </a:xfrm>
+          <a:prstGeom prst="rect">
+            <a:avLst/>
+          </a:prstGeom>
+          <a:noFill/>
+          <a:ln/>
+        </p:spPr>
+        <p:txBody>
+          <a:bodyPr wrap="square" lIns="0" tIns="0" rIns="0" bIns="0" rtlCol="0" anchor="ctr"/>
+          <a:lstStyle/>
+          <a:p>
+            <a:pPr algn="ctr" indent="0" marL="0">
+              <a:buNone/>
+            </a:pPr>
+            <a:r>
+              <a:rPr lang="en-US" sz="1600" dirty="0">
+                <a:solidFill>
+                  <a:srgbClr val="5B6778"/>
+                </a:solidFill>
+                <a:latin typeface="Inter" pitchFamily="34" charset="0"/>
+                <a:ea typeface="Inter" pitchFamily="34" charset="-122"/>
+                <a:cs typeface="Inter" pitchFamily="34" charset="-120"/>
+              </a:rPr>
+              <a:t>13 of 17</a:t>
+            </a:r>
+            <a:endParaRPr lang="en-US" sz="1600" dirty="0"/>
+          </a:p>
+        </p:txBody>
+      </p:sp>
+      <p:sp>
+        <p:nvSpPr>
+          <p:cNvPr id="17" name="Text 15"/>
+          <p:cNvSpPr txBox="1"/>
+          <p:nvPr/>
+        </p:nvSpPr>
+        <p:spPr>
+          <a:xfrm>
+            <a:off x="6675120" y="2715768"/>
+            <a:ext cx="2011680" cy="365760"/>
+          </a:xfrm>
+          <a:prstGeom prst="rect">
+            <a:avLst/>
+          </a:prstGeom>
+          <a:noFill/>
+          <a:ln/>
+        </p:spPr>
+        <p:txBody>
+          <a:bodyPr wrap="square" lIns="0" tIns="0" rIns="0" bIns="0" rtlCol="0" anchor="ctr"/>
+          <a:lstStyle/>
+          <a:p>
+            <a:pPr algn="ctr" indent="0" marL="0">
+              <a:buNone/>
+            </a:pPr>
+            <a:r>
+              <a:rPr lang="en-US" sz="1800" b="1" dirty="0">
+                <a:solidFill>
+                  <a:srgbClr val="1E7B4B"/>
+                </a:solidFill>
+                <a:latin typeface="Inter" pitchFamily="34" charset="0"/>
+                <a:ea typeface="Inter" pitchFamily="34" charset="-122"/>
+                <a:cs typeface="Inter" pitchFamily="34" charset="-120"/>
+              </a:rPr>
+              <a:t>22 of 24</a:t>
+            </a:r>
+            <a:endParaRPr lang="en-US" sz="1800" dirty="0"/>
+          </a:p>
+        </p:txBody>
+      </p:sp>
+      <p:sp>
+        <p:nvSpPr>
+          <p:cNvPr id="18" name="Shape 16"/>
           <p:cNvSpPr/>
           <p:nvPr/>
         </p:nvSpPr>
         <p:spPr>
           <a:xfrm>
-            <a:off x="3429000" y="1600200"/>
-            <a:ext cx="502920" cy="502920"/>
-          </a:xfrm>
-          <a:prstGeom prst="ellipse">
-            <a:avLst/>
+            <a:off x="457200" y="3172968"/>
+            <a:ext cx="8229600" cy="365760"/>
+          </a:xfrm>
+          <a:prstGeom prst="roundRect">
+            <a:avLst>
+              <a:gd name="adj" fmla="val 15000"/>
+            </a:avLst>
           </a:prstGeom>
           <a:solidFill>
-            <a:srgbClr val="F5C800"/>
+            <a:srgbClr val="FFFFFF"/>
           </a:solidFill>
           <a:ln w="12700">
             <a:solidFill>
-              <a:srgbClr val="F5C800"/>
+              <a:srgbClr val="DDE3EA"/>
             </a:solidFill>
             <a:prstDash val="solid"/>
           </a:ln>
         </p:spPr>
       </p:sp>
-      <p:pic>
-        <p:nvPicPr>
-          <p:cNvPr id="11" name="Image 1" descr="preencoded.png">    </p:cNvPr>
-          <p:cNvPicPr>
-            <a:picLocks noChangeAspect="1"/>
-          </p:cNvPicPr>
-          <p:nvPr/>
-        </p:nvPicPr>
-        <p:blipFill>
-          <a:blip r:embed="rId2"/>
-          <a:stretch>
-            <a:fillRect/>
-          </a:stretch>
-        </p:blipFill>
-        <p:spPr>
-          <a:xfrm>
-            <a:off x="3539642" y="1710842"/>
-            <a:ext cx="281635" cy="281635"/>
-          </a:xfrm>
-          <a:prstGeom prst="rect">
-            <a:avLst/>
-          </a:prstGeom>
-        </p:spPr>
-      </p:pic>
-      <p:sp>
-        <p:nvSpPr>
-          <p:cNvPr id="12" name="Text 8"/>
-          <p:cNvSpPr txBox="1"/>
-          <p:nvPr/>
-        </p:nvSpPr>
-        <p:spPr>
-          <a:xfrm>
-            <a:off x="3429000" y="2240280"/>
-            <a:ext cx="2240280" cy="548640"/>
+      <p:sp>
+        <p:nvSpPr>
+          <p:cNvPr id="19" name="Text 17"/>
+          <p:cNvSpPr txBox="1"/>
+          <p:nvPr/>
+        </p:nvSpPr>
+        <p:spPr>
+          <a:xfrm>
+            <a:off x="640080" y="3172968"/>
+            <a:ext cx="4023360" cy="365760"/>
           </a:xfrm>
           <a:prstGeom prst="rect">
             <a:avLst/>
@@ -2652,7 +3048,7 @@
               <a:buNone/>
             </a:pPr>
             <a:r>
-              <a:rPr lang="en-US" sz="1600" b="1" dirty="0">
+              <a:rPr lang="en-US" sz="1400" dirty="0">
                 <a:solidFill>
                   <a:srgbClr val="1B2533"/>
                 </a:solidFill>
@@ -2660,7 +3056,46 @@
                 <a:ea typeface="Inter" pitchFamily="34" charset="-122"/>
                 <a:cs typeface="Inter" pitchFamily="34" charset="-120"/>
               </a:rPr>
-              <a:t>Sundays are still overtime</a:t>
+              <a:t>Shortest gap between two shifts</a:t>
+            </a:r>
+            <a:endParaRPr lang="en-US" sz="1400" dirty="0"/>
+          </a:p>
+        </p:txBody>
+      </p:sp>
+      <p:sp>
+        <p:nvSpPr>
+          <p:cNvPr id="20" name="Text 18"/>
+          <p:cNvSpPr txBox="1"/>
+          <p:nvPr/>
+        </p:nvSpPr>
+        <p:spPr>
+          <a:xfrm>
+            <a:off x="4663440" y="3172968"/>
+            <a:ext cx="2011680" cy="365760"/>
+          </a:xfrm>
+          <a:prstGeom prst="rect">
+            <a:avLst/>
+          </a:prstGeom>
+          <a:noFill/>
+          <a:ln/>
+        </p:spPr>
+        <p:txBody>
+          <a:bodyPr wrap="square" lIns="0" tIns="0" rIns="0" bIns="0" rtlCol="0" anchor="ctr"/>
+          <a:lstStyle/>
+          <a:p>
+            <a:pPr algn="ctr" indent="0" marL="0">
+              <a:buNone/>
+            </a:pPr>
+            <a:r>
+              <a:rPr lang="en-US" sz="1600" dirty="0">
+                <a:solidFill>
+                  <a:srgbClr val="5B6778"/>
+                </a:solidFill>
+                <a:latin typeface="Inter" pitchFamily="34" charset="0"/>
+                <a:ea typeface="Inter" pitchFamily="34" charset="-122"/>
+                <a:cs typeface="Inter" pitchFamily="34" charset="-120"/>
+              </a:rPr>
+              <a:t>12h 30m</a:t>
             </a:r>
             <a:endParaRPr lang="en-US" sz="1600" dirty="0"/>
           </a:p>
@@ -2668,57 +3103,57 @@
       </p:sp>
       <p:sp>
         <p:nvSpPr>
-          <p:cNvPr id="13" name="Text 9"/>
-          <p:cNvSpPr txBox="1"/>
-          <p:nvPr/>
-        </p:nvSpPr>
-        <p:spPr>
-          <a:xfrm>
-            <a:off x="3429000" y="2788920"/>
-            <a:ext cx="2240280" cy="1097280"/>
-          </a:xfrm>
-          <a:prstGeom prst="rect">
-            <a:avLst/>
-          </a:prstGeom>
-          <a:noFill/>
-          <a:ln/>
-        </p:spPr>
-        <p:txBody>
-          <a:bodyPr wrap="square" lIns="0" tIns="0" rIns="0" bIns="0" rtlCol="0" anchor="t"/>
-          <a:lstStyle/>
-          <a:p>
-            <a:pPr indent="0" marL="0">
-              <a:buNone/>
-            </a:pPr>
-            <a:r>
-              <a:rPr lang="en-US" sz="1300" dirty="0">
-                <a:solidFill>
-                  <a:srgbClr val="5B6778"/>
-                </a:solidFill>
-                <a:latin typeface="Inter" pitchFamily="34" charset="0"/>
-                <a:ea typeface="Inter" pitchFamily="34" charset="-122"/>
-                <a:cs typeface="Inter" pitchFamily="34" charset="-120"/>
-              </a:rPr>
-              <a:t>Not part of the contract, same as now — and about the same number of Sundays as today.</a:t>
-            </a:r>
-            <a:endParaRPr lang="en-US" sz="1300" dirty="0"/>
-          </a:p>
-        </p:txBody>
-      </p:sp>
-      <p:sp>
-        <p:nvSpPr>
-          <p:cNvPr id="14" name="Shape 10"/>
+          <p:cNvPr id="21" name="Text 19"/>
+          <p:cNvSpPr txBox="1"/>
+          <p:nvPr/>
+        </p:nvSpPr>
+        <p:spPr>
+          <a:xfrm>
+            <a:off x="6675120" y="3172968"/>
+            <a:ext cx="2011680" cy="365760"/>
+          </a:xfrm>
+          <a:prstGeom prst="rect">
+            <a:avLst/>
+          </a:prstGeom>
+          <a:noFill/>
+          <a:ln/>
+        </p:spPr>
+        <p:txBody>
+          <a:bodyPr wrap="square" lIns="0" tIns="0" rIns="0" bIns="0" rtlCol="0" anchor="ctr"/>
+          <a:lstStyle/>
+          <a:p>
+            <a:pPr algn="ctr" indent="0" marL="0">
+              <a:buNone/>
+            </a:pPr>
+            <a:r>
+              <a:rPr lang="en-US" sz="1800" b="1" dirty="0">
+                <a:solidFill>
+                  <a:srgbClr val="1E7B4B"/>
+                </a:solidFill>
+                <a:latin typeface="Inter" pitchFamily="34" charset="0"/>
+                <a:ea typeface="Inter" pitchFamily="34" charset="-122"/>
+                <a:cs typeface="Inter" pitchFamily="34" charset="-120"/>
+              </a:rPr>
+              <a:t>14h 05m</a:t>
+            </a:r>
+            <a:endParaRPr lang="en-US" sz="1800" dirty="0"/>
+          </a:p>
+        </p:txBody>
+      </p:sp>
+      <p:sp>
+        <p:nvSpPr>
+          <p:cNvPr id="22" name="Shape 20"/>
           <p:cNvSpPr/>
           <p:nvPr/>
         </p:nvSpPr>
         <p:spPr>
           <a:xfrm>
-            <a:off x="6035040" y="1417320"/>
-            <a:ext cx="2606040" cy="2514600"/>
+            <a:off x="457200" y="3630168"/>
+            <a:ext cx="8229600" cy="365760"/>
           </a:xfrm>
           <a:prstGeom prst="roundRect">
             <a:avLst>
-              <a:gd name="adj" fmla="val 3636"/>
+              <a:gd name="adj" fmla="val 15000"/>
             </a:avLst>
           </a:prstGeom>
           <a:solidFill>
@@ -2734,63 +3169,14 @@
       </p:sp>
       <p:sp>
         <p:nvSpPr>
-          <p:cNvPr id="15" name="Shape 11"/>
-          <p:cNvSpPr/>
-          <p:nvPr/>
-        </p:nvSpPr>
-        <p:spPr>
-          <a:xfrm>
-            <a:off x="6217920" y="1600200"/>
-            <a:ext cx="502920" cy="502920"/>
-          </a:xfrm>
-          <a:prstGeom prst="ellipse">
-            <a:avLst/>
-          </a:prstGeom>
-          <a:solidFill>
-            <a:srgbClr val="F5C800"/>
-          </a:solidFill>
-          <a:ln w="12700">
-            <a:solidFill>
-              <a:srgbClr val="F5C800"/>
-            </a:solidFill>
-            <a:prstDash val="solid"/>
-          </a:ln>
-        </p:spPr>
-      </p:sp>
-      <p:pic>
-        <p:nvPicPr>
-          <p:cNvPr id="16" name="Image 2" descr="preencoded.png">    </p:cNvPr>
-          <p:cNvPicPr>
-            <a:picLocks noChangeAspect="1"/>
-          </p:cNvPicPr>
-          <p:nvPr/>
-        </p:nvPicPr>
-        <p:blipFill>
-          <a:blip r:embed="rId3"/>
-          <a:stretch>
-            <a:fillRect/>
-          </a:stretch>
-        </p:blipFill>
-        <p:spPr>
-          <a:xfrm>
-            <a:off x="6328562" y="1710842"/>
-            <a:ext cx="281635" cy="281635"/>
-          </a:xfrm>
-          <a:prstGeom prst="rect">
-            <a:avLst/>
-          </a:prstGeom>
-        </p:spPr>
-      </p:pic>
-      <p:sp>
-        <p:nvSpPr>
-          <p:cNvPr id="17" name="Text 12"/>
-          <p:cNvSpPr txBox="1"/>
-          <p:nvPr/>
-        </p:nvSpPr>
-        <p:spPr>
-          <a:xfrm>
-            <a:off x="6217920" y="2240280"/>
-            <a:ext cx="2240280" cy="548640"/>
+          <p:cNvPr id="23" name="Text 21"/>
+          <p:cNvSpPr txBox="1"/>
+          <p:nvPr/>
+        </p:nvSpPr>
+        <p:spPr>
+          <a:xfrm>
+            <a:off x="640080" y="3630168"/>
+            <a:ext cx="4023360" cy="365760"/>
           </a:xfrm>
           <a:prstGeom prst="rect">
             <a:avLst/>
@@ -2806,7 +3192,7 @@
               <a:buNone/>
             </a:pPr>
             <a:r>
-              <a:rPr lang="en-US" sz="1600" b="1" dirty="0">
+              <a:rPr lang="en-US" sz="1400" dirty="0">
                 <a:solidFill>
                   <a:srgbClr val="1B2533"/>
                 </a:solidFill>
@@ -2814,7 +3200,46 @@
                 <a:ea typeface="Inter" pitchFamily="34" charset="-122"/>
                 <a:cs typeface="Inter" pitchFamily="34" charset="-120"/>
               </a:rPr>
-              <a:t>Nobody past 23:25 on a Sunday</a:t>
+              <a:t>Weeks on one turn, Monday to Friday</a:t>
+            </a:r>
+            <a:endParaRPr lang="en-US" sz="1400" dirty="0"/>
+          </a:p>
+        </p:txBody>
+      </p:sp>
+      <p:sp>
+        <p:nvSpPr>
+          <p:cNvPr id="24" name="Text 22"/>
+          <p:cNvSpPr txBox="1"/>
+          <p:nvPr/>
+        </p:nvSpPr>
+        <p:spPr>
+          <a:xfrm>
+            <a:off x="4663440" y="3630168"/>
+            <a:ext cx="2011680" cy="365760"/>
+          </a:xfrm>
+          <a:prstGeom prst="rect">
+            <a:avLst/>
+          </a:prstGeom>
+          <a:noFill/>
+          <a:ln/>
+        </p:spPr>
+        <p:txBody>
+          <a:bodyPr wrap="square" lIns="0" tIns="0" rIns="0" bIns="0" rtlCol="0" anchor="ctr"/>
+          <a:lstStyle/>
+          <a:p>
+            <a:pPr algn="ctr" indent="0" marL="0">
+              <a:buNone/>
+            </a:pPr>
+            <a:r>
+              <a:rPr lang="en-US" sz="1600" dirty="0">
+                <a:solidFill>
+                  <a:srgbClr val="5B6778"/>
+                </a:solidFill>
+                <a:latin typeface="Inter" pitchFamily="34" charset="0"/>
+                <a:ea typeface="Inter" pitchFamily="34" charset="-122"/>
+                <a:cs typeface="Inter" pitchFamily="34" charset="-120"/>
+              </a:rPr>
+              <a:t>7 of 16</a:t>
             </a:r>
             <a:endParaRPr lang="en-US" sz="1600" dirty="0"/>
           </a:p>
@@ -2822,46 +3247,46 @@
       </p:sp>
       <p:sp>
         <p:nvSpPr>
-          <p:cNvPr id="18" name="Text 13"/>
-          <p:cNvSpPr txBox="1"/>
-          <p:nvPr/>
-        </p:nvSpPr>
-        <p:spPr>
-          <a:xfrm>
-            <a:off x="6217920" y="2788920"/>
-            <a:ext cx="2240280" cy="1097280"/>
-          </a:xfrm>
-          <a:prstGeom prst="rect">
-            <a:avLst/>
-          </a:prstGeom>
-          <a:noFill/>
-          <a:ln/>
-        </p:spPr>
-        <p:txBody>
-          <a:bodyPr wrap="square" lIns="0" tIns="0" rIns="0" bIns="0" rtlCol="0" anchor="t"/>
-          <a:lstStyle/>
-          <a:p>
-            <a:pPr indent="0" marL="0">
-              <a:buNone/>
-            </a:pPr>
-            <a:r>
-              <a:rPr lang="en-US" sz="1300" dirty="0">
-                <a:solidFill>
-                  <a:srgbClr val="5B6778"/>
-                </a:solidFill>
-                <a:latin typeface="Inter" pitchFamily="34" charset="0"/>
-                <a:ea typeface="Inter" pitchFamily="34" charset="-122"/>
-                <a:cs typeface="Inter" pitchFamily="34" charset="-120"/>
-              </a:rPr>
-              <a:t>The Sunday finish stays where it is. That is agreed practice and will remain so.</a:t>
-            </a:r>
-            <a:endParaRPr lang="en-US" sz="1300" dirty="0"/>
-          </a:p>
-        </p:txBody>
-      </p:sp>
-      <p:sp>
-        <p:nvSpPr>
-          <p:cNvPr id="19" name="Shape 14"/>
+          <p:cNvPr id="25" name="Text 23"/>
+          <p:cNvSpPr txBox="1"/>
+          <p:nvPr/>
+        </p:nvSpPr>
+        <p:spPr>
+          <a:xfrm>
+            <a:off x="6675120" y="3630168"/>
+            <a:ext cx="2011680" cy="365760"/>
+          </a:xfrm>
+          <a:prstGeom prst="rect">
+            <a:avLst/>
+          </a:prstGeom>
+          <a:noFill/>
+          <a:ln/>
+        </p:spPr>
+        <p:txBody>
+          <a:bodyPr wrap="square" lIns="0" tIns="0" rIns="0" bIns="0" rtlCol="0" anchor="ctr"/>
+          <a:lstStyle/>
+          <a:p>
+            <a:pPr algn="ctr" indent="0" marL="0">
+              <a:buNone/>
+            </a:pPr>
+            <a:r>
+              <a:rPr lang="en-US" sz="1800" b="1" dirty="0">
+                <a:solidFill>
+                  <a:srgbClr val="1E7B4B"/>
+                </a:solidFill>
+                <a:latin typeface="Inter" pitchFamily="34" charset="0"/>
+                <a:ea typeface="Inter" pitchFamily="34" charset="-122"/>
+                <a:cs typeface="Inter" pitchFamily="34" charset="-120"/>
+              </a:rPr>
+              <a:t>14 of 20</a:t>
+            </a:r>
+            <a:endParaRPr lang="en-US" sz="1800" dirty="0"/>
+          </a:p>
+        </p:txBody>
+      </p:sp>
+      <p:sp>
+        <p:nvSpPr>
+          <p:cNvPr id="26" name="Shape 24"/>
           <p:cNvSpPr/>
           <p:nvPr/>
         </p:nvSpPr>
@@ -2888,7 +3313,7 @@
       </p:sp>
       <p:sp>
         <p:nvSpPr>
-          <p:cNvPr id="20" name="Text 15"/>
+          <p:cNvPr id="27" name="Text 25"/>
           <p:cNvSpPr txBox="1"/>
           <p:nvPr/>
         </p:nvSpPr>
@@ -2919,7 +3344,7 @@
                 <a:ea typeface="Inter" pitchFamily="34" charset="-122"/>
                 <a:cs typeface="Inter" pitchFamily="34" charset="-120"/>
               </a:rPr>
-              <a:t>No shift in the balance of earlies and lates. Sundays stay overtime and still finish at 23:25.</a:t>
+              <a:t>A weekend off one week in four, never more than six days on, and more rest.</a:t>
             </a:r>
             <a:endParaRPr lang="en-US" sz="1400" dirty="0"/>
           </a:p>
@@ -2927,7 +3352,7 @@
       </p:sp>
       <p:sp>
         <p:nvSpPr>
-          <p:cNvPr id="21" name="Text 16"/>
+          <p:cNvPr id="28" name="Text 26"/>
           <p:cNvSpPr txBox="1"/>
           <p:nvPr/>
         </p:nvSpPr>
@@ -3029,7 +3454,7 @@
                 <a:ea typeface="Inter" pitchFamily="34" charset="-122"/>
                 <a:cs typeface="Inter" pitchFamily="34" charset="-120"/>
               </a:rPr>
-              <a:t>Booking leave</a:t>
+              <a:t>Earlies, lates and Sundays</a:t>
             </a:r>
             <a:endParaRPr lang="en-US" sz="3000" dirty="0"/>
           </a:p>
@@ -3068,7 +3493,7 @@
                 <a:ea typeface="Inter" pitchFamily="34" charset="-122"/>
                 <a:cs typeface="Inter" pitchFamily="34" charset="-120"/>
               </a:rPr>
-              <a:t>What 14 days of annual leave buys you, with Sundays off</a:t>
+              <a:t>The balance you have now stays the same</a:t>
             </a:r>
             <a:endParaRPr lang="en-US" sz="1500" dirty="0"/>
           </a:p>
@@ -3076,96 +3501,18 @@
       </p:sp>
       <p:sp>
         <p:nvSpPr>
-          <p:cNvPr id="4" name="Text 2"/>
-          <p:cNvSpPr txBox="1"/>
-          <p:nvPr/>
-        </p:nvSpPr>
-        <p:spPr>
-          <a:xfrm>
-            <a:off x="4297680" y="1417320"/>
-            <a:ext cx="2194560" cy="320040"/>
-          </a:xfrm>
-          <a:prstGeom prst="rect">
-            <a:avLst/>
-          </a:prstGeom>
-          <a:noFill/>
-          <a:ln/>
-        </p:spPr>
-        <p:txBody>
-          <a:bodyPr wrap="square" lIns="0" tIns="0" rIns="0" bIns="0" rtlCol="0" anchor="ctr"/>
-          <a:lstStyle/>
-          <a:p>
-            <a:pPr algn="ctr" indent="0" marL="0">
-              <a:buNone/>
-            </a:pPr>
-            <a:r>
-              <a:rPr lang="en-US" sz="1300" b="1" dirty="0">
-                <a:solidFill>
-                  <a:srgbClr val="5B6778"/>
-                </a:solidFill>
-                <a:latin typeface="Inter" pitchFamily="34" charset="0"/>
-                <a:ea typeface="Inter" pitchFamily="34" charset="-122"/>
-                <a:cs typeface="Inter" pitchFamily="34" charset="-120"/>
-              </a:rPr>
-              <a:t>Today</a:t>
-            </a:r>
-            <a:endParaRPr lang="en-US" sz="1300" dirty="0"/>
-          </a:p>
-        </p:txBody>
-      </p:sp>
-      <p:sp>
-        <p:nvSpPr>
-          <p:cNvPr id="5" name="Text 3"/>
-          <p:cNvSpPr txBox="1"/>
-          <p:nvPr/>
-        </p:nvSpPr>
-        <p:spPr>
-          <a:xfrm>
-            <a:off x="6492240" y="1417320"/>
-            <a:ext cx="2194560" cy="320040"/>
-          </a:xfrm>
-          <a:prstGeom prst="rect">
-            <a:avLst/>
-          </a:prstGeom>
-          <a:noFill/>
-          <a:ln/>
-        </p:spPr>
-        <p:txBody>
-          <a:bodyPr wrap="square" lIns="0" tIns="0" rIns="0" bIns="0" rtlCol="0" anchor="ctr"/>
-          <a:lstStyle/>
-          <a:p>
-            <a:pPr algn="ctr" indent="0" marL="0">
-              <a:buNone/>
-            </a:pPr>
-            <a:r>
-              <a:rPr lang="en-US" sz="1300" b="1" dirty="0">
-                <a:solidFill>
-                  <a:srgbClr val="001E3C"/>
-                </a:solidFill>
-                <a:latin typeface="Inter" pitchFamily="34" charset="0"/>
-                <a:ea typeface="Inter" pitchFamily="34" charset="-122"/>
-                <a:cs typeface="Inter" pitchFamily="34" charset="-120"/>
-              </a:rPr>
-              <a:t>Right Away</a:t>
-            </a:r>
-            <a:endParaRPr lang="en-US" sz="1300" dirty="0"/>
-          </a:p>
-        </p:txBody>
-      </p:sp>
-      <p:sp>
-        <p:nvSpPr>
-          <p:cNvPr id="6" name="Shape 4"/>
+          <p:cNvPr id="4" name="Shape 2"/>
           <p:cNvSpPr/>
           <p:nvPr/>
         </p:nvSpPr>
         <p:spPr>
           <a:xfrm>
-            <a:off x="457200" y="1801368"/>
-            <a:ext cx="8229600" cy="475488"/>
+            <a:off x="457200" y="1417320"/>
+            <a:ext cx="2606040" cy="2514600"/>
           </a:xfrm>
           <a:prstGeom prst="roundRect">
             <a:avLst>
-              <a:gd name="adj" fmla="val 11538"/>
+              <a:gd name="adj" fmla="val 3636"/>
             </a:avLst>
           </a:prstGeom>
           <a:solidFill>
@@ -3181,158 +3528,63 @@
       </p:sp>
       <p:sp>
         <p:nvSpPr>
-          <p:cNvPr id="7" name="Text 5"/>
-          <p:cNvSpPr txBox="1"/>
-          <p:nvPr/>
-        </p:nvSpPr>
-        <p:spPr>
-          <a:xfrm>
-            <a:off x="640080" y="1801368"/>
-            <a:ext cx="3657600" cy="475488"/>
-          </a:xfrm>
-          <a:prstGeom prst="rect">
-            <a:avLst/>
-          </a:prstGeom>
-          <a:noFill/>
-          <a:ln/>
-        </p:spPr>
-        <p:txBody>
-          <a:bodyPr wrap="square" lIns="0" tIns="0" rIns="0" bIns="0" rtlCol="0" anchor="ctr"/>
-          <a:lstStyle/>
-          <a:p>
-            <a:pPr indent="0" marL="0">
-              <a:buNone/>
-            </a:pPr>
-            <a:r>
-              <a:rPr lang="en-US" sz="1400" dirty="0">
-                <a:solidFill>
-                  <a:srgbClr val="1B2533"/>
-                </a:solidFill>
-                <a:latin typeface="Inter" pitchFamily="34" charset="0"/>
-                <a:ea typeface="Inter" pitchFamily="34" charset="-122"/>
-                <a:cs typeface="Inter" pitchFamily="34" charset="-120"/>
-              </a:rPr>
-              <a:t>Days off in a row — best place to book</a:t>
-            </a:r>
-            <a:endParaRPr lang="en-US" sz="1400" dirty="0"/>
-          </a:p>
-        </p:txBody>
-      </p:sp>
-      <p:sp>
-        <p:nvSpPr>
-          <p:cNvPr id="8" name="Text 6"/>
-          <p:cNvSpPr txBox="1"/>
-          <p:nvPr/>
-        </p:nvSpPr>
-        <p:spPr>
-          <a:xfrm>
-            <a:off x="4297680" y="1801368"/>
-            <a:ext cx="2194560" cy="475488"/>
-          </a:xfrm>
-          <a:prstGeom prst="rect">
-            <a:avLst/>
-          </a:prstGeom>
-          <a:noFill/>
-          <a:ln/>
-        </p:spPr>
-        <p:txBody>
-          <a:bodyPr wrap="square" lIns="0" tIns="0" rIns="0" bIns="0" rtlCol="0" anchor="ctr"/>
-          <a:lstStyle/>
-          <a:p>
-            <a:pPr algn="ctr" indent="0" marL="0">
-              <a:buNone/>
-            </a:pPr>
-            <a:r>
-              <a:rPr lang="en-US" sz="1600" dirty="0">
-                <a:solidFill>
-                  <a:srgbClr val="5B6778"/>
-                </a:solidFill>
-                <a:latin typeface="Inter" pitchFamily="34" charset="0"/>
-                <a:ea typeface="Inter" pitchFamily="34" charset="-122"/>
-                <a:cs typeface="Inter" pitchFamily="34" charset="-120"/>
-              </a:rPr>
-              <a:t>30</a:t>
-            </a:r>
-            <a:endParaRPr lang="en-US" sz="1600" dirty="0"/>
-          </a:p>
-        </p:txBody>
-      </p:sp>
-      <p:sp>
-        <p:nvSpPr>
-          <p:cNvPr id="9" name="Text 7"/>
-          <p:cNvSpPr txBox="1"/>
-          <p:nvPr/>
-        </p:nvSpPr>
-        <p:spPr>
-          <a:xfrm>
-            <a:off x="6492240" y="1801368"/>
-            <a:ext cx="2194560" cy="475488"/>
-          </a:xfrm>
-          <a:prstGeom prst="rect">
-            <a:avLst/>
-          </a:prstGeom>
-          <a:noFill/>
-          <a:ln/>
-        </p:spPr>
-        <p:txBody>
-          <a:bodyPr wrap="square" lIns="0" tIns="0" rIns="0" bIns="0" rtlCol="0" anchor="ctr"/>
-          <a:lstStyle/>
-          <a:p>
-            <a:pPr algn="ctr" indent="0" marL="0">
-              <a:buNone/>
-            </a:pPr>
-            <a:r>
-              <a:rPr lang="en-US" sz="1800" b="1" dirty="0">
-                <a:solidFill>
-                  <a:srgbClr val="A15C00"/>
-                </a:solidFill>
-                <a:latin typeface="Inter" pitchFamily="34" charset="0"/>
-                <a:ea typeface="Inter" pitchFamily="34" charset="-122"/>
-                <a:cs typeface="Inter" pitchFamily="34" charset="-120"/>
-              </a:rPr>
-              <a:t>28</a:t>
-            </a:r>
-            <a:endParaRPr lang="en-US" sz="1800" dirty="0"/>
-          </a:p>
-        </p:txBody>
-      </p:sp>
-      <p:sp>
-        <p:nvSpPr>
-          <p:cNvPr id="10" name="Shape 8"/>
+          <p:cNvPr id="5" name="Shape 3"/>
           <p:cNvSpPr/>
           <p:nvPr/>
         </p:nvSpPr>
         <p:spPr>
           <a:xfrm>
-            <a:off x="457200" y="2368296"/>
-            <a:ext cx="8229600" cy="475488"/>
-          </a:xfrm>
-          <a:prstGeom prst="roundRect">
-            <a:avLst>
-              <a:gd name="adj" fmla="val 11538"/>
-            </a:avLst>
+            <a:off x="640080" y="1600200"/>
+            <a:ext cx="502920" cy="502920"/>
+          </a:xfrm>
+          <a:prstGeom prst="ellipse">
+            <a:avLst/>
           </a:prstGeom>
           <a:solidFill>
-            <a:srgbClr val="FFFFFF"/>
+            <a:srgbClr val="F5C800"/>
           </a:solidFill>
           <a:ln w="12700">
             <a:solidFill>
-              <a:srgbClr val="DDE3EA"/>
+              <a:srgbClr val="F5C800"/>
             </a:solidFill>
             <a:prstDash val="solid"/>
           </a:ln>
         </p:spPr>
       </p:sp>
-      <p:sp>
-        <p:nvSpPr>
-          <p:cNvPr id="11" name="Text 9"/>
-          <p:cNvSpPr txBox="1"/>
-          <p:nvPr/>
-        </p:nvSpPr>
-        <p:spPr>
-          <a:xfrm>
-            <a:off x="640080" y="2368296"/>
-            <a:ext cx="3657600" cy="475488"/>
+      <p:pic>
+        <p:nvPicPr>
+          <p:cNvPr id="6" name="Image 0" descr="preencoded.png">    </p:cNvPr>
+          <p:cNvPicPr>
+            <a:picLocks noChangeAspect="1"/>
+          </p:cNvPicPr>
+          <p:nvPr/>
+        </p:nvPicPr>
+        <p:blipFill>
+          <a:blip r:embed="rId1"/>
+          <a:stretch>
+            <a:fillRect/>
+          </a:stretch>
+        </p:blipFill>
+        <p:spPr>
+          <a:xfrm>
+            <a:off x="750722" y="1710842"/>
+            <a:ext cx="281635" cy="281635"/>
+          </a:xfrm>
+          <a:prstGeom prst="rect">
+            <a:avLst/>
+          </a:prstGeom>
+        </p:spPr>
+      </p:pic>
+      <p:sp>
+        <p:nvSpPr>
+          <p:cNvPr id="7" name="Text 4"/>
+          <p:cNvSpPr txBox="1"/>
+          <p:nvPr/>
+        </p:nvSpPr>
+        <p:spPr>
+          <a:xfrm>
+            <a:off x="640080" y="2240280"/>
+            <a:ext cx="2240280" cy="548640"/>
           </a:xfrm>
           <a:prstGeom prst="rect">
             <a:avLst/>
@@ -3348,7 +3600,7 @@
               <a:buNone/>
             </a:pPr>
             <a:r>
-              <a:rPr lang="en-US" sz="1400" dirty="0">
+              <a:rPr lang="en-US" sz="1600" b="1" dirty="0">
                 <a:solidFill>
                   <a:srgbClr val="1B2533"/>
                 </a:solidFill>
@@ -3356,38 +3608,38 @@
                 <a:ea typeface="Inter" pitchFamily="34" charset="-122"/>
                 <a:cs typeface="Inter" pitchFamily="34" charset="-120"/>
               </a:rPr>
-              <a:t>Days off in a row — on average</a:t>
-            </a:r>
-            <a:endParaRPr lang="en-US" sz="1400" dirty="0"/>
-          </a:p>
-        </p:txBody>
-      </p:sp>
-      <p:sp>
-        <p:nvSpPr>
-          <p:cNvPr id="12" name="Text 10"/>
-          <p:cNvSpPr txBox="1"/>
-          <p:nvPr/>
-        </p:nvSpPr>
-        <p:spPr>
-          <a:xfrm>
-            <a:off x="4297680" y="2368296"/>
-            <a:ext cx="2194560" cy="475488"/>
-          </a:xfrm>
-          <a:prstGeom prst="rect">
-            <a:avLst/>
-          </a:prstGeom>
-          <a:noFill/>
-          <a:ln/>
-        </p:spPr>
-        <p:txBody>
-          <a:bodyPr wrap="square" lIns="0" tIns="0" rIns="0" bIns="0" rtlCol="0" anchor="ctr"/>
-          <a:lstStyle/>
-          <a:p>
-            <a:pPr algn="ctr" indent="0" marL="0">
-              <a:buNone/>
-            </a:pPr>
-            <a:r>
-              <a:rPr lang="en-US" sz="1600" dirty="0">
+              <a:t>Half earlies, half lates</a:t>
+            </a:r>
+            <a:endParaRPr lang="en-US" sz="1600" dirty="0"/>
+          </a:p>
+        </p:txBody>
+      </p:sp>
+      <p:sp>
+        <p:nvSpPr>
+          <p:cNvPr id="8" name="Text 5"/>
+          <p:cNvSpPr txBox="1"/>
+          <p:nvPr/>
+        </p:nvSpPr>
+        <p:spPr>
+          <a:xfrm>
+            <a:off x="640080" y="2788920"/>
+            <a:ext cx="2240280" cy="1097280"/>
+          </a:xfrm>
+          <a:prstGeom prst="rect">
+            <a:avLst/>
+          </a:prstGeom>
+          <a:noFill/>
+          <a:ln/>
+        </p:spPr>
+        <p:txBody>
+          <a:bodyPr wrap="square" lIns="0" tIns="0" rIns="0" bIns="0" rtlCol="0" anchor="t"/>
+          <a:lstStyle/>
+          <a:p>
+            <a:pPr indent="0" marL="0">
+              <a:buNone/>
+            </a:pPr>
+            <a:r>
+              <a:rPr lang="en-US" sz="1300" dirty="0">
                 <a:solidFill>
                   <a:srgbClr val="5B6778"/>
                 </a:solidFill>
@@ -3395,65 +3647,26 @@
                 <a:ea typeface="Inter" pitchFamily="34" charset="-122"/>
                 <a:cs typeface="Inter" pitchFamily="34" charset="-120"/>
               </a:rPr>
-              <a:t>23.4</a:t>
-            </a:r>
-            <a:endParaRPr lang="en-US" sz="1600" dirty="0"/>
-          </a:p>
-        </p:txBody>
-      </p:sp>
-      <p:sp>
-        <p:nvSpPr>
-          <p:cNvPr id="13" name="Text 11"/>
-          <p:cNvSpPr txBox="1"/>
-          <p:nvPr/>
-        </p:nvSpPr>
-        <p:spPr>
-          <a:xfrm>
-            <a:off x="6492240" y="2368296"/>
-            <a:ext cx="2194560" cy="475488"/>
-          </a:xfrm>
-          <a:prstGeom prst="rect">
-            <a:avLst/>
-          </a:prstGeom>
-          <a:noFill/>
-          <a:ln/>
-        </p:spPr>
-        <p:txBody>
-          <a:bodyPr wrap="square" lIns="0" tIns="0" rIns="0" bIns="0" rtlCol="0" anchor="ctr"/>
-          <a:lstStyle/>
-          <a:p>
-            <a:pPr algn="ctr" indent="0" marL="0">
-              <a:buNone/>
-            </a:pPr>
-            <a:r>
-              <a:rPr lang="en-US" sz="1800" b="1" dirty="0">
-                <a:solidFill>
-                  <a:srgbClr val="001E3C"/>
-                </a:solidFill>
-                <a:latin typeface="Inter" pitchFamily="34" charset="0"/>
-                <a:ea typeface="Inter" pitchFamily="34" charset="-122"/>
-                <a:cs typeface="Inter" pitchFamily="34" charset="-120"/>
-              </a:rPr>
-              <a:t>23.6</a:t>
-            </a:r>
-            <a:endParaRPr lang="en-US" sz="1800" dirty="0"/>
-          </a:p>
-        </p:txBody>
-      </p:sp>
-      <p:sp>
-        <p:nvSpPr>
-          <p:cNvPr id="14" name="Shape 12"/>
+              <a:t>The same split as today: every early Monday to Saturday is matched by a late.</a:t>
+            </a:r>
+            <a:endParaRPr lang="en-US" sz="1300" dirty="0"/>
+          </a:p>
+        </p:txBody>
+      </p:sp>
+      <p:sp>
+        <p:nvSpPr>
+          <p:cNvPr id="9" name="Shape 6"/>
           <p:cNvSpPr/>
           <p:nvPr/>
         </p:nvSpPr>
         <p:spPr>
           <a:xfrm>
-            <a:off x="457200" y="2935224"/>
-            <a:ext cx="8229600" cy="475488"/>
+            <a:off x="3246120" y="1417320"/>
+            <a:ext cx="2606040" cy="2514600"/>
           </a:xfrm>
           <a:prstGeom prst="roundRect">
             <a:avLst>
-              <a:gd name="adj" fmla="val 11538"/>
+              <a:gd name="adj" fmla="val 3636"/>
             </a:avLst>
           </a:prstGeom>
           <a:solidFill>
@@ -3469,158 +3682,63 @@
       </p:sp>
       <p:sp>
         <p:nvSpPr>
-          <p:cNvPr id="15" name="Text 13"/>
-          <p:cNvSpPr txBox="1"/>
-          <p:nvPr/>
-        </p:nvSpPr>
-        <p:spPr>
-          <a:xfrm>
-            <a:off x="640080" y="2935224"/>
-            <a:ext cx="3657600" cy="475488"/>
-          </a:xfrm>
-          <a:prstGeom prst="rect">
-            <a:avLst/>
-          </a:prstGeom>
-          <a:noFill/>
-          <a:ln/>
-        </p:spPr>
-        <p:txBody>
-          <a:bodyPr wrap="square" lIns="0" tIns="0" rIns="0" bIns="0" rtlCol="0" anchor="ctr"/>
-          <a:lstStyle/>
-          <a:p>
-            <a:pPr indent="0" marL="0">
-              <a:buNone/>
-            </a:pPr>
-            <a:r>
-              <a:rPr lang="en-US" sz="1400" dirty="0">
-                <a:solidFill>
-                  <a:srgbClr val="1B2533"/>
-                </a:solidFill>
-                <a:latin typeface="Inter" pitchFamily="34" charset="0"/>
-                <a:ea typeface="Inter" pitchFamily="34" charset="-122"/>
-                <a:cs typeface="Inter" pitchFamily="34" charset="-120"/>
-              </a:rPr>
-              <a:t>Days off in a row — worst place</a:t>
-            </a:r>
-            <a:endParaRPr lang="en-US" sz="1400" dirty="0"/>
-          </a:p>
-        </p:txBody>
-      </p:sp>
-      <p:sp>
-        <p:nvSpPr>
-          <p:cNvPr id="16" name="Text 14"/>
-          <p:cNvSpPr txBox="1"/>
-          <p:nvPr/>
-        </p:nvSpPr>
-        <p:spPr>
-          <a:xfrm>
-            <a:off x="4297680" y="2935224"/>
-            <a:ext cx="2194560" cy="475488"/>
-          </a:xfrm>
-          <a:prstGeom prst="rect">
-            <a:avLst/>
-          </a:prstGeom>
-          <a:noFill/>
-          <a:ln/>
-        </p:spPr>
-        <p:txBody>
-          <a:bodyPr wrap="square" lIns="0" tIns="0" rIns="0" bIns="0" rtlCol="0" anchor="ctr"/>
-          <a:lstStyle/>
-          <a:p>
-            <a:pPr algn="ctr" indent="0" marL="0">
-              <a:buNone/>
-            </a:pPr>
-            <a:r>
-              <a:rPr lang="en-US" sz="1600" dirty="0">
-                <a:solidFill>
-                  <a:srgbClr val="5B6778"/>
-                </a:solidFill>
-                <a:latin typeface="Inter" pitchFamily="34" charset="0"/>
-                <a:ea typeface="Inter" pitchFamily="34" charset="-122"/>
-                <a:cs typeface="Inter" pitchFamily="34" charset="-120"/>
-              </a:rPr>
-              <a:t>19</a:t>
-            </a:r>
-            <a:endParaRPr lang="en-US" sz="1600" dirty="0"/>
-          </a:p>
-        </p:txBody>
-      </p:sp>
-      <p:sp>
-        <p:nvSpPr>
-          <p:cNvPr id="17" name="Text 15"/>
-          <p:cNvSpPr txBox="1"/>
-          <p:nvPr/>
-        </p:nvSpPr>
-        <p:spPr>
-          <a:xfrm>
-            <a:off x="6492240" y="2935224"/>
-            <a:ext cx="2194560" cy="475488"/>
-          </a:xfrm>
-          <a:prstGeom prst="rect">
-            <a:avLst/>
-          </a:prstGeom>
-          <a:noFill/>
-          <a:ln/>
-        </p:spPr>
-        <p:txBody>
-          <a:bodyPr wrap="square" lIns="0" tIns="0" rIns="0" bIns="0" rtlCol="0" anchor="ctr"/>
-          <a:lstStyle/>
-          <a:p>
-            <a:pPr algn="ctr" indent="0" marL="0">
-              <a:buNone/>
-            </a:pPr>
-            <a:r>
-              <a:rPr lang="en-US" sz="1800" b="1" dirty="0">
-                <a:solidFill>
-                  <a:srgbClr val="1E7B4B"/>
-                </a:solidFill>
-                <a:latin typeface="Inter" pitchFamily="34" charset="0"/>
-                <a:ea typeface="Inter" pitchFamily="34" charset="-122"/>
-                <a:cs typeface="Inter" pitchFamily="34" charset="-120"/>
-              </a:rPr>
-              <a:t>20</a:t>
-            </a:r>
-            <a:endParaRPr lang="en-US" sz="1800" dirty="0"/>
-          </a:p>
-        </p:txBody>
-      </p:sp>
-      <p:sp>
-        <p:nvSpPr>
-          <p:cNvPr id="18" name="Shape 16"/>
+          <p:cNvPr id="10" name="Shape 7"/>
           <p:cNvSpPr/>
           <p:nvPr/>
         </p:nvSpPr>
         <p:spPr>
           <a:xfrm>
-            <a:off x="457200" y="3502152"/>
-            <a:ext cx="8229600" cy="475488"/>
-          </a:xfrm>
-          <a:prstGeom prst="roundRect">
-            <a:avLst>
-              <a:gd name="adj" fmla="val 11538"/>
-            </a:avLst>
+            <a:off x="3429000" y="1600200"/>
+            <a:ext cx="502920" cy="502920"/>
+          </a:xfrm>
+          <a:prstGeom prst="ellipse">
+            <a:avLst/>
           </a:prstGeom>
           <a:solidFill>
-            <a:srgbClr val="FFFFFF"/>
+            <a:srgbClr val="F5C800"/>
           </a:solidFill>
           <a:ln w="12700">
             <a:solidFill>
-              <a:srgbClr val="DDE3EA"/>
+              <a:srgbClr val="F5C800"/>
             </a:solidFill>
             <a:prstDash val="solid"/>
           </a:ln>
         </p:spPr>
       </p:sp>
-      <p:sp>
-        <p:nvSpPr>
-          <p:cNvPr id="19" name="Text 17"/>
-          <p:cNvSpPr txBox="1"/>
-          <p:nvPr/>
-        </p:nvSpPr>
-        <p:spPr>
-          <a:xfrm>
-            <a:off x="640080" y="3502152"/>
-            <a:ext cx="3657600" cy="475488"/>
+      <p:pic>
+        <p:nvPicPr>
+          <p:cNvPr id="11" name="Image 1" descr="preencoded.png">    </p:cNvPr>
+          <p:cNvPicPr>
+            <a:picLocks noChangeAspect="1"/>
+          </p:cNvPicPr>
+          <p:nvPr/>
+        </p:nvPicPr>
+        <p:blipFill>
+          <a:blip r:embed="rId2"/>
+          <a:stretch>
+            <a:fillRect/>
+          </a:stretch>
+        </p:blipFill>
+        <p:spPr>
+          <a:xfrm>
+            <a:off x="3539642" y="1710842"/>
+            <a:ext cx="281635" cy="281635"/>
+          </a:xfrm>
+          <a:prstGeom prst="rect">
+            <a:avLst/>
+          </a:prstGeom>
+        </p:spPr>
+      </p:pic>
+      <p:sp>
+        <p:nvSpPr>
+          <p:cNvPr id="12" name="Text 8"/>
+          <p:cNvSpPr txBox="1"/>
+          <p:nvPr/>
+        </p:nvSpPr>
+        <p:spPr>
+          <a:xfrm>
+            <a:off x="3429000" y="2240280"/>
+            <a:ext cx="2240280" cy="548640"/>
           </a:xfrm>
           <a:prstGeom prst="rect">
             <a:avLst/>
@@ -3636,7 +3754,7 @@
               <a:buNone/>
             </a:pPr>
             <a:r>
-              <a:rPr lang="en-US" sz="1400" dirty="0">
+              <a:rPr lang="en-US" sz="1600" b="1" dirty="0">
                 <a:solidFill>
                   <a:srgbClr val="1B2533"/>
                 </a:solidFill>
@@ -3644,38 +3762,38 @@
                 <a:ea typeface="Inter" pitchFamily="34" charset="-122"/>
                 <a:cs typeface="Inter" pitchFamily="34" charset="-120"/>
               </a:rPr>
-              <a:t>Leave needed for four full weeks off</a:t>
-            </a:r>
-            <a:endParaRPr lang="en-US" sz="1400" dirty="0"/>
-          </a:p>
-        </p:txBody>
-      </p:sp>
-      <p:sp>
-        <p:nvSpPr>
-          <p:cNvPr id="20" name="Text 18"/>
-          <p:cNvSpPr txBox="1"/>
-          <p:nvPr/>
-        </p:nvSpPr>
-        <p:spPr>
-          <a:xfrm>
-            <a:off x="4297680" y="3502152"/>
-            <a:ext cx="2194560" cy="475488"/>
-          </a:xfrm>
-          <a:prstGeom prst="rect">
-            <a:avLst/>
-          </a:prstGeom>
-          <a:noFill/>
-          <a:ln/>
-        </p:spPr>
-        <p:txBody>
-          <a:bodyPr wrap="square" lIns="0" tIns="0" rIns="0" bIns="0" rtlCol="0" anchor="ctr"/>
-          <a:lstStyle/>
-          <a:p>
-            <a:pPr algn="ctr" indent="0" marL="0">
-              <a:buNone/>
-            </a:pPr>
-            <a:r>
-              <a:rPr lang="en-US" sz="1600" dirty="0">
+              <a:t>Sundays are still overtime</a:t>
+            </a:r>
+            <a:endParaRPr lang="en-US" sz="1600" dirty="0"/>
+          </a:p>
+        </p:txBody>
+      </p:sp>
+      <p:sp>
+        <p:nvSpPr>
+          <p:cNvPr id="13" name="Text 9"/>
+          <p:cNvSpPr txBox="1"/>
+          <p:nvPr/>
+        </p:nvSpPr>
+        <p:spPr>
+          <a:xfrm>
+            <a:off x="3429000" y="2788920"/>
+            <a:ext cx="2240280" cy="1097280"/>
+          </a:xfrm>
+          <a:prstGeom prst="rect">
+            <a:avLst/>
+          </a:prstGeom>
+          <a:noFill/>
+          <a:ln/>
+        </p:spPr>
+        <p:txBody>
+          <a:bodyPr wrap="square" lIns="0" tIns="0" rIns="0" bIns="0" rtlCol="0" anchor="t"/>
+          <a:lstStyle/>
+          <a:p>
+            <a:pPr indent="0" marL="0">
+              <a:buNone/>
+            </a:pPr>
+            <a:r>
+              <a:rPr lang="en-US" sz="1300" dirty="0">
                 <a:solidFill>
                   <a:srgbClr val="5B6778"/>
                 </a:solidFill>
@@ -3683,7 +3801,122 @@
                 <a:ea typeface="Inter" pitchFamily="34" charset="-122"/>
                 <a:cs typeface="Inter" pitchFamily="34" charset="-120"/>
               </a:rPr>
-              <a:t>14</a:t>
+              <a:t>Not part of the contract, same as now — and about the same number of Sundays as today.</a:t>
+            </a:r>
+            <a:endParaRPr lang="en-US" sz="1300" dirty="0"/>
+          </a:p>
+        </p:txBody>
+      </p:sp>
+      <p:sp>
+        <p:nvSpPr>
+          <p:cNvPr id="14" name="Shape 10"/>
+          <p:cNvSpPr/>
+          <p:nvPr/>
+        </p:nvSpPr>
+        <p:spPr>
+          <a:xfrm>
+            <a:off x="6035040" y="1417320"/>
+            <a:ext cx="2606040" cy="2514600"/>
+          </a:xfrm>
+          <a:prstGeom prst="roundRect">
+            <a:avLst>
+              <a:gd name="adj" fmla="val 3636"/>
+            </a:avLst>
+          </a:prstGeom>
+          <a:solidFill>
+            <a:srgbClr val="EEF2F7"/>
+          </a:solidFill>
+          <a:ln w="12700">
+            <a:solidFill>
+              <a:srgbClr val="EEF2F7"/>
+            </a:solidFill>
+            <a:prstDash val="solid"/>
+          </a:ln>
+        </p:spPr>
+      </p:sp>
+      <p:sp>
+        <p:nvSpPr>
+          <p:cNvPr id="15" name="Shape 11"/>
+          <p:cNvSpPr/>
+          <p:nvPr/>
+        </p:nvSpPr>
+        <p:spPr>
+          <a:xfrm>
+            <a:off x="6217920" y="1600200"/>
+            <a:ext cx="502920" cy="502920"/>
+          </a:xfrm>
+          <a:prstGeom prst="ellipse">
+            <a:avLst/>
+          </a:prstGeom>
+          <a:solidFill>
+            <a:srgbClr val="F5C800"/>
+          </a:solidFill>
+          <a:ln w="12700">
+            <a:solidFill>
+              <a:srgbClr val="F5C800"/>
+            </a:solidFill>
+            <a:prstDash val="solid"/>
+          </a:ln>
+        </p:spPr>
+      </p:sp>
+      <p:pic>
+        <p:nvPicPr>
+          <p:cNvPr id="16" name="Image 2" descr="preencoded.png">    </p:cNvPr>
+          <p:cNvPicPr>
+            <a:picLocks noChangeAspect="1"/>
+          </p:cNvPicPr>
+          <p:nvPr/>
+        </p:nvPicPr>
+        <p:blipFill>
+          <a:blip r:embed="rId3"/>
+          <a:stretch>
+            <a:fillRect/>
+          </a:stretch>
+        </p:blipFill>
+        <p:spPr>
+          <a:xfrm>
+            <a:off x="6328562" y="1710842"/>
+            <a:ext cx="281635" cy="281635"/>
+          </a:xfrm>
+          <a:prstGeom prst="rect">
+            <a:avLst/>
+          </a:prstGeom>
+        </p:spPr>
+      </p:pic>
+      <p:sp>
+        <p:nvSpPr>
+          <p:cNvPr id="17" name="Text 12"/>
+          <p:cNvSpPr txBox="1"/>
+          <p:nvPr/>
+        </p:nvSpPr>
+        <p:spPr>
+          <a:xfrm>
+            <a:off x="6217920" y="2240280"/>
+            <a:ext cx="2240280" cy="548640"/>
+          </a:xfrm>
+          <a:prstGeom prst="rect">
+            <a:avLst/>
+          </a:prstGeom>
+          <a:noFill/>
+          <a:ln/>
+        </p:spPr>
+        <p:txBody>
+          <a:bodyPr wrap="square" lIns="0" tIns="0" rIns="0" bIns="0" rtlCol="0" anchor="ctr"/>
+          <a:lstStyle/>
+          <a:p>
+            <a:pPr indent="0" marL="0">
+              <a:buNone/>
+            </a:pPr>
+            <a:r>
+              <a:rPr lang="en-US" sz="1600" b="1" dirty="0">
+                <a:solidFill>
+                  <a:srgbClr val="1B2533"/>
+                </a:solidFill>
+                <a:latin typeface="Inter" pitchFamily="34" charset="0"/>
+                <a:ea typeface="Inter" pitchFamily="34" charset="-122"/>
+                <a:cs typeface="Inter" pitchFamily="34" charset="-120"/>
+              </a:rPr>
+              <a:t>Nobody past 23:25 on a Sunday</a:t>
             </a:r>
             <a:endParaRPr lang="en-US" sz="1600" dirty="0"/>
           </a:p>
@@ -3691,46 +3924,46 @@
       </p:sp>
       <p:sp>
         <p:nvSpPr>
-          <p:cNvPr id="21" name="Text 19"/>
-          <p:cNvSpPr txBox="1"/>
-          <p:nvPr/>
-        </p:nvSpPr>
-        <p:spPr>
-          <a:xfrm>
-            <a:off x="6492240" y="3502152"/>
-            <a:ext cx="2194560" cy="475488"/>
-          </a:xfrm>
-          <a:prstGeom prst="rect">
-            <a:avLst/>
-          </a:prstGeom>
-          <a:noFill/>
-          <a:ln/>
-        </p:spPr>
-        <p:txBody>
-          <a:bodyPr wrap="square" lIns="0" tIns="0" rIns="0" bIns="0" rtlCol="0" anchor="ctr"/>
-          <a:lstStyle/>
-          <a:p>
-            <a:pPr algn="ctr" indent="0" marL="0">
-              <a:buNone/>
-            </a:pPr>
-            <a:r>
-              <a:rPr lang="en-US" sz="1800" b="1" dirty="0">
-                <a:solidFill>
-                  <a:srgbClr val="A15C00"/>
-                </a:solidFill>
-                <a:latin typeface="Inter" pitchFamily="34" charset="0"/>
-                <a:ea typeface="Inter" pitchFamily="34" charset="-122"/>
-                <a:cs typeface="Inter" pitchFamily="34" charset="-120"/>
-              </a:rPr>
-              <a:t>15</a:t>
-            </a:r>
-            <a:endParaRPr lang="en-US" sz="1800" dirty="0"/>
-          </a:p>
-        </p:txBody>
-      </p:sp>
-      <p:sp>
-        <p:nvSpPr>
-          <p:cNvPr id="22" name="Shape 20"/>
+          <p:cNvPr id="18" name="Text 13"/>
+          <p:cNvSpPr txBox="1"/>
+          <p:nvPr/>
+        </p:nvSpPr>
+        <p:spPr>
+          <a:xfrm>
+            <a:off x="6217920" y="2788920"/>
+            <a:ext cx="2240280" cy="1097280"/>
+          </a:xfrm>
+          <a:prstGeom prst="rect">
+            <a:avLst/>
+          </a:prstGeom>
+          <a:noFill/>
+          <a:ln/>
+        </p:spPr>
+        <p:txBody>
+          <a:bodyPr wrap="square" lIns="0" tIns="0" rIns="0" bIns="0" rtlCol="0" anchor="t"/>
+          <a:lstStyle/>
+          <a:p>
+            <a:pPr indent="0" marL="0">
+              <a:buNone/>
+            </a:pPr>
+            <a:r>
+              <a:rPr lang="en-US" sz="1300" dirty="0">
+                <a:solidFill>
+                  <a:srgbClr val="5B6778"/>
+                </a:solidFill>
+                <a:latin typeface="Inter" pitchFamily="34" charset="0"/>
+                <a:ea typeface="Inter" pitchFamily="34" charset="-122"/>
+                <a:cs typeface="Inter" pitchFamily="34" charset="-120"/>
+              </a:rPr>
+              <a:t>The Sunday finish stays where it is. That is agreed practice and will remain so.</a:t>
+            </a:r>
+            <a:endParaRPr lang="en-US" sz="1300" dirty="0"/>
+          </a:p>
+        </p:txBody>
+      </p:sp>
+      <p:sp>
+        <p:nvSpPr>
+          <p:cNvPr id="19" name="Shape 14"/>
           <p:cNvSpPr/>
           <p:nvPr/>
         </p:nvSpPr>
@@ -3757,7 +3990,7 @@
       </p:sp>
       <p:sp>
         <p:nvSpPr>
-          <p:cNvPr id="23" name="Text 21"/>
+          <p:cNvPr id="20" name="Text 15"/>
           <p:cNvSpPr txBox="1"/>
           <p:nvPr/>
         </p:nvSpPr>
@@ -3788,7 +4021,7 @@
                 <a:ea typeface="Inter" pitchFamily="34" charset="-122"/>
                 <a:cs typeface="Inter" pitchFamily="34" charset="-120"/>
               </a:rPr>
-              <a:t>About the same. A cover week still counts as 4 days of leave, exactly as now.</a:t>
+              <a:t>No shift in the balance of earlies and lates. Sundays stay overtime and still finish at 23:25.</a:t>
             </a:r>
             <a:endParaRPr lang="en-US" sz="1400" dirty="0"/>
           </a:p>
@@ -3796,7 +4029,7 @@
       </p:sp>
       <p:sp>
         <p:nvSpPr>
-          <p:cNvPr id="24" name="Text 22"/>
+          <p:cNvPr id="21" name="Text 16"/>
           <p:cNvSpPr txBox="1"/>
           <p:nvPr/>
         </p:nvSpPr>
@@ -3898,7 +4131,7 @@
                 <a:ea typeface="Inter" pitchFamily="34" charset="-122"/>
                 <a:cs typeface="Inter" pitchFamily="34" charset="-120"/>
               </a:rPr>
-              <a:t>More staff on the floor</a:t>
+              <a:t>Booking leave</a:t>
             </a:r>
             <a:endParaRPr lang="en-US" sz="3000" dirty="0"/>
           </a:p>
@@ -3937,7 +4170,7 @@
                 <a:ea typeface="Inter" pitchFamily="34" charset="-122"/>
                 <a:cs typeface="Inter" pitchFamily="34" charset="-120"/>
               </a:rPr>
-              <a:t>More people on duty with you, all day</a:t>
+              <a:t>What 14 days of annual leave buys you, with Sundays off</a:t>
             </a:r>
             <a:endParaRPr lang="en-US" sz="1500" dirty="0"/>
           </a:p>
@@ -4081,7 +4314,7 @@
                 <a:ea typeface="Inter" pitchFamily="34" charset="-122"/>
                 <a:cs typeface="Inter" pitchFamily="34" charset="-120"/>
               </a:rPr>
-              <a:t>On duty on a weekday</a:t>
+              <a:t>Days off in a row — best place to book</a:t>
             </a:r>
             <a:endParaRPr lang="en-US" sz="1400" dirty="0"/>
           </a:p>
@@ -4120,7 +4353,7 @@
                 <a:ea typeface="Inter" pitchFamily="34" charset="-122"/>
                 <a:cs typeface="Inter" pitchFamily="34" charset="-120"/>
               </a:rPr>
-              <a:t>11–12</a:t>
+              <a:t>30</a:t>
             </a:r>
             <a:endParaRPr lang="en-US" sz="1600" dirty="0"/>
           </a:p>
@@ -4153,13 +4386,13 @@
             <a:r>
               <a:rPr lang="en-US" sz="1800" b="1" dirty="0">
                 <a:solidFill>
-                  <a:srgbClr val="1E7B4B"/>
-                </a:solidFill>
-                <a:latin typeface="Inter" pitchFamily="34" charset="0"/>
-                <a:ea typeface="Inter" pitchFamily="34" charset="-122"/>
-                <a:cs typeface="Inter" pitchFamily="34" charset="-120"/>
-              </a:rPr>
-              <a:t>14</a:t>
+                  <a:srgbClr val="A15C00"/>
+                </a:solidFill>
+                <a:latin typeface="Inter" pitchFamily="34" charset="0"/>
+                <a:ea typeface="Inter" pitchFamily="34" charset="-122"/>
+                <a:cs typeface="Inter" pitchFamily="34" charset="-120"/>
+              </a:rPr>
+              <a:t>28</a:t>
             </a:r>
             <a:endParaRPr lang="en-US" sz="1800" dirty="0"/>
           </a:p>
@@ -4225,7 +4458,7 @@
                 <a:ea typeface="Inter" pitchFamily="34" charset="-122"/>
                 <a:cs typeface="Inter" pitchFamily="34" charset="-120"/>
               </a:rPr>
-              <a:t>On duty on a Saturday / Sunday</a:t>
+              <a:t>Days off in a row — on average</a:t>
             </a:r>
             <a:endParaRPr lang="en-US" sz="1400" dirty="0"/>
           </a:p>
@@ -4264,7 +4497,7 @@
                 <a:ea typeface="Inter" pitchFamily="34" charset="-122"/>
                 <a:cs typeface="Inter" pitchFamily="34" charset="-120"/>
               </a:rPr>
-              <a:t>10 / 8</a:t>
+              <a:t>23.4</a:t>
             </a:r>
             <a:endParaRPr lang="en-US" sz="1600" dirty="0"/>
           </a:p>
@@ -4297,13 +4530,13 @@
             <a:r>
               <a:rPr lang="en-US" sz="1800" b="1" dirty="0">
                 <a:solidFill>
-                  <a:srgbClr val="1E7B4B"/>
-                </a:solidFill>
-                <a:latin typeface="Inter" pitchFamily="34" charset="0"/>
-                <a:ea typeface="Inter" pitchFamily="34" charset="-122"/>
-                <a:cs typeface="Inter" pitchFamily="34" charset="-120"/>
-              </a:rPr>
-              <a:t>14 / 10</a:t>
+                  <a:srgbClr val="001E3C"/>
+                </a:solidFill>
+                <a:latin typeface="Inter" pitchFamily="34" charset="0"/>
+                <a:ea typeface="Inter" pitchFamily="34" charset="-122"/>
+                <a:cs typeface="Inter" pitchFamily="34" charset="-120"/>
+              </a:rPr>
+              <a:t>23.6</a:t>
             </a:r>
             <a:endParaRPr lang="en-US" sz="1800" dirty="0"/>
           </a:p>
@@ -4369,7 +4602,7 @@
                 <a:ea typeface="Inter" pitchFamily="34" charset="-122"/>
                 <a:cs typeface="Inter" pitchFamily="34" charset="-120"/>
               </a:rPr>
-              <a:t>Fewest ever on the station floor</a:t>
+              <a:t>Days off in a row — worst place</a:t>
             </a:r>
             <a:endParaRPr lang="en-US" sz="1400" dirty="0"/>
           </a:p>
@@ -4408,7 +4641,7 @@
                 <a:ea typeface="Inter" pitchFamily="34" charset="-122"/>
                 <a:cs typeface="Inter" pitchFamily="34" charset="-120"/>
               </a:rPr>
-              <a:t>2</a:t>
+              <a:t>19</a:t>
             </a:r>
             <a:endParaRPr lang="en-US" sz="1600" dirty="0"/>
           </a:p>
@@ -4447,7 +4680,7 @@
                 <a:ea typeface="Inter" pitchFamily="34" charset="-122"/>
                 <a:cs typeface="Inter" pitchFamily="34" charset="-120"/>
               </a:rPr>
-              <a:t>3</a:t>
+              <a:t>20</a:t>
             </a:r>
             <a:endParaRPr lang="en-US" sz="1800" dirty="0"/>
           </a:p>
@@ -4513,7 +4746,7 @@
                 <a:ea typeface="Inter" pitchFamily="34" charset="-122"/>
                 <a:cs typeface="Inter" pitchFamily="34" charset="-120"/>
               </a:rPr>
-              <a:t>Avoidable fatigue warnings in the rota</a:t>
+              <a:t>Leave needed for four full weeks off</a:t>
             </a:r>
             <a:endParaRPr lang="en-US" sz="1400" dirty="0"/>
           </a:p>
@@ -4552,7 +4785,7 @@
                 <a:ea typeface="Inter" pitchFamily="34" charset="-122"/>
                 <a:cs typeface="Inter" pitchFamily="34" charset="-120"/>
               </a:rPr>
-              <a:t>5</a:t>
+              <a:t>14</a:t>
             </a:r>
             <a:endParaRPr lang="en-US" sz="1600" dirty="0"/>
           </a:p>
@@ -4585,13 +4818,13 @@
             <a:r>
               <a:rPr lang="en-US" sz="1800" b="1" dirty="0">
                 <a:solidFill>
-                  <a:srgbClr val="1E7B4B"/>
-                </a:solidFill>
-                <a:latin typeface="Inter" pitchFamily="34" charset="0"/>
-                <a:ea typeface="Inter" pitchFamily="34" charset="-122"/>
-                <a:cs typeface="Inter" pitchFamily="34" charset="-120"/>
-              </a:rPr>
-              <a:t>0</a:t>
+                  <a:srgbClr val="A15C00"/>
+                </a:solidFill>
+                <a:latin typeface="Inter" pitchFamily="34" charset="0"/>
+                <a:ea typeface="Inter" pitchFamily="34" charset="-122"/>
+                <a:cs typeface="Inter" pitchFamily="34" charset="-120"/>
+              </a:rPr>
+              <a:t>15</a:t>
             </a:r>
             <a:endParaRPr lang="en-US" sz="1800" dirty="0"/>
           </a:p>
@@ -4657,7 +4890,7 @@
                 <a:ea typeface="Inter" pitchFamily="34" charset="-122"/>
                 <a:cs typeface="Inter" pitchFamily="34" charset="-120"/>
               </a:rPr>
-              <a:t>Never fewer than three on the floor, and no avoidable fatigue warnings.</a:t>
+              <a:t>About the same. A cover week still counts as 4 days of leave, exactly as now.</a:t>
             </a:r>
             <a:endParaRPr lang="en-US" sz="1400" dirty="0"/>
           </a:p>
@@ -4767,7 +5000,7 @@
                 <a:ea typeface="Inter" pitchFamily="34" charset="-122"/>
                 <a:cs typeface="Inter" pitchFamily="34" charset="-120"/>
               </a:rPr>
-              <a:t>The honest trade-offs</a:t>
+              <a:t>More staff on the floor</a:t>
             </a:r>
             <a:endParaRPr lang="en-US" sz="3000" dirty="0"/>
           </a:p>
@@ -4806,7 +5039,7 @@
                 <a:ea typeface="Inter" pitchFamily="34" charset="-122"/>
                 <a:cs typeface="Inter" pitchFamily="34" charset="-120"/>
               </a:rPr>
-              <a:t>Nothing is free — here is what it costs</a:t>
+              <a:t>More people on duty with you, all day</a:t>
             </a:r>
             <a:endParaRPr lang="en-US" sz="1500" dirty="0"/>
           </a:p>
@@ -4814,18 +5047,96 @@
       </p:sp>
       <p:sp>
         <p:nvSpPr>
-          <p:cNvPr id="4" name="Shape 2"/>
+          <p:cNvPr id="4" name="Text 2"/>
+          <p:cNvSpPr txBox="1"/>
+          <p:nvPr/>
+        </p:nvSpPr>
+        <p:spPr>
+          <a:xfrm>
+            <a:off x="4297680" y="1417320"/>
+            <a:ext cx="2194560" cy="320040"/>
+          </a:xfrm>
+          <a:prstGeom prst="rect">
+            <a:avLst/>
+          </a:prstGeom>
+          <a:noFill/>
+          <a:ln/>
+        </p:spPr>
+        <p:txBody>
+          <a:bodyPr wrap="square" lIns="0" tIns="0" rIns="0" bIns="0" rtlCol="0" anchor="ctr"/>
+          <a:lstStyle/>
+          <a:p>
+            <a:pPr algn="ctr" indent="0" marL="0">
+              <a:buNone/>
+            </a:pPr>
+            <a:r>
+              <a:rPr lang="en-US" sz="1300" b="1" dirty="0">
+                <a:solidFill>
+                  <a:srgbClr val="5B6778"/>
+                </a:solidFill>
+                <a:latin typeface="Inter" pitchFamily="34" charset="0"/>
+                <a:ea typeface="Inter" pitchFamily="34" charset="-122"/>
+                <a:cs typeface="Inter" pitchFamily="34" charset="-120"/>
+              </a:rPr>
+              <a:t>Today</a:t>
+            </a:r>
+            <a:endParaRPr lang="en-US" sz="1300" dirty="0"/>
+          </a:p>
+        </p:txBody>
+      </p:sp>
+      <p:sp>
+        <p:nvSpPr>
+          <p:cNvPr id="5" name="Text 3"/>
+          <p:cNvSpPr txBox="1"/>
+          <p:nvPr/>
+        </p:nvSpPr>
+        <p:spPr>
+          <a:xfrm>
+            <a:off x="6492240" y="1417320"/>
+            <a:ext cx="2194560" cy="320040"/>
+          </a:xfrm>
+          <a:prstGeom prst="rect">
+            <a:avLst/>
+          </a:prstGeom>
+          <a:noFill/>
+          <a:ln/>
+        </p:spPr>
+        <p:txBody>
+          <a:bodyPr wrap="square" lIns="0" tIns="0" rIns="0" bIns="0" rtlCol="0" anchor="ctr"/>
+          <a:lstStyle/>
+          <a:p>
+            <a:pPr algn="ctr" indent="0" marL="0">
+              <a:buNone/>
+            </a:pPr>
+            <a:r>
+              <a:rPr lang="en-US" sz="1300" b="1" dirty="0">
+                <a:solidFill>
+                  <a:srgbClr val="001E3C"/>
+                </a:solidFill>
+                <a:latin typeface="Inter" pitchFamily="34" charset="0"/>
+                <a:ea typeface="Inter" pitchFamily="34" charset="-122"/>
+                <a:cs typeface="Inter" pitchFamily="34" charset="-120"/>
+              </a:rPr>
+              <a:t>Right Away</a:t>
+            </a:r>
+            <a:endParaRPr lang="en-US" sz="1300" dirty="0"/>
+          </a:p>
+        </p:txBody>
+      </p:sp>
+      <p:sp>
+        <p:nvSpPr>
+          <p:cNvPr id="6" name="Shape 4"/>
           <p:cNvSpPr/>
           <p:nvPr/>
         </p:nvSpPr>
         <p:spPr>
           <a:xfrm>
-            <a:off x="457200" y="1371600"/>
-            <a:ext cx="4023360" cy="804672"/>
+            <a:off x="457200" y="1801368"/>
+            <a:ext cx="8229600" cy="475488"/>
           </a:xfrm>
           <a:prstGeom prst="roundRect">
             <a:avLst>
-              <a:gd name="adj" fmla="val 9091"/>
+              <a:gd name="adj" fmla="val 11538"/>
             </a:avLst>
           </a:prstGeom>
           <a:solidFill>
@@ -4841,14 +5152,14 @@
       </p:sp>
       <p:sp>
         <p:nvSpPr>
-          <p:cNvPr id="5" name="Text 3"/>
-          <p:cNvSpPr txBox="1"/>
-          <p:nvPr/>
-        </p:nvSpPr>
-        <p:spPr>
-          <a:xfrm>
-            <a:off x="640080" y="1444752"/>
-            <a:ext cx="3703320" cy="310896"/>
+          <p:cNvPr id="7" name="Text 5"/>
+          <p:cNvSpPr txBox="1"/>
+          <p:nvPr/>
+        </p:nvSpPr>
+        <p:spPr>
+          <a:xfrm>
+            <a:off x="640080" y="1801368"/>
+            <a:ext cx="3657600" cy="475488"/>
           </a:xfrm>
           <a:prstGeom prst="rect">
             <a:avLst/>
@@ -4864,7 +5175,7 @@
               <a:buNone/>
             </a:pPr>
             <a:r>
-              <a:rPr lang="en-US" sz="1400" b="1" dirty="0">
+              <a:rPr lang="en-US" sz="1400" dirty="0">
                 <a:solidFill>
                   <a:srgbClr val="1B2533"/>
                 </a:solidFill>
@@ -4872,7 +5183,7 @@
                 <a:ea typeface="Inter" pitchFamily="34" charset="-122"/>
                 <a:cs typeface="Inter" pitchFamily="34" charset="-120"/>
               </a:rPr>
-              <a:t>Twelve new shift times to learn</a:t>
+              <a:t>On duty on a weekday</a:t>
             </a:r>
             <a:endParaRPr lang="en-US" sz="1400" dirty="0"/>
           </a:p>
@@ -4880,30 +5191,30 @@
       </p:sp>
       <p:sp>
         <p:nvSpPr>
-          <p:cNvPr id="6" name="Text 4"/>
-          <p:cNvSpPr txBox="1"/>
-          <p:nvPr/>
-        </p:nvSpPr>
-        <p:spPr>
-          <a:xfrm>
-            <a:off x="640080" y="1755648"/>
-            <a:ext cx="3657600" cy="347472"/>
-          </a:xfrm>
-          <a:prstGeom prst="rect">
-            <a:avLst/>
-          </a:prstGeom>
-          <a:noFill/>
-          <a:ln/>
-        </p:spPr>
-        <p:txBody>
-          <a:bodyPr wrap="square" lIns="0" tIns="0" rIns="0" bIns="0" rtlCol="0" anchor="ctr"/>
-          <a:lstStyle/>
-          <a:p>
-            <a:pPr indent="0" marL="0">
-              <a:buNone/>
-            </a:pPr>
-            <a:r>
-              <a:rPr lang="en-US" sz="1250" dirty="0">
+          <p:cNvPr id="8" name="Text 6"/>
+          <p:cNvSpPr txBox="1"/>
+          <p:nvPr/>
+        </p:nvSpPr>
+        <p:spPr>
+          <a:xfrm>
+            <a:off x="4297680" y="1801368"/>
+            <a:ext cx="2194560" cy="475488"/>
+          </a:xfrm>
+          <a:prstGeom prst="rect">
+            <a:avLst/>
+          </a:prstGeom>
+          <a:noFill/>
+          <a:ln/>
+        </p:spPr>
+        <p:txBody>
+          <a:bodyPr wrap="square" lIns="0" tIns="0" rIns="0" bIns="0" rtlCol="0" anchor="ctr"/>
+          <a:lstStyle/>
+          <a:p>
+            <a:pPr algn="ctr" indent="0" marL="0">
+              <a:buNone/>
+            </a:pPr>
+            <a:r>
+              <a:rPr lang="en-US" sz="1600" dirty="0">
                 <a:solidFill>
                   <a:srgbClr val="5B6778"/>
                 </a:solidFill>
@@ -4911,26 +5222,209 @@
                 <a:ea typeface="Inter" pitchFamily="34" charset="-122"/>
                 <a:cs typeface="Inter" pitchFamily="34" charset="-120"/>
               </a:rPr>
-              <a:t>Five of today’s times stay — slide 8 lists the rest.</a:t>
-            </a:r>
-            <a:endParaRPr lang="en-US" sz="1250" dirty="0"/>
-          </a:p>
-        </p:txBody>
-      </p:sp>
-      <p:sp>
-        <p:nvSpPr>
-          <p:cNvPr id="7" name="Shape 5"/>
+              <a:t>11–12</a:t>
+            </a:r>
+            <a:endParaRPr lang="en-US" sz="1600" dirty="0"/>
+          </a:p>
+        </p:txBody>
+      </p:sp>
+      <p:sp>
+        <p:nvSpPr>
+          <p:cNvPr id="9" name="Text 7"/>
+          <p:cNvSpPr txBox="1"/>
+          <p:nvPr/>
+        </p:nvSpPr>
+        <p:spPr>
+          <a:xfrm>
+            <a:off x="6492240" y="1801368"/>
+            <a:ext cx="2194560" cy="475488"/>
+          </a:xfrm>
+          <a:prstGeom prst="rect">
+            <a:avLst/>
+          </a:prstGeom>
+          <a:noFill/>
+          <a:ln/>
+        </p:spPr>
+        <p:txBody>
+          <a:bodyPr wrap="square" lIns="0" tIns="0" rIns="0" bIns="0" rtlCol="0" anchor="ctr"/>
+          <a:lstStyle/>
+          <a:p>
+            <a:pPr algn="ctr" indent="0" marL="0">
+              <a:buNone/>
+            </a:pPr>
+            <a:r>
+              <a:rPr lang="en-US" sz="1800" b="1" dirty="0">
+                <a:solidFill>
+                  <a:srgbClr val="1E7B4B"/>
+                </a:solidFill>
+                <a:latin typeface="Inter" pitchFamily="34" charset="0"/>
+                <a:ea typeface="Inter" pitchFamily="34" charset="-122"/>
+                <a:cs typeface="Inter" pitchFamily="34" charset="-120"/>
+              </a:rPr>
+              <a:t>14</a:t>
+            </a:r>
+            <a:endParaRPr lang="en-US" sz="1800" dirty="0"/>
+          </a:p>
+        </p:txBody>
+      </p:sp>
+      <p:sp>
+        <p:nvSpPr>
+          <p:cNvPr id="10" name="Shape 8"/>
           <p:cNvSpPr/>
           <p:nvPr/>
         </p:nvSpPr>
         <p:spPr>
           <a:xfrm>
-            <a:off x="4663440" y="1371600"/>
-            <a:ext cx="4023360" cy="804672"/>
+            <a:off x="457200" y="2368296"/>
+            <a:ext cx="8229600" cy="475488"/>
           </a:xfrm>
           <a:prstGeom prst="roundRect">
             <a:avLst>
-              <a:gd name="adj" fmla="val 9091"/>
+              <a:gd name="adj" fmla="val 11538"/>
+            </a:avLst>
+          </a:prstGeom>
+          <a:solidFill>
+            <a:srgbClr val="FFFFFF"/>
+          </a:solidFill>
+          <a:ln w="12700">
+            <a:solidFill>
+              <a:srgbClr val="DDE3EA"/>
+            </a:solidFill>
+            <a:prstDash val="solid"/>
+          </a:ln>
+        </p:spPr>
+      </p:sp>
+      <p:sp>
+        <p:nvSpPr>
+          <p:cNvPr id="11" name="Text 9"/>
+          <p:cNvSpPr txBox="1"/>
+          <p:nvPr/>
+        </p:nvSpPr>
+        <p:spPr>
+          <a:xfrm>
+            <a:off x="640080" y="2368296"/>
+            <a:ext cx="3657600" cy="475488"/>
+          </a:xfrm>
+          <a:prstGeom prst="rect">
+            <a:avLst/>
+          </a:prstGeom>
+          <a:noFill/>
+          <a:ln/>
+        </p:spPr>
+        <p:txBody>
+          <a:bodyPr wrap="square" lIns="0" tIns="0" rIns="0" bIns="0" rtlCol="0" anchor="ctr"/>
+          <a:lstStyle/>
+          <a:p>
+            <a:pPr indent="0" marL="0">
+              <a:buNone/>
+            </a:pPr>
+            <a:r>
+              <a:rPr lang="en-US" sz="1400" dirty="0">
+                <a:solidFill>
+                  <a:srgbClr val="1B2533"/>
+                </a:solidFill>
+                <a:latin typeface="Inter" pitchFamily="34" charset="0"/>
+                <a:ea typeface="Inter" pitchFamily="34" charset="-122"/>
+                <a:cs typeface="Inter" pitchFamily="34" charset="-120"/>
+              </a:rPr>
+              <a:t>On duty on a Saturday / Sunday</a:t>
+            </a:r>
+            <a:endParaRPr lang="en-US" sz="1400" dirty="0"/>
+          </a:p>
+        </p:txBody>
+      </p:sp>
+      <p:sp>
+        <p:nvSpPr>
+          <p:cNvPr id="12" name="Text 10"/>
+          <p:cNvSpPr txBox="1"/>
+          <p:nvPr/>
+        </p:nvSpPr>
+        <p:spPr>
+          <a:xfrm>
+            <a:off x="4297680" y="2368296"/>
+            <a:ext cx="2194560" cy="475488"/>
+          </a:xfrm>
+          <a:prstGeom prst="rect">
+            <a:avLst/>
+          </a:prstGeom>
+          <a:noFill/>
+          <a:ln/>
+        </p:spPr>
+        <p:txBody>
+          <a:bodyPr wrap="square" lIns="0" tIns="0" rIns="0" bIns="0" rtlCol="0" anchor="ctr"/>
+          <a:lstStyle/>
+          <a:p>
+            <a:pPr algn="ctr" indent="0" marL="0">
+              <a:buNone/>
+            </a:pPr>
+            <a:r>
+              <a:rPr lang="en-US" sz="1600" dirty="0">
+                <a:solidFill>
+                  <a:srgbClr val="5B6778"/>
+                </a:solidFill>
+                <a:latin typeface="Inter" pitchFamily="34" charset="0"/>
+                <a:ea typeface="Inter" pitchFamily="34" charset="-122"/>
+                <a:cs typeface="Inter" pitchFamily="34" charset="-120"/>
+              </a:rPr>
+              <a:t>10 / 8</a:t>
+            </a:r>
+            <a:endParaRPr lang="en-US" sz="1600" dirty="0"/>
+          </a:p>
+        </p:txBody>
+      </p:sp>
+      <p:sp>
+        <p:nvSpPr>
+          <p:cNvPr id="13" name="Text 11"/>
+          <p:cNvSpPr txBox="1"/>
+          <p:nvPr/>
+        </p:nvSpPr>
+        <p:spPr>
+          <a:xfrm>
+            <a:off x="6492240" y="2368296"/>
+            <a:ext cx="2194560" cy="475488"/>
+          </a:xfrm>
+          <a:prstGeom prst="rect">
+            <a:avLst/>
+          </a:prstGeom>
+          <a:noFill/>
+          <a:ln/>
+        </p:spPr>
+        <p:txBody>
+          <a:bodyPr wrap="square" lIns="0" tIns="0" rIns="0" bIns="0" rtlCol="0" anchor="ctr"/>
+          <a:lstStyle/>
+          <a:p>
+            <a:pPr algn="ctr" indent="0" marL="0">
+              <a:buNone/>
+            </a:pPr>
+            <a:r>
+              <a:rPr lang="en-US" sz="1800" b="1" dirty="0">
+                <a:solidFill>
+                  <a:srgbClr val="1E7B4B"/>
+                </a:solidFill>
+                <a:latin typeface="Inter" pitchFamily="34" charset="0"/>
+                <a:ea typeface="Inter" pitchFamily="34" charset="-122"/>
+                <a:cs typeface="Inter" pitchFamily="34" charset="-120"/>
+              </a:rPr>
+              <a:t>14 / 10</a:t>
+            </a:r>
+            <a:endParaRPr lang="en-US" sz="1800" dirty="0"/>
+          </a:p>
+        </p:txBody>
+      </p:sp>
+      <p:sp>
+        <p:nvSpPr>
+          <p:cNvPr id="14" name="Shape 12"/>
+          <p:cNvSpPr/>
+          <p:nvPr/>
+        </p:nvSpPr>
+        <p:spPr>
+          <a:xfrm>
+            <a:off x="457200" y="2935224"/>
+            <a:ext cx="8229600" cy="475488"/>
+          </a:xfrm>
+          <a:prstGeom prst="roundRect">
+            <a:avLst>
+              <a:gd name="adj" fmla="val 11538"/>
             </a:avLst>
           </a:prstGeom>
           <a:solidFill>
@@ -4946,14 +5440,14 @@
       </p:sp>
       <p:sp>
         <p:nvSpPr>
-          <p:cNvPr id="8" name="Text 6"/>
-          <p:cNvSpPr txBox="1"/>
-          <p:nvPr/>
-        </p:nvSpPr>
-        <p:spPr>
-          <a:xfrm>
-            <a:off x="4846320" y="1444752"/>
-            <a:ext cx="3703320" cy="310896"/>
+          <p:cNvPr id="15" name="Text 13"/>
+          <p:cNvSpPr txBox="1"/>
+          <p:nvPr/>
+        </p:nvSpPr>
+        <p:spPr>
+          <a:xfrm>
+            <a:off x="640080" y="2935224"/>
+            <a:ext cx="3657600" cy="475488"/>
           </a:xfrm>
           <a:prstGeom prst="rect">
             <a:avLst/>
@@ -4969,7 +5463,7 @@
               <a:buNone/>
             </a:pPr>
             <a:r>
-              <a:rPr lang="en-US" sz="1400" b="1" dirty="0">
+              <a:rPr lang="en-US" sz="1400" dirty="0">
                 <a:solidFill>
                   <a:srgbClr val="1B2533"/>
                 </a:solidFill>
@@ -4977,7 +5471,7 @@
                 <a:ea typeface="Inter" pitchFamily="34" charset="-122"/>
                 <a:cs typeface="Inter" pitchFamily="34" charset="-120"/>
               </a:rPr>
-              <a:t>Some longer earlies</a:t>
+              <a:t>Fewest ever on the station floor</a:t>
             </a:r>
             <a:endParaRPr lang="en-US" sz="1400" dirty="0"/>
           </a:p>
@@ -4985,30 +5479,30 @@
       </p:sp>
       <p:sp>
         <p:nvSpPr>
-          <p:cNvPr id="9" name="Text 7"/>
-          <p:cNvSpPr txBox="1"/>
-          <p:nvPr/>
-        </p:nvSpPr>
-        <p:spPr>
-          <a:xfrm>
-            <a:off x="4846320" y="1755648"/>
-            <a:ext cx="3657600" cy="347472"/>
-          </a:xfrm>
-          <a:prstGeom prst="rect">
-            <a:avLst/>
-          </a:prstGeom>
-          <a:noFill/>
-          <a:ln/>
-        </p:spPr>
-        <p:txBody>
-          <a:bodyPr wrap="square" lIns="0" tIns="0" rIns="0" bIns="0" rtlCol="0" anchor="ctr"/>
-          <a:lstStyle/>
-          <a:p>
-            <a:pPr indent="0" marL="0">
-              <a:buNone/>
-            </a:pPr>
-            <a:r>
-              <a:rPr lang="en-US" sz="1250" dirty="0">
+          <p:cNvPr id="16" name="Text 14"/>
+          <p:cNvSpPr txBox="1"/>
+          <p:nvPr/>
+        </p:nvSpPr>
+        <p:spPr>
+          <a:xfrm>
+            <a:off x="4297680" y="2935224"/>
+            <a:ext cx="2194560" cy="475488"/>
+          </a:xfrm>
+          <a:prstGeom prst="rect">
+            <a:avLst/>
+          </a:prstGeom>
+          <a:noFill/>
+          <a:ln/>
+        </p:spPr>
+        <p:txBody>
+          <a:bodyPr wrap="square" lIns="0" tIns="0" rIns="0" bIns="0" rtlCol="0" anchor="ctr"/>
+          <a:lstStyle/>
+          <a:p>
+            <a:pPr algn="ctr" indent="0" marL="0">
+              <a:buNone/>
+            </a:pPr>
+            <a:r>
+              <a:rPr lang="en-US" sz="1600" dirty="0">
                 <a:solidFill>
                   <a:srgbClr val="5B6778"/>
                 </a:solidFill>
@@ -5016,34 +5510,73 @@
                 <a:ea typeface="Inter" pitchFamily="34" charset="-122"/>
                 <a:cs typeface="Inter" pitchFamily="34" charset="-120"/>
               </a:rPr>
-              <a:t>The longest shift is 9h 30m, a Saturday early (today 9h 10m).</a:t>
-            </a:r>
-            <a:endParaRPr lang="en-US" sz="1250" dirty="0"/>
-          </a:p>
-        </p:txBody>
-      </p:sp>
-      <p:sp>
-        <p:nvSpPr>
-          <p:cNvPr id="10" name="Shape 8"/>
+              <a:t>2</a:t>
+            </a:r>
+            <a:endParaRPr lang="en-US" sz="1600" dirty="0"/>
+          </a:p>
+        </p:txBody>
+      </p:sp>
+      <p:sp>
+        <p:nvSpPr>
+          <p:cNvPr id="17" name="Text 15"/>
+          <p:cNvSpPr txBox="1"/>
+          <p:nvPr/>
+        </p:nvSpPr>
+        <p:spPr>
+          <a:xfrm>
+            <a:off x="6492240" y="2935224"/>
+            <a:ext cx="2194560" cy="475488"/>
+          </a:xfrm>
+          <a:prstGeom prst="rect">
+            <a:avLst/>
+          </a:prstGeom>
+          <a:noFill/>
+          <a:ln/>
+        </p:spPr>
+        <p:txBody>
+          <a:bodyPr wrap="square" lIns="0" tIns="0" rIns="0" bIns="0" rtlCol="0" anchor="ctr"/>
+          <a:lstStyle/>
+          <a:p>
+            <a:pPr algn="ctr" indent="0" marL="0">
+              <a:buNone/>
+            </a:pPr>
+            <a:r>
+              <a:rPr lang="en-US" sz="1800" b="1" dirty="0">
+                <a:solidFill>
+                  <a:srgbClr val="1E7B4B"/>
+                </a:solidFill>
+                <a:latin typeface="Inter" pitchFamily="34" charset="0"/>
+                <a:ea typeface="Inter" pitchFamily="34" charset="-122"/>
+                <a:cs typeface="Inter" pitchFamily="34" charset="-120"/>
+              </a:rPr>
+              <a:t>3</a:t>
+            </a:r>
+            <a:endParaRPr lang="en-US" sz="1800" dirty="0"/>
+          </a:p>
+        </p:txBody>
+      </p:sp>
+      <p:sp>
+        <p:nvSpPr>
+          <p:cNvPr id="18" name="Shape 16"/>
           <p:cNvSpPr/>
           <p:nvPr/>
         </p:nvSpPr>
         <p:spPr>
           <a:xfrm>
-            <a:off x="457200" y="2286000"/>
-            <a:ext cx="4023360" cy="804672"/>
+            <a:off x="457200" y="3502152"/>
+            <a:ext cx="8229600" cy="475488"/>
           </a:xfrm>
           <a:prstGeom prst="roundRect">
             <a:avLst>
-              <a:gd name="adj" fmla="val 9091"/>
+              <a:gd name="adj" fmla="val 11538"/>
             </a:avLst>
           </a:prstGeom>
           <a:solidFill>
-            <a:srgbClr val="EEF2F7"/>
+            <a:srgbClr val="FFFFFF"/>
           </a:solidFill>
           <a:ln w="12700">
             <a:solidFill>
-              <a:srgbClr val="EEF2F7"/>
+              <a:srgbClr val="DDE3EA"/>
             </a:solidFill>
             <a:prstDash val="solid"/>
           </a:ln>
@@ -5051,14 +5584,14 @@
       </p:sp>
       <p:sp>
         <p:nvSpPr>
-          <p:cNvPr id="11" name="Text 9"/>
-          <p:cNvSpPr txBox="1"/>
-          <p:nvPr/>
-        </p:nvSpPr>
-        <p:spPr>
-          <a:xfrm>
-            <a:off x="640080" y="2359152"/>
-            <a:ext cx="3703320" cy="310896"/>
+          <p:cNvPr id="19" name="Text 17"/>
+          <p:cNvSpPr txBox="1"/>
+          <p:nvPr/>
+        </p:nvSpPr>
+        <p:spPr>
+          <a:xfrm>
+            <a:off x="640080" y="3502152"/>
+            <a:ext cx="3657600" cy="475488"/>
           </a:xfrm>
           <a:prstGeom prst="rect">
             <a:avLst/>
@@ -5074,7 +5607,7 @@
               <a:buNone/>
             </a:pPr>
             <a:r>
-              <a:rPr lang="en-US" sz="1400" b="1" dirty="0">
+              <a:rPr lang="en-US" sz="1400" dirty="0">
                 <a:solidFill>
                   <a:srgbClr val="1B2533"/>
                 </a:solidFill>
@@ -5082,7 +5615,7 @@
                 <a:ea typeface="Inter" pitchFamily="34" charset="-122"/>
                 <a:cs typeface="Inter" pitchFamily="34" charset="-120"/>
               </a:rPr>
-              <a:t>Best leave stretch: 28 days, not 30</a:t>
+              <a:t>Avoidable fatigue warnings in the fixed rota</a:t>
             </a:r>
             <a:endParaRPr lang="en-US" sz="1400" dirty="0"/>
           </a:p>
@@ -5090,30 +5623,30 @@
       </p:sp>
       <p:sp>
         <p:nvSpPr>
-          <p:cNvPr id="12" name="Text 10"/>
-          <p:cNvSpPr txBox="1"/>
-          <p:nvPr/>
-        </p:nvSpPr>
-        <p:spPr>
-          <a:xfrm>
-            <a:off x="640080" y="2670048"/>
-            <a:ext cx="3657600" cy="347472"/>
-          </a:xfrm>
-          <a:prstGeom prst="rect">
-            <a:avLst/>
-          </a:prstGeom>
-          <a:noFill/>
-          <a:ln/>
-        </p:spPr>
-        <p:txBody>
-          <a:bodyPr wrap="square" lIns="0" tIns="0" rIns="0" bIns="0" rtlCol="0" anchor="ctr"/>
-          <a:lstStyle/>
-          <a:p>
-            <a:pPr indent="0" marL="0">
-              <a:buNone/>
-            </a:pPr>
-            <a:r>
-              <a:rPr lang="en-US" sz="1250" dirty="0">
+          <p:cNvPr id="20" name="Text 18"/>
+          <p:cNvSpPr txBox="1"/>
+          <p:nvPr/>
+        </p:nvSpPr>
+        <p:spPr>
+          <a:xfrm>
+            <a:off x="4297680" y="3502152"/>
+            <a:ext cx="2194560" cy="475488"/>
+          </a:xfrm>
+          <a:prstGeom prst="rect">
+            <a:avLst/>
+          </a:prstGeom>
+          <a:noFill/>
+          <a:ln/>
+        </p:spPr>
+        <p:txBody>
+          <a:bodyPr wrap="square" lIns="0" tIns="0" rIns="0" bIns="0" rtlCol="0" anchor="ctr"/>
+          <a:lstStyle/>
+          <a:p>
+            <a:pPr algn="ctr" indent="0" marL="0">
+              <a:buNone/>
+            </a:pPr>
+            <a:r>
+              <a:rPr lang="en-US" sz="1600" dirty="0">
                 <a:solidFill>
                   <a:srgbClr val="5B6778"/>
                 </a:solidFill>
@@ -5121,34 +5654,73 @@
                 <a:ea typeface="Inter" pitchFamily="34" charset="-122"/>
                 <a:cs typeface="Inter" pitchFamily="34" charset="-120"/>
               </a:rPr>
-              <a:t>Average and worst: about the same as today.</a:t>
-            </a:r>
-            <a:endParaRPr lang="en-US" sz="1250" dirty="0"/>
-          </a:p>
-        </p:txBody>
-      </p:sp>
-      <p:sp>
-        <p:nvSpPr>
-          <p:cNvPr id="13" name="Shape 11"/>
+              <a:t>5</a:t>
+            </a:r>
+            <a:endParaRPr lang="en-US" sz="1600" dirty="0"/>
+          </a:p>
+        </p:txBody>
+      </p:sp>
+      <p:sp>
+        <p:nvSpPr>
+          <p:cNvPr id="21" name="Text 19"/>
+          <p:cNvSpPr txBox="1"/>
+          <p:nvPr/>
+        </p:nvSpPr>
+        <p:spPr>
+          <a:xfrm>
+            <a:off x="6492240" y="3502152"/>
+            <a:ext cx="2194560" cy="475488"/>
+          </a:xfrm>
+          <a:prstGeom prst="rect">
+            <a:avLst/>
+          </a:prstGeom>
+          <a:noFill/>
+          <a:ln/>
+        </p:spPr>
+        <p:txBody>
+          <a:bodyPr wrap="square" lIns="0" tIns="0" rIns="0" bIns="0" rtlCol="0" anchor="ctr"/>
+          <a:lstStyle/>
+          <a:p>
+            <a:pPr algn="ctr" indent="0" marL="0">
+              <a:buNone/>
+            </a:pPr>
+            <a:r>
+              <a:rPr lang="en-US" sz="1800" b="1" dirty="0">
+                <a:solidFill>
+                  <a:srgbClr val="1E7B4B"/>
+                </a:solidFill>
+                <a:latin typeface="Inter" pitchFamily="34" charset="0"/>
+                <a:ea typeface="Inter" pitchFamily="34" charset="-122"/>
+                <a:cs typeface="Inter" pitchFamily="34" charset="-120"/>
+              </a:rPr>
+              <a:t>0</a:t>
+            </a:r>
+            <a:endParaRPr lang="en-US" sz="1800" dirty="0"/>
+          </a:p>
+        </p:txBody>
+      </p:sp>
+      <p:sp>
+        <p:nvSpPr>
+          <p:cNvPr id="22" name="Shape 20"/>
           <p:cNvSpPr/>
           <p:nvPr/>
         </p:nvSpPr>
         <p:spPr>
           <a:xfrm>
-            <a:off x="4663440" y="2286000"/>
-            <a:ext cx="4023360" cy="804672"/>
+            <a:off x="457200" y="4160520"/>
+            <a:ext cx="8229600" cy="548640"/>
           </a:xfrm>
           <a:prstGeom prst="roundRect">
             <a:avLst>
-              <a:gd name="adj" fmla="val 9091"/>
+              <a:gd name="adj" fmla="val 16667"/>
             </a:avLst>
           </a:prstGeom>
           <a:solidFill>
-            <a:srgbClr val="EEF2F7"/>
+            <a:srgbClr val="001E3C"/>
           </a:solidFill>
           <a:ln w="12700">
             <a:solidFill>
-              <a:srgbClr val="EEF2F7"/>
+              <a:srgbClr val="001E3C"/>
             </a:solidFill>
             <a:prstDash val="solid"/>
           </a:ln>
@@ -5156,14 +5728,14 @@
       </p:sp>
       <p:sp>
         <p:nvSpPr>
-          <p:cNvPr id="14" name="Text 12"/>
-          <p:cNvSpPr txBox="1"/>
-          <p:nvPr/>
-        </p:nvSpPr>
-        <p:spPr>
-          <a:xfrm>
-            <a:off x="4846320" y="2359152"/>
-            <a:ext cx="3703320" cy="310896"/>
+          <p:cNvPr id="23" name="Text 21"/>
+          <p:cNvSpPr txBox="1"/>
+          <p:nvPr/>
+        </p:nvSpPr>
+        <p:spPr>
+          <a:xfrm>
+            <a:off x="640080" y="4160520"/>
+            <a:ext cx="7863840" cy="548640"/>
           </a:xfrm>
           <a:prstGeom prst="rect">
             <a:avLst/>
@@ -5181,13 +5753,13 @@
             <a:r>
               <a:rPr lang="en-US" sz="1400" b="1" dirty="0">
                 <a:solidFill>
-                  <a:srgbClr val="1B2533"/>
-                </a:solidFill>
-                <a:latin typeface="Inter" pitchFamily="34" charset="0"/>
-                <a:ea typeface="Inter" pitchFamily="34" charset="-122"/>
-                <a:cs typeface="Inter" pitchFamily="34" charset="-120"/>
-              </a:rPr>
-              <a:t>Shifts 6 minutes longer on average</a:t>
+                  <a:srgbClr val="FFFFFF"/>
+                </a:solidFill>
+                <a:latin typeface="Inter" pitchFamily="34" charset="0"/>
+                <a:ea typeface="Inter" pitchFamily="34" charset="-122"/>
+                <a:cs typeface="Inter" pitchFamily="34" charset="-120"/>
+              </a:rPr>
+              <a:t>Never fewer than three on the floor, and no avoidable fatigue warnings in the fixed rota.</a:t>
             </a:r>
             <a:endParaRPr lang="en-US" sz="1400" dirty="0"/>
           </a:p>
@@ -5195,256 +5767,7 @@
       </p:sp>
       <p:sp>
         <p:nvSpPr>
-          <p:cNvPr id="15" name="Text 13"/>
-          <p:cNvSpPr txBox="1"/>
-          <p:nvPr/>
-        </p:nvSpPr>
-        <p:spPr>
-          <a:xfrm>
-            <a:off x="4846320" y="2670048"/>
-            <a:ext cx="3657600" cy="347472"/>
-          </a:xfrm>
-          <a:prstGeom prst="rect">
-            <a:avLst/>
-          </a:prstGeom>
-          <a:noFill/>
-          <a:ln/>
-        </p:spPr>
-        <p:txBody>
-          <a:bodyPr wrap="square" lIns="0" tIns="0" rIns="0" bIns="0" rtlCol="0" anchor="ctr"/>
-          <a:lstStyle/>
-          <a:p>
-            <a:pPr indent="0" marL="0">
-              <a:buNone/>
-            </a:pPr>
-            <a:r>
-              <a:rPr lang="en-US" sz="1250" dirty="0">
-                <a:solidFill>
-                  <a:srgbClr val="5B6778"/>
-                </a:solidFill>
-                <a:latin typeface="Inter" pitchFamily="34" charset="0"/>
-                <a:ea typeface="Inter" pitchFamily="34" charset="-122"/>
-                <a:cs typeface="Inter" pitchFamily="34" charset="-120"/>
-              </a:rPr>
-              <a:t>That is what buys the two fewer days a year.</a:t>
-            </a:r>
-            <a:endParaRPr lang="en-US" sz="1250" dirty="0"/>
-          </a:p>
-        </p:txBody>
-      </p:sp>
-      <p:sp>
-        <p:nvSpPr>
-          <p:cNvPr id="16" name="Shape 14"/>
-          <p:cNvSpPr/>
-          <p:nvPr/>
-        </p:nvSpPr>
-        <p:spPr>
-          <a:xfrm>
-            <a:off x="457200" y="3200400"/>
-            <a:ext cx="4023360" cy="804672"/>
-          </a:xfrm>
-          <a:prstGeom prst="roundRect">
-            <a:avLst>
-              <a:gd name="adj" fmla="val 9091"/>
-            </a:avLst>
-          </a:prstGeom>
-          <a:solidFill>
-            <a:srgbClr val="EEF2F7"/>
-          </a:solidFill>
-          <a:ln w="12700">
-            <a:solidFill>
-              <a:srgbClr val="EEF2F7"/>
-            </a:solidFill>
-            <a:prstDash val="solid"/>
-          </a:ln>
-        </p:spPr>
-      </p:sp>
-      <p:sp>
-        <p:nvSpPr>
-          <p:cNvPr id="17" name="Text 15"/>
-          <p:cNvSpPr txBox="1"/>
-          <p:nvPr/>
-        </p:nvSpPr>
-        <p:spPr>
-          <a:xfrm>
-            <a:off x="640080" y="3273552"/>
-            <a:ext cx="3703320" cy="310896"/>
-          </a:xfrm>
-          <a:prstGeom prst="rect">
-            <a:avLst/>
-          </a:prstGeom>
-          <a:noFill/>
-          <a:ln/>
-        </p:spPr>
-        <p:txBody>
-          <a:bodyPr wrap="square" lIns="0" tIns="0" rIns="0" bIns="0" rtlCol="0" anchor="ctr"/>
-          <a:lstStyle/>
-          <a:p>
-            <a:pPr indent="0" marL="0">
-              <a:buNone/>
-            </a:pPr>
-            <a:r>
-              <a:rPr lang="en-US" sz="1400" b="1" dirty="0">
-                <a:solidFill>
-                  <a:srgbClr val="1B2533"/>
-                </a:solidFill>
-                <a:latin typeface="Inter" pitchFamily="34" charset="0"/>
-                <a:ea typeface="Inter" pitchFamily="34" charset="-122"/>
-                <a:cs typeface="Inter" pitchFamily="34" charset="-120"/>
-              </a:rPr>
-              <a:t>More late finishes</a:t>
-            </a:r>
-            <a:endParaRPr lang="en-US" sz="1400" dirty="0"/>
-          </a:p>
-        </p:txBody>
-      </p:sp>
-      <p:sp>
-        <p:nvSpPr>
-          <p:cNvPr id="18" name="Text 16"/>
-          <p:cNvSpPr txBox="1"/>
-          <p:nvPr/>
-        </p:nvSpPr>
-        <p:spPr>
-          <a:xfrm>
-            <a:off x="640080" y="3584448"/>
-            <a:ext cx="3657600" cy="347472"/>
-          </a:xfrm>
-          <a:prstGeom prst="rect">
-            <a:avLst/>
-          </a:prstGeom>
-          <a:noFill/>
-          <a:ln/>
-        </p:spPr>
-        <p:txBody>
-          <a:bodyPr wrap="square" lIns="0" tIns="0" rIns="0" bIns="0" rtlCol="0" anchor="ctr"/>
-          <a:lstStyle/>
-          <a:p>
-            <a:pPr indent="0" marL="0">
-              <a:buNone/>
-            </a:pPr>
-            <a:r>
-              <a:rPr lang="en-US" sz="1250" dirty="0">
-                <a:solidFill>
-                  <a:srgbClr val="5B6778"/>
-                </a:solidFill>
-                <a:latin typeface="Inter" pitchFamily="34" charset="0"/>
-                <a:ea typeface="Inter" pitchFamily="34" charset="-122"/>
-                <a:cs typeface="Inter" pitchFamily="34" charset="-120"/>
-              </a:rPr>
-              <a:t>About 59 a year each at 23:00 or later, against 39 today.</a:t>
-            </a:r>
-            <a:endParaRPr lang="en-US" sz="1250" dirty="0"/>
-          </a:p>
-        </p:txBody>
-      </p:sp>
-      <p:sp>
-        <p:nvSpPr>
-          <p:cNvPr id="19" name="Shape 17"/>
-          <p:cNvSpPr/>
-          <p:nvPr/>
-        </p:nvSpPr>
-        <p:spPr>
-          <a:xfrm>
-            <a:off x="4663440" y="3200400"/>
-            <a:ext cx="4023360" cy="804672"/>
-          </a:xfrm>
-          <a:prstGeom prst="roundRect">
-            <a:avLst>
-              <a:gd name="adj" fmla="val 9091"/>
-            </a:avLst>
-          </a:prstGeom>
-          <a:solidFill>
-            <a:srgbClr val="EEF2F7"/>
-          </a:solidFill>
-          <a:ln w="12700">
-            <a:solidFill>
-              <a:srgbClr val="EEF2F7"/>
-            </a:solidFill>
-            <a:prstDash val="solid"/>
-          </a:ln>
-        </p:spPr>
-      </p:sp>
-      <p:sp>
-        <p:nvSpPr>
-          <p:cNvPr id="20" name="Text 18"/>
-          <p:cNvSpPr txBox="1"/>
-          <p:nvPr/>
-        </p:nvSpPr>
-        <p:spPr>
-          <a:xfrm>
-            <a:off x="4846320" y="3273552"/>
-            <a:ext cx="3703320" cy="310896"/>
-          </a:xfrm>
-          <a:prstGeom prst="rect">
-            <a:avLst/>
-          </a:prstGeom>
-          <a:noFill/>
-          <a:ln/>
-        </p:spPr>
-        <p:txBody>
-          <a:bodyPr wrap="square" lIns="0" tIns="0" rIns="0" bIns="0" rtlCol="0" anchor="ctr"/>
-          <a:lstStyle/>
-          <a:p>
-            <a:pPr indent="0" marL="0">
-              <a:buNone/>
-            </a:pPr>
-            <a:r>
-              <a:rPr lang="en-US" sz="1400" b="1" dirty="0">
-                <a:solidFill>
-                  <a:srgbClr val="1B2533"/>
-                </a:solidFill>
-                <a:latin typeface="Inter" pitchFamily="34" charset="0"/>
-                <a:ea typeface="Inter" pitchFamily="34" charset="-122"/>
-                <a:cs typeface="Inter" pitchFamily="34" charset="-120"/>
-              </a:rPr>
-              <a:t>Still a proposal</a:t>
-            </a:r>
-            <a:endParaRPr lang="en-US" sz="1400" dirty="0"/>
-          </a:p>
-        </p:txBody>
-      </p:sp>
-      <p:sp>
-        <p:nvSpPr>
-          <p:cNvPr id="21" name="Text 19"/>
-          <p:cNvSpPr txBox="1"/>
-          <p:nvPr/>
-        </p:nvSpPr>
-        <p:spPr>
-          <a:xfrm>
-            <a:off x="4846320" y="3584448"/>
-            <a:ext cx="3657600" cy="347472"/>
-          </a:xfrm>
-          <a:prstGeom prst="rect">
-            <a:avLst/>
-          </a:prstGeom>
-          <a:noFill/>
-          <a:ln/>
-        </p:spPr>
-        <p:txBody>
-          <a:bodyPr wrap="square" lIns="0" tIns="0" rIns="0" bIns="0" rtlCol="0" anchor="ctr"/>
-          <a:lstStyle/>
-          <a:p>
-            <a:pPr indent="0" marL="0">
-              <a:buNone/>
-            </a:pPr>
-            <a:r>
-              <a:rPr lang="en-US" sz="1250" dirty="0">
-                <a:solidFill>
-                  <a:srgbClr val="5B6778"/>
-                </a:solidFill>
-                <a:latin typeface="Inter" pitchFamily="34" charset="0"/>
-                <a:ea typeface="Inter" pitchFamily="34" charset="-122"/>
-                <a:cs typeface="Inter" pitchFamily="34" charset="-120"/>
-              </a:rPr>
-              <a:t>Your views count before a link is chosen, and who goes on which line is not decided.</a:t>
-            </a:r>
-            <a:endParaRPr lang="en-US" sz="1250" dirty="0"/>
-          </a:p>
-        </p:txBody>
-      </p:sp>
-      <p:sp>
-        <p:nvSpPr>
-          <p:cNvPr id="22" name="Text 20"/>
+          <p:cNvPr id="24" name="Text 22"/>
           <p:cNvSpPr txBox="1"/>
           <p:nvPr/>
         </p:nvSpPr>
@@ -5546,7 +5869,7 @@
                 <a:ea typeface="Inter" pitchFamily="34" charset="-122"/>
                 <a:cs typeface="Inter" pitchFamily="34" charset="-120"/>
               </a:rPr>
-              <a:t>At a glance</a:t>
+              <a:t>The honest trade-offs</a:t>
             </a:r>
             <a:endParaRPr lang="en-US" sz="3000" dirty="0"/>
           </a:p>
@@ -5585,6 +5908,785 @@
                 <a:ea typeface="Inter" pitchFamily="34" charset="-122"/>
                 <a:cs typeface="Inter" pitchFamily="34" charset="-120"/>
               </a:rPr>
+              <a:t>Nothing is free — here is what it costs</a:t>
+            </a:r>
+            <a:endParaRPr lang="en-US" sz="1500" dirty="0"/>
+          </a:p>
+        </p:txBody>
+      </p:sp>
+      <p:sp>
+        <p:nvSpPr>
+          <p:cNvPr id="4" name="Shape 2"/>
+          <p:cNvSpPr/>
+          <p:nvPr/>
+        </p:nvSpPr>
+        <p:spPr>
+          <a:xfrm>
+            <a:off x="457200" y="1371600"/>
+            <a:ext cx="4023360" cy="804672"/>
+          </a:xfrm>
+          <a:prstGeom prst="roundRect">
+            <a:avLst>
+              <a:gd name="adj" fmla="val 9091"/>
+            </a:avLst>
+          </a:prstGeom>
+          <a:solidFill>
+            <a:srgbClr val="EEF2F7"/>
+          </a:solidFill>
+          <a:ln w="12700">
+            <a:solidFill>
+              <a:srgbClr val="EEF2F7"/>
+            </a:solidFill>
+            <a:prstDash val="solid"/>
+          </a:ln>
+        </p:spPr>
+      </p:sp>
+      <p:sp>
+        <p:nvSpPr>
+          <p:cNvPr id="5" name="Text 3"/>
+          <p:cNvSpPr txBox="1"/>
+          <p:nvPr/>
+        </p:nvSpPr>
+        <p:spPr>
+          <a:xfrm>
+            <a:off x="640080" y="1444752"/>
+            <a:ext cx="3703320" cy="310896"/>
+          </a:xfrm>
+          <a:prstGeom prst="rect">
+            <a:avLst/>
+          </a:prstGeom>
+          <a:noFill/>
+          <a:ln/>
+        </p:spPr>
+        <p:txBody>
+          <a:bodyPr wrap="square" lIns="0" tIns="0" rIns="0" bIns="0" rtlCol="0" anchor="ctr"/>
+          <a:lstStyle/>
+          <a:p>
+            <a:pPr indent="0" marL="0">
+              <a:buNone/>
+            </a:pPr>
+            <a:r>
+              <a:rPr lang="en-US" sz="1400" b="1" dirty="0">
+                <a:solidFill>
+                  <a:srgbClr val="1B2533"/>
+                </a:solidFill>
+                <a:latin typeface="Inter" pitchFamily="34" charset="0"/>
+                <a:ea typeface="Inter" pitchFamily="34" charset="-122"/>
+                <a:cs typeface="Inter" pitchFamily="34" charset="-120"/>
+              </a:rPr>
+              <a:t>Twelve new shift times to learn</a:t>
+            </a:r>
+            <a:endParaRPr lang="en-US" sz="1400" dirty="0"/>
+          </a:p>
+        </p:txBody>
+      </p:sp>
+      <p:sp>
+        <p:nvSpPr>
+          <p:cNvPr id="6" name="Text 4"/>
+          <p:cNvSpPr txBox="1"/>
+          <p:nvPr/>
+        </p:nvSpPr>
+        <p:spPr>
+          <a:xfrm>
+            <a:off x="640080" y="1755648"/>
+            <a:ext cx="3657600" cy="347472"/>
+          </a:xfrm>
+          <a:prstGeom prst="rect">
+            <a:avLst/>
+          </a:prstGeom>
+          <a:noFill/>
+          <a:ln/>
+        </p:spPr>
+        <p:txBody>
+          <a:bodyPr wrap="square" lIns="0" tIns="0" rIns="0" bIns="0" rtlCol="0" anchor="ctr"/>
+          <a:lstStyle/>
+          <a:p>
+            <a:pPr indent="0" marL="0">
+              <a:buNone/>
+            </a:pPr>
+            <a:r>
+              <a:rPr lang="en-US" sz="1250" dirty="0">
+                <a:solidFill>
+                  <a:srgbClr val="5B6778"/>
+                </a:solidFill>
+                <a:latin typeface="Inter" pitchFamily="34" charset="0"/>
+                <a:ea typeface="Inter" pitchFamily="34" charset="-122"/>
+                <a:cs typeface="Inter" pitchFamily="34" charset="-120"/>
+              </a:rPr>
+              <a:t>Five of today’s times stay — slide 9 lists the new.</a:t>
+            </a:r>
+            <a:endParaRPr lang="en-US" sz="1250" dirty="0"/>
+          </a:p>
+        </p:txBody>
+      </p:sp>
+      <p:sp>
+        <p:nvSpPr>
+          <p:cNvPr id="7" name="Shape 5"/>
+          <p:cNvSpPr/>
+          <p:nvPr/>
+        </p:nvSpPr>
+        <p:spPr>
+          <a:xfrm>
+            <a:off x="4663440" y="1371600"/>
+            <a:ext cx="4023360" cy="804672"/>
+          </a:xfrm>
+          <a:prstGeom prst="roundRect">
+            <a:avLst>
+              <a:gd name="adj" fmla="val 9091"/>
+            </a:avLst>
+          </a:prstGeom>
+          <a:solidFill>
+            <a:srgbClr val="EEF2F7"/>
+          </a:solidFill>
+          <a:ln w="12700">
+            <a:solidFill>
+              <a:srgbClr val="EEF2F7"/>
+            </a:solidFill>
+            <a:prstDash val="solid"/>
+          </a:ln>
+        </p:spPr>
+      </p:sp>
+      <p:sp>
+        <p:nvSpPr>
+          <p:cNvPr id="8" name="Text 6"/>
+          <p:cNvSpPr txBox="1"/>
+          <p:nvPr/>
+        </p:nvSpPr>
+        <p:spPr>
+          <a:xfrm>
+            <a:off x="4846320" y="1444752"/>
+            <a:ext cx="3703320" cy="310896"/>
+          </a:xfrm>
+          <a:prstGeom prst="rect">
+            <a:avLst/>
+          </a:prstGeom>
+          <a:noFill/>
+          <a:ln/>
+        </p:spPr>
+        <p:txBody>
+          <a:bodyPr wrap="square" lIns="0" tIns="0" rIns="0" bIns="0" rtlCol="0" anchor="ctr"/>
+          <a:lstStyle/>
+          <a:p>
+            <a:pPr indent="0" marL="0">
+              <a:buNone/>
+            </a:pPr>
+            <a:r>
+              <a:rPr lang="en-US" sz="1400" b="1" dirty="0">
+                <a:solidFill>
+                  <a:srgbClr val="1B2533"/>
+                </a:solidFill>
+                <a:latin typeface="Inter" pitchFamily="34" charset="0"/>
+                <a:ea typeface="Inter" pitchFamily="34" charset="-122"/>
+                <a:cs typeface="Inter" pitchFamily="34" charset="-120"/>
+              </a:rPr>
+              <a:t>Some longer earlies</a:t>
+            </a:r>
+            <a:endParaRPr lang="en-US" sz="1400" dirty="0"/>
+          </a:p>
+        </p:txBody>
+      </p:sp>
+      <p:sp>
+        <p:nvSpPr>
+          <p:cNvPr id="9" name="Text 7"/>
+          <p:cNvSpPr txBox="1"/>
+          <p:nvPr/>
+        </p:nvSpPr>
+        <p:spPr>
+          <a:xfrm>
+            <a:off x="4846320" y="1755648"/>
+            <a:ext cx="3657600" cy="347472"/>
+          </a:xfrm>
+          <a:prstGeom prst="rect">
+            <a:avLst/>
+          </a:prstGeom>
+          <a:noFill/>
+          <a:ln/>
+        </p:spPr>
+        <p:txBody>
+          <a:bodyPr wrap="square" lIns="0" tIns="0" rIns="0" bIns="0" rtlCol="0" anchor="ctr"/>
+          <a:lstStyle/>
+          <a:p>
+            <a:pPr indent="0" marL="0">
+              <a:buNone/>
+            </a:pPr>
+            <a:r>
+              <a:rPr lang="en-US" sz="1250" dirty="0">
+                <a:solidFill>
+                  <a:srgbClr val="5B6778"/>
+                </a:solidFill>
+                <a:latin typeface="Inter" pitchFamily="34" charset="0"/>
+                <a:ea typeface="Inter" pitchFamily="34" charset="-122"/>
+                <a:cs typeface="Inter" pitchFamily="34" charset="-120"/>
+              </a:rPr>
+              <a:t>The longest shift is 9h 30m, a Saturday early (today 9h 10m).</a:t>
+            </a:r>
+            <a:endParaRPr lang="en-US" sz="1250" dirty="0"/>
+          </a:p>
+        </p:txBody>
+      </p:sp>
+      <p:sp>
+        <p:nvSpPr>
+          <p:cNvPr id="10" name="Shape 8"/>
+          <p:cNvSpPr/>
+          <p:nvPr/>
+        </p:nvSpPr>
+        <p:spPr>
+          <a:xfrm>
+            <a:off x="457200" y="2286000"/>
+            <a:ext cx="4023360" cy="804672"/>
+          </a:xfrm>
+          <a:prstGeom prst="roundRect">
+            <a:avLst>
+              <a:gd name="adj" fmla="val 9091"/>
+            </a:avLst>
+          </a:prstGeom>
+          <a:solidFill>
+            <a:srgbClr val="EEF2F7"/>
+          </a:solidFill>
+          <a:ln w="12700">
+            <a:solidFill>
+              <a:srgbClr val="EEF2F7"/>
+            </a:solidFill>
+            <a:prstDash val="solid"/>
+          </a:ln>
+        </p:spPr>
+      </p:sp>
+      <p:sp>
+        <p:nvSpPr>
+          <p:cNvPr id="11" name="Text 9"/>
+          <p:cNvSpPr txBox="1"/>
+          <p:nvPr/>
+        </p:nvSpPr>
+        <p:spPr>
+          <a:xfrm>
+            <a:off x="640080" y="2359152"/>
+            <a:ext cx="3703320" cy="310896"/>
+          </a:xfrm>
+          <a:prstGeom prst="rect">
+            <a:avLst/>
+          </a:prstGeom>
+          <a:noFill/>
+          <a:ln/>
+        </p:spPr>
+        <p:txBody>
+          <a:bodyPr wrap="square" lIns="0" tIns="0" rIns="0" bIns="0" rtlCol="0" anchor="ctr"/>
+          <a:lstStyle/>
+          <a:p>
+            <a:pPr indent="0" marL="0">
+              <a:buNone/>
+            </a:pPr>
+            <a:r>
+              <a:rPr lang="en-US" sz="1400" b="1" dirty="0">
+                <a:solidFill>
+                  <a:srgbClr val="1B2533"/>
+                </a:solidFill>
+                <a:latin typeface="Inter" pitchFamily="34" charset="0"/>
+                <a:ea typeface="Inter" pitchFamily="34" charset="-122"/>
+                <a:cs typeface="Inter" pitchFamily="34" charset="-120"/>
+              </a:rPr>
+              <a:t>Best leave stretch: 28 days, not 30</a:t>
+            </a:r>
+            <a:endParaRPr lang="en-US" sz="1400" dirty="0"/>
+          </a:p>
+        </p:txBody>
+      </p:sp>
+      <p:sp>
+        <p:nvSpPr>
+          <p:cNvPr id="12" name="Text 10"/>
+          <p:cNvSpPr txBox="1"/>
+          <p:nvPr/>
+        </p:nvSpPr>
+        <p:spPr>
+          <a:xfrm>
+            <a:off x="640080" y="2670048"/>
+            <a:ext cx="3657600" cy="347472"/>
+          </a:xfrm>
+          <a:prstGeom prst="rect">
+            <a:avLst/>
+          </a:prstGeom>
+          <a:noFill/>
+          <a:ln/>
+        </p:spPr>
+        <p:txBody>
+          <a:bodyPr wrap="square" lIns="0" tIns="0" rIns="0" bIns="0" rtlCol="0" anchor="ctr"/>
+          <a:lstStyle/>
+          <a:p>
+            <a:pPr indent="0" marL="0">
+              <a:buNone/>
+            </a:pPr>
+            <a:r>
+              <a:rPr lang="en-US" sz="1250" dirty="0">
+                <a:solidFill>
+                  <a:srgbClr val="5B6778"/>
+                </a:solidFill>
+                <a:latin typeface="Inter" pitchFamily="34" charset="0"/>
+                <a:ea typeface="Inter" pitchFamily="34" charset="-122"/>
+                <a:cs typeface="Inter" pitchFamily="34" charset="-120"/>
+              </a:rPr>
+              <a:t>Average and worst: about the same as today.</a:t>
+            </a:r>
+            <a:endParaRPr lang="en-US" sz="1250" dirty="0"/>
+          </a:p>
+        </p:txBody>
+      </p:sp>
+      <p:sp>
+        <p:nvSpPr>
+          <p:cNvPr id="13" name="Shape 11"/>
+          <p:cNvSpPr/>
+          <p:nvPr/>
+        </p:nvSpPr>
+        <p:spPr>
+          <a:xfrm>
+            <a:off x="4663440" y="2286000"/>
+            <a:ext cx="4023360" cy="804672"/>
+          </a:xfrm>
+          <a:prstGeom prst="roundRect">
+            <a:avLst>
+              <a:gd name="adj" fmla="val 9091"/>
+            </a:avLst>
+          </a:prstGeom>
+          <a:solidFill>
+            <a:srgbClr val="EEF2F7"/>
+          </a:solidFill>
+          <a:ln w="12700">
+            <a:solidFill>
+              <a:srgbClr val="EEF2F7"/>
+            </a:solidFill>
+            <a:prstDash val="solid"/>
+          </a:ln>
+        </p:spPr>
+      </p:sp>
+      <p:sp>
+        <p:nvSpPr>
+          <p:cNvPr id="14" name="Text 12"/>
+          <p:cNvSpPr txBox="1"/>
+          <p:nvPr/>
+        </p:nvSpPr>
+        <p:spPr>
+          <a:xfrm>
+            <a:off x="4846320" y="2359152"/>
+            <a:ext cx="3703320" cy="310896"/>
+          </a:xfrm>
+          <a:prstGeom prst="rect">
+            <a:avLst/>
+          </a:prstGeom>
+          <a:noFill/>
+          <a:ln/>
+        </p:spPr>
+        <p:txBody>
+          <a:bodyPr wrap="square" lIns="0" tIns="0" rIns="0" bIns="0" rtlCol="0" anchor="ctr"/>
+          <a:lstStyle/>
+          <a:p>
+            <a:pPr indent="0" marL="0">
+              <a:buNone/>
+            </a:pPr>
+            <a:r>
+              <a:rPr lang="en-US" sz="1400" b="1" dirty="0">
+                <a:solidFill>
+                  <a:srgbClr val="1B2533"/>
+                </a:solidFill>
+                <a:latin typeface="Inter" pitchFamily="34" charset="0"/>
+                <a:ea typeface="Inter" pitchFamily="34" charset="-122"/>
+                <a:cs typeface="Inter" pitchFamily="34" charset="-120"/>
+              </a:rPr>
+              <a:t>Shifts 6 minutes longer on average</a:t>
+            </a:r>
+            <a:endParaRPr lang="en-US" sz="1400" dirty="0"/>
+          </a:p>
+        </p:txBody>
+      </p:sp>
+      <p:sp>
+        <p:nvSpPr>
+          <p:cNvPr id="15" name="Text 13"/>
+          <p:cNvSpPr txBox="1"/>
+          <p:nvPr/>
+        </p:nvSpPr>
+        <p:spPr>
+          <a:xfrm>
+            <a:off x="4846320" y="2670048"/>
+            <a:ext cx="3657600" cy="347472"/>
+          </a:xfrm>
+          <a:prstGeom prst="rect">
+            <a:avLst/>
+          </a:prstGeom>
+          <a:noFill/>
+          <a:ln/>
+        </p:spPr>
+        <p:txBody>
+          <a:bodyPr wrap="square" lIns="0" tIns="0" rIns="0" bIns="0" rtlCol="0" anchor="ctr"/>
+          <a:lstStyle/>
+          <a:p>
+            <a:pPr indent="0" marL="0">
+              <a:buNone/>
+            </a:pPr>
+            <a:r>
+              <a:rPr lang="en-US" sz="1250" dirty="0">
+                <a:solidFill>
+                  <a:srgbClr val="5B6778"/>
+                </a:solidFill>
+                <a:latin typeface="Inter" pitchFamily="34" charset="0"/>
+                <a:ea typeface="Inter" pitchFamily="34" charset="-122"/>
+                <a:cs typeface="Inter" pitchFamily="34" charset="-120"/>
+              </a:rPr>
+              <a:t>That is what buys two fewer contracted days.</a:t>
+            </a:r>
+            <a:endParaRPr lang="en-US" sz="1250" dirty="0"/>
+          </a:p>
+        </p:txBody>
+      </p:sp>
+      <p:sp>
+        <p:nvSpPr>
+          <p:cNvPr id="16" name="Shape 14"/>
+          <p:cNvSpPr/>
+          <p:nvPr/>
+        </p:nvSpPr>
+        <p:spPr>
+          <a:xfrm>
+            <a:off x="457200" y="3200400"/>
+            <a:ext cx="4023360" cy="804672"/>
+          </a:xfrm>
+          <a:prstGeom prst="roundRect">
+            <a:avLst>
+              <a:gd name="adj" fmla="val 9091"/>
+            </a:avLst>
+          </a:prstGeom>
+          <a:solidFill>
+            <a:srgbClr val="EEF2F7"/>
+          </a:solidFill>
+          <a:ln w="12700">
+            <a:solidFill>
+              <a:srgbClr val="EEF2F7"/>
+            </a:solidFill>
+            <a:prstDash val="solid"/>
+          </a:ln>
+        </p:spPr>
+      </p:sp>
+      <p:sp>
+        <p:nvSpPr>
+          <p:cNvPr id="17" name="Text 15"/>
+          <p:cNvSpPr txBox="1"/>
+          <p:nvPr/>
+        </p:nvSpPr>
+        <p:spPr>
+          <a:xfrm>
+            <a:off x="640080" y="3273552"/>
+            <a:ext cx="3703320" cy="310896"/>
+          </a:xfrm>
+          <a:prstGeom prst="rect">
+            <a:avLst/>
+          </a:prstGeom>
+          <a:noFill/>
+          <a:ln/>
+        </p:spPr>
+        <p:txBody>
+          <a:bodyPr wrap="square" lIns="0" tIns="0" rIns="0" bIns="0" rtlCol="0" anchor="ctr"/>
+          <a:lstStyle/>
+          <a:p>
+            <a:pPr indent="0" marL="0">
+              <a:buNone/>
+            </a:pPr>
+            <a:r>
+              <a:rPr lang="en-US" sz="1400" b="1" dirty="0">
+                <a:solidFill>
+                  <a:srgbClr val="1B2533"/>
+                </a:solidFill>
+                <a:latin typeface="Inter" pitchFamily="34" charset="0"/>
+                <a:ea typeface="Inter" pitchFamily="34" charset="-122"/>
+                <a:cs typeface="Inter" pitchFamily="34" charset="-120"/>
+              </a:rPr>
+              <a:t>More late finishes</a:t>
+            </a:r>
+            <a:endParaRPr lang="en-US" sz="1400" dirty="0"/>
+          </a:p>
+        </p:txBody>
+      </p:sp>
+      <p:sp>
+        <p:nvSpPr>
+          <p:cNvPr id="18" name="Text 16"/>
+          <p:cNvSpPr txBox="1"/>
+          <p:nvPr/>
+        </p:nvSpPr>
+        <p:spPr>
+          <a:xfrm>
+            <a:off x="640080" y="3584448"/>
+            <a:ext cx="3657600" cy="347472"/>
+          </a:xfrm>
+          <a:prstGeom prst="rect">
+            <a:avLst/>
+          </a:prstGeom>
+          <a:noFill/>
+          <a:ln/>
+        </p:spPr>
+        <p:txBody>
+          <a:bodyPr wrap="square" lIns="0" tIns="0" rIns="0" bIns="0" rtlCol="0" anchor="ctr"/>
+          <a:lstStyle/>
+          <a:p>
+            <a:pPr indent="0" marL="0">
+              <a:buNone/>
+            </a:pPr>
+            <a:r>
+              <a:rPr lang="en-US" sz="1250" dirty="0">
+                <a:solidFill>
+                  <a:srgbClr val="5B6778"/>
+                </a:solidFill>
+                <a:latin typeface="Inter" pitchFamily="34" charset="0"/>
+                <a:ea typeface="Inter" pitchFamily="34" charset="-122"/>
+                <a:cs typeface="Inter" pitchFamily="34" charset="-120"/>
+              </a:rPr>
+              <a:t>About 59 a year each at 23:00 or later, against 39 today.</a:t>
+            </a:r>
+            <a:endParaRPr lang="en-US" sz="1250" dirty="0"/>
+          </a:p>
+        </p:txBody>
+      </p:sp>
+      <p:sp>
+        <p:nvSpPr>
+          <p:cNvPr id="19" name="Shape 17"/>
+          <p:cNvSpPr/>
+          <p:nvPr/>
+        </p:nvSpPr>
+        <p:spPr>
+          <a:xfrm>
+            <a:off x="4663440" y="3200400"/>
+            <a:ext cx="4023360" cy="804672"/>
+          </a:xfrm>
+          <a:prstGeom prst="roundRect">
+            <a:avLst>
+              <a:gd name="adj" fmla="val 9091"/>
+            </a:avLst>
+          </a:prstGeom>
+          <a:solidFill>
+            <a:srgbClr val="EEF2F7"/>
+          </a:solidFill>
+          <a:ln w="12700">
+            <a:solidFill>
+              <a:srgbClr val="EEF2F7"/>
+            </a:solidFill>
+            <a:prstDash val="solid"/>
+          </a:ln>
+        </p:spPr>
+      </p:sp>
+      <p:sp>
+        <p:nvSpPr>
+          <p:cNvPr id="20" name="Text 18"/>
+          <p:cNvSpPr txBox="1"/>
+          <p:nvPr/>
+        </p:nvSpPr>
+        <p:spPr>
+          <a:xfrm>
+            <a:off x="4846320" y="3273552"/>
+            <a:ext cx="3703320" cy="310896"/>
+          </a:xfrm>
+          <a:prstGeom prst="rect">
+            <a:avLst/>
+          </a:prstGeom>
+          <a:noFill/>
+          <a:ln/>
+        </p:spPr>
+        <p:txBody>
+          <a:bodyPr wrap="square" lIns="0" tIns="0" rIns="0" bIns="0" rtlCol="0" anchor="ctr"/>
+          <a:lstStyle/>
+          <a:p>
+            <a:pPr indent="0" marL="0">
+              <a:buNone/>
+            </a:pPr>
+            <a:r>
+              <a:rPr lang="en-US" sz="1400" b="1" dirty="0">
+                <a:solidFill>
+                  <a:srgbClr val="1B2533"/>
+                </a:solidFill>
+                <a:latin typeface="Inter" pitchFamily="34" charset="0"/>
+                <a:ea typeface="Inter" pitchFamily="34" charset="-122"/>
+                <a:cs typeface="Inter" pitchFamily="34" charset="-120"/>
+              </a:rPr>
+              <a:t>Still a proposal</a:t>
+            </a:r>
+            <a:endParaRPr lang="en-US" sz="1400" dirty="0"/>
+          </a:p>
+        </p:txBody>
+      </p:sp>
+      <p:sp>
+        <p:nvSpPr>
+          <p:cNvPr id="21" name="Text 19"/>
+          <p:cNvSpPr txBox="1"/>
+          <p:nvPr/>
+        </p:nvSpPr>
+        <p:spPr>
+          <a:xfrm>
+            <a:off x="4846320" y="3584448"/>
+            <a:ext cx="3657600" cy="347472"/>
+          </a:xfrm>
+          <a:prstGeom prst="rect">
+            <a:avLst/>
+          </a:prstGeom>
+          <a:noFill/>
+          <a:ln/>
+        </p:spPr>
+        <p:txBody>
+          <a:bodyPr wrap="square" lIns="0" tIns="0" rIns="0" bIns="0" rtlCol="0" anchor="ctr"/>
+          <a:lstStyle/>
+          <a:p>
+            <a:pPr indent="0" marL="0">
+              <a:buNone/>
+            </a:pPr>
+            <a:r>
+              <a:rPr lang="en-US" sz="1250" dirty="0">
+                <a:solidFill>
+                  <a:srgbClr val="5B6778"/>
+                </a:solidFill>
+                <a:latin typeface="Inter" pitchFamily="34" charset="0"/>
+                <a:ea typeface="Inter" pitchFamily="34" charset="-122"/>
+                <a:cs typeface="Inter" pitchFamily="34" charset="-120"/>
+              </a:rPr>
+              <a:t>Your views count before a link is chosen, and who goes on which line is not decided.</a:t>
+            </a:r>
+            <a:endParaRPr lang="en-US" sz="1250" dirty="0"/>
+          </a:p>
+        </p:txBody>
+      </p:sp>
+      <p:sp>
+        <p:nvSpPr>
+          <p:cNvPr id="22" name="Text 20"/>
+          <p:cNvSpPr txBox="1"/>
+          <p:nvPr/>
+        </p:nvSpPr>
+        <p:spPr>
+          <a:xfrm>
+            <a:off x="457200" y="4800600"/>
+            <a:ext cx="8229600" cy="228600"/>
+          </a:xfrm>
+          <a:prstGeom prst="rect">
+            <a:avLst/>
+          </a:prstGeom>
+          <a:noFill/>
+          <a:ln/>
+        </p:spPr>
+        <p:txBody>
+          <a:bodyPr wrap="square" lIns="0" tIns="0" rIns="0" bIns="0" rtlCol="0" anchor="ctr"/>
+          <a:lstStyle/>
+          <a:p>
+            <a:pPr indent="0" marL="0">
+              <a:buNone/>
+            </a:pPr>
+            <a:r>
+              <a:rPr lang="en-US" sz="900" dirty="0">
+                <a:solidFill>
+                  <a:srgbClr val="5B6778"/>
+                </a:solidFill>
+                <a:latin typeface="Inter" pitchFamily="34" charset="0"/>
+                <a:ea typeface="Inter" pitchFamily="34" charset="-122"/>
+                <a:cs typeface="Inter" pitchFamily="34" charset="-120"/>
+              </a:rPr>
+              <a:t>Right Away · December 2026 link proposal · 14</a:t>
+            </a:r>
+            <a:endParaRPr lang="en-US" sz="900" dirty="0"/>
+          </a:p>
+        </p:txBody>
+      </p:sp>
+    </p:spTree>
+  </p:cSld>
+  <p:clrMapOvr>
+    <a:masterClrMapping/>
+  </p:clrMapOvr>
+</p:sld>
+</file>
+
+<file path=ppt/slides/slide15.xml><?xml version="1.0" encoding="utf-8"?>
+<p:sld xmlns:a="http://schemas.openxmlformats.org/drawingml/2006/main" xmlns:r="http://schemas.openxmlformats.org/officeDocument/2006/relationships" xmlns:p="http://schemas.openxmlformats.org/presentationml/2006/main">
+  <p:cSld name="Slide 15">
+    <p:bg>
+      <p:bgPr>
+        <a:solidFill>
+          <a:srgbClr val="FFFFFF"/>
+        </a:solidFill>
+      </p:bgPr>
+    </p:bg>
+    <p:spTree>
+      <p:nvGrpSpPr>
+        <p:cNvPr id="1" name=""/>
+        <p:cNvGrpSpPr/>
+        <p:nvPr/>
+      </p:nvGrpSpPr>
+      <p:grpSpPr>
+        <a:xfrm>
+          <a:off x="0" y="0"/>
+          <a:ext cx="0" cy="0"/>
+          <a:chOff x="0" y="0"/>
+          <a:chExt cx="0" cy="0"/>
+        </a:xfrm>
+      </p:grpSpPr>
+      <p:sp>
+        <p:nvSpPr>
+          <p:cNvPr id="2" name="Text 0"/>
+          <p:cNvSpPr txBox="1"/>
+          <p:nvPr/>
+        </p:nvSpPr>
+        <p:spPr>
+          <a:xfrm>
+            <a:off x="457200" y="274320"/>
+            <a:ext cx="8229600" cy="594360"/>
+          </a:xfrm>
+          <a:prstGeom prst="rect">
+            <a:avLst/>
+          </a:prstGeom>
+          <a:noFill/>
+          <a:ln/>
+        </p:spPr>
+        <p:txBody>
+          <a:bodyPr wrap="square" lIns="0" tIns="0" rIns="0" bIns="0" rtlCol="0" anchor="ctr"/>
+          <a:lstStyle/>
+          <a:p>
+            <a:pPr indent="0" marL="0">
+              <a:buNone/>
+            </a:pPr>
+            <a:r>
+              <a:rPr lang="en-US" sz="3000" b="1" dirty="0">
+                <a:solidFill>
+                  <a:srgbClr val="001E3C"/>
+                </a:solidFill>
+                <a:latin typeface="Inter" pitchFamily="34" charset="0"/>
+                <a:ea typeface="Inter" pitchFamily="34" charset="-122"/>
+                <a:cs typeface="Inter" pitchFamily="34" charset="-120"/>
+              </a:rPr>
+              <a:t>At a glance</a:t>
+            </a:r>
+            <a:endParaRPr lang="en-US" sz="3000" dirty="0"/>
+          </a:p>
+        </p:txBody>
+      </p:sp>
+      <p:sp>
+        <p:nvSpPr>
+          <p:cNvPr id="3" name="Text 1"/>
+          <p:cNvSpPr txBox="1"/>
+          <p:nvPr/>
+        </p:nvSpPr>
+        <p:spPr>
+          <a:xfrm>
+            <a:off x="457200" y="868680"/>
+            <a:ext cx="8229600" cy="365760"/>
+          </a:xfrm>
+          <a:prstGeom prst="rect">
+            <a:avLst/>
+          </a:prstGeom>
+          <a:noFill/>
+          <a:ln/>
+        </p:spPr>
+        <p:txBody>
+          <a:bodyPr wrap="square" lIns="0" tIns="0" rIns="0" bIns="0" rtlCol="0" anchor="ctr"/>
+          <a:lstStyle/>
+          <a:p>
+            <a:pPr indent="0" marL="0">
+              <a:buNone/>
+            </a:pPr>
+            <a:r>
+              <a:rPr lang="en-US" sz="1500" dirty="0">
+                <a:solidFill>
+                  <a:srgbClr val="5B6778"/>
+                </a:solidFill>
+                <a:latin typeface="Inter" pitchFamily="34" charset="0"/>
+                <a:ea typeface="Inter" pitchFamily="34" charset="-122"/>
+                <a:cs typeface="Inter" pitchFamily="34" charset="-120"/>
+              </a:rPr>
               <a:t>Today’s roster and Right Away, side by side</a:t>
             </a:r>
             <a:endParaRPr lang="en-US" sz="1500" dirty="0"/>
@@ -5593,7 +6695,7 @@
       </p:sp>
       <p:graphicFrame>
         <p:nvGraphicFramePr>
-          <p:cNvPr id="15" name="Table 0"/>
+          <p:cNvPr id="16" name="Table 0"/>
           <p:cNvGraphicFramePr>
             <a:graphicFrameLocks noGrp="1"/>
           </p:cNvGraphicFramePr>
@@ -7685,7 +8787,7 @@
                           <a:ea typeface="Inter" pitchFamily="34" charset="-122"/>
                           <a:cs typeface="Inter" pitchFamily="34" charset="-120"/>
                         </a:rPr>
-                        <a:t>Avoidable fatigue warnings in the rota</a:t>
+                        <a:t>Avoidable fatigue warnings in the fixed rota</a:t>
                       </a:r>
                       <a:endParaRPr lang="en-US" sz="1200" dirty="0">
                         <a:latin typeface="Inter" charset="0"/>
@@ -7937,7 +9039,7 @@
                 <a:ea typeface="Inter" pitchFamily="34" charset="-122"/>
                 <a:cs typeface="Inter" pitchFamily="34" charset="-120"/>
               </a:rPr>
-              <a:t>Same hours, fewer days, shorter closers, more weekends — and more colleagues on shift.</a:t>
+              <a:t>Same hours, fewer contracted days, shorter closers, more weekends, more colleagues.</a:t>
             </a:r>
             <a:endParaRPr lang="en-US" sz="1400" dirty="0"/>
           </a:p>
@@ -7976,7 +9078,7 @@
                 <a:ea typeface="Inter" pitchFamily="34" charset="-122"/>
                 <a:cs typeface="Inter" pitchFamily="34" charset="-120"/>
               </a:rPr>
-              <a:t>Right Away · December 2026 link proposal · 14</a:t>
+              <a:t>Right Away · December 2026 link proposal · 15</a:t>
             </a:r>
             <a:endParaRPr lang="en-US" sz="900" dirty="0"/>
           </a:p>
@@ -7990,9 +9092,9 @@
 </p:sld>
 </file>
 
-<file path=ppt/slides/slide15.xml><?xml version="1.0" encoding="utf-8"?>
+<file path=ppt/slides/slide16.xml><?xml version="1.0" encoding="utf-8"?>
 <p:sld xmlns:a="http://schemas.openxmlformats.org/drawingml/2006/main" xmlns:r="http://schemas.openxmlformats.org/officeDocument/2006/relationships" xmlns:p="http://schemas.openxmlformats.org/presentationml/2006/main">
-  <p:cSld name="Slide 15">
+  <p:cSld name="Slide 16">
     <p:bg>
       <p:bgPr>
         <a:solidFill>
@@ -10511,7 +11613,7 @@
                 <a:ea typeface="Inter" pitchFamily="34" charset="-122"/>
                 <a:cs typeface="Inter" pitchFamily="34" charset="-120"/>
               </a:rPr>
-              <a:t>No. Exactly the same 35-hour week — and about 2 fewer days at work a year.</a:t>
+              <a:t>No. Exactly the same 35-hour week — and about 2 fewer contracted days a year.</a:t>
             </a:r>
             <a:endParaRPr lang="en-US" sz="1400" dirty="0"/>
           </a:p>
@@ -11250,6 +12352,45 @@
         </p:nvSpPr>
         <p:spPr>
           <a:xfrm>
+            <a:off x="4023360" y="4754880"/>
+            <a:ext cx="4663440" cy="310896"/>
+          </a:xfrm>
+          <a:prstGeom prst="rect">
+            <a:avLst/>
+          </a:prstGeom>
+          <a:noFill/>
+          <a:ln/>
+        </p:spPr>
+        <p:txBody>
+          <a:bodyPr wrap="square" lIns="0" tIns="0" rIns="0" bIns="0" rtlCol="0" anchor="t"/>
+          <a:lstStyle/>
+          <a:p>
+            <a:pPr algn="r" indent="0" marL="0">
+              <a:buNone/>
+            </a:pPr>
+            <a:r>
+              <a:rPr lang="en-US" sz="850" i="1" dirty="0">
+                <a:solidFill>
+                  <a:srgbClr val="5B6778"/>
+                </a:solidFill>
+                <a:latin typeface="Inter" pitchFamily="34" charset="0"/>
+                <a:ea typeface="Inter" pitchFamily="34" charset="-122"/>
+                <a:cs typeface="Inter" pitchFamily="34" charset="-120"/>
+              </a:rPr>
+              <a:t>Yearly figures are averages from the fixed rota; cover-week duties are not included.</a:t>
+            </a:r>
+            <a:endParaRPr lang="en-US" sz="850" dirty="0"/>
+          </a:p>
+        </p:txBody>
+      </p:sp>
+      <p:sp>
+        <p:nvSpPr>
+          <p:cNvPr id="21" name="Text 19"/>
+          <p:cNvSpPr txBox="1"/>
+          <p:nvPr/>
+        </p:nvSpPr>
+        <p:spPr>
+          <a:xfrm>
             <a:off x="457200" y="4800600"/>
             <a:ext cx="8229600" cy="228600"/>
           </a:xfrm>
@@ -13132,6 +14273,45 @@
         </p:nvSpPr>
         <p:spPr>
           <a:xfrm>
+            <a:off x="4023360" y="4754880"/>
+            <a:ext cx="4663440" cy="310896"/>
+          </a:xfrm>
+          <a:prstGeom prst="rect">
+            <a:avLst/>
+          </a:prstGeom>
+          <a:noFill/>
+          <a:ln/>
+        </p:spPr>
+        <p:txBody>
+          <a:bodyPr wrap="square" lIns="0" tIns="0" rIns="0" bIns="0" rtlCol="0" anchor="t"/>
+          <a:lstStyle/>
+          <a:p>
+            <a:pPr algn="r" indent="0" marL="0">
+              <a:buNone/>
+            </a:pPr>
+            <a:r>
+              <a:rPr lang="en-US" sz="850" i="1" dirty="0">
+                <a:solidFill>
+                  <a:srgbClr val="5B6778"/>
+                </a:solidFill>
+                <a:latin typeface="Inter" pitchFamily="34" charset="0"/>
+                <a:ea typeface="Inter" pitchFamily="34" charset="-122"/>
+                <a:cs typeface="Inter" pitchFamily="34" charset="-120"/>
+              </a:rPr>
+              <a:t>Yearly figures are averages from the fixed rota; cover-week duties are not included.</a:t>
+            </a:r>
+            <a:endParaRPr lang="en-US" sz="850" dirty="0"/>
+          </a:p>
+        </p:txBody>
+      </p:sp>
+      <p:sp>
+        <p:nvSpPr>
+          <p:cNvPr id="25" name="Text 23"/>
+          <p:cNvSpPr txBox="1"/>
+          <p:nvPr/>
+        </p:nvSpPr>
+        <p:spPr>
+          <a:xfrm>
             <a:off x="457200" y="4800600"/>
             <a:ext cx="8229600" cy="228600"/>
           </a:xfrm>
@@ -13282,11 +14462,11 @@
         <p:spPr>
           <a:xfrm>
             <a:off x="457200" y="1325880"/>
-            <a:ext cx="8229600" cy="566928"/>
+            <a:ext cx="2606040" cy="1691640"/>
           </a:xfrm>
           <a:prstGeom prst="roundRect">
             <a:avLst>
-              <a:gd name="adj" fmla="val 16129"/>
+              <a:gd name="adj" fmla="val 6486"/>
             </a:avLst>
           </a:prstGeom>
           <a:solidFill>
@@ -13302,14 +14482,446 @@
       </p:sp>
       <p:sp>
         <p:nvSpPr>
-          <p:cNvPr id="5" name="Shape 3"/>
+          <p:cNvPr id="5" name="Text 3"/>
+          <p:cNvSpPr txBox="1"/>
+          <p:nvPr/>
+        </p:nvSpPr>
+        <p:spPr>
+          <a:xfrm>
+            <a:off x="457200" y="1417320"/>
+            <a:ext cx="2606040" cy="777240"/>
+          </a:xfrm>
+          <a:prstGeom prst="rect">
+            <a:avLst/>
+          </a:prstGeom>
+          <a:noFill/>
+          <a:ln/>
+        </p:spPr>
+        <p:txBody>
+          <a:bodyPr wrap="square" lIns="0" tIns="0" rIns="0" bIns="0" rtlCol="0" anchor="ctr"/>
+          <a:lstStyle/>
+          <a:p>
+            <a:pPr algn="ctr" indent="0" marL="0">
+              <a:buNone/>
+            </a:pPr>
+            <a:r>
+              <a:rPr lang="en-US" sz="4000" b="1" dirty="0">
+                <a:solidFill>
+                  <a:srgbClr val="001E3C"/>
+                </a:solidFill>
+                <a:latin typeface="Inter" pitchFamily="34" charset="0"/>
+                <a:ea typeface="Inter" pitchFamily="34" charset="-122"/>
+                <a:cs typeface="Inter" pitchFamily="34" charset="-120"/>
+              </a:rPr>
+              <a:t>17</a:t>
+            </a:r>
+            <a:endParaRPr lang="en-US" sz="4000" dirty="0"/>
+          </a:p>
+        </p:txBody>
+      </p:sp>
+      <p:sp>
+        <p:nvSpPr>
+          <p:cNvPr id="6" name="Text 4"/>
+          <p:cNvSpPr txBox="1"/>
+          <p:nvPr/>
+        </p:nvSpPr>
+        <p:spPr>
+          <a:xfrm>
+            <a:off x="457200" y="2212848"/>
+            <a:ext cx="2606040" cy="365760"/>
+          </a:xfrm>
+          <a:prstGeom prst="rect">
+            <a:avLst/>
+          </a:prstGeom>
+          <a:noFill/>
+          <a:ln/>
+        </p:spPr>
+        <p:txBody>
+          <a:bodyPr wrap="square" lIns="0" tIns="0" rIns="0" bIns="0" rtlCol="0" anchor="ctr"/>
+          <a:lstStyle/>
+          <a:p>
+            <a:pPr algn="ctr" indent="0" marL="0">
+              <a:buNone/>
+            </a:pPr>
+            <a:r>
+              <a:rPr lang="en-US" sz="1600" b="1" dirty="0">
+                <a:solidFill>
+                  <a:srgbClr val="1B2533"/>
+                </a:solidFill>
+                <a:latin typeface="Inter" pitchFamily="34" charset="0"/>
+                <a:ea typeface="Inter" pitchFamily="34" charset="-122"/>
+                <a:cs typeface="Inter" pitchFamily="34" charset="-120"/>
+              </a:rPr>
+              <a:t>shift times in all</a:t>
+            </a:r>
+            <a:endParaRPr lang="en-US" sz="1600" dirty="0"/>
+          </a:p>
+        </p:txBody>
+      </p:sp>
+      <p:sp>
+        <p:nvSpPr>
+          <p:cNvPr id="7" name="Text 5"/>
+          <p:cNvSpPr txBox="1"/>
+          <p:nvPr/>
+        </p:nvSpPr>
+        <p:spPr>
+          <a:xfrm>
+            <a:off x="457200" y="2578608"/>
+            <a:ext cx="2606040" cy="320040"/>
+          </a:xfrm>
+          <a:prstGeom prst="rect">
+            <a:avLst/>
+          </a:prstGeom>
+          <a:noFill/>
+          <a:ln/>
+        </p:spPr>
+        <p:txBody>
+          <a:bodyPr wrap="square" lIns="0" tIns="0" rIns="0" bIns="0" rtlCol="0" anchor="ctr"/>
+          <a:lstStyle/>
+          <a:p>
+            <a:pPr algn="ctr" indent="0" marL="0">
+              <a:buNone/>
+            </a:pPr>
+            <a:r>
+              <a:rPr lang="en-US" sz="1250" dirty="0">
+                <a:solidFill>
+                  <a:srgbClr val="5B6778"/>
+                </a:solidFill>
+                <a:latin typeface="Inter" pitchFamily="34" charset="0"/>
+                <a:ea typeface="Inter" pitchFamily="34" charset="-122"/>
+                <a:cs typeface="Inter" pitchFamily="34" charset="-120"/>
+              </a:rPr>
+              <a:t>today there are 18</a:t>
+            </a:r>
+            <a:endParaRPr lang="en-US" sz="1250" dirty="0"/>
+          </a:p>
+        </p:txBody>
+      </p:sp>
+      <p:sp>
+        <p:nvSpPr>
+          <p:cNvPr id="8" name="Shape 6"/>
           <p:cNvSpPr/>
           <p:nvPr/>
         </p:nvSpPr>
         <p:spPr>
           <a:xfrm>
-            <a:off x="594360" y="1399032"/>
-            <a:ext cx="411480" cy="411480"/>
+            <a:off x="3246120" y="1325880"/>
+            <a:ext cx="2606040" cy="1691640"/>
+          </a:xfrm>
+          <a:prstGeom prst="roundRect">
+            <a:avLst>
+              <a:gd name="adj" fmla="val 6486"/>
+            </a:avLst>
+          </a:prstGeom>
+          <a:solidFill>
+            <a:srgbClr val="EEF2F7"/>
+          </a:solidFill>
+          <a:ln w="12700">
+            <a:solidFill>
+              <a:srgbClr val="EEF2F7"/>
+            </a:solidFill>
+            <a:prstDash val="solid"/>
+          </a:ln>
+        </p:spPr>
+      </p:sp>
+      <p:sp>
+        <p:nvSpPr>
+          <p:cNvPr id="9" name="Text 7"/>
+          <p:cNvSpPr txBox="1"/>
+          <p:nvPr/>
+        </p:nvSpPr>
+        <p:spPr>
+          <a:xfrm>
+            <a:off x="3246120" y="1417320"/>
+            <a:ext cx="2606040" cy="777240"/>
+          </a:xfrm>
+          <a:prstGeom prst="rect">
+            <a:avLst/>
+          </a:prstGeom>
+          <a:noFill/>
+          <a:ln/>
+        </p:spPr>
+        <p:txBody>
+          <a:bodyPr wrap="square" lIns="0" tIns="0" rIns="0" bIns="0" rtlCol="0" anchor="ctr"/>
+          <a:lstStyle/>
+          <a:p>
+            <a:pPr algn="ctr" indent="0" marL="0">
+              <a:buNone/>
+            </a:pPr>
+            <a:r>
+              <a:rPr lang="en-US" sz="4000" b="1" dirty="0">
+                <a:solidFill>
+                  <a:srgbClr val="001E3C"/>
+                </a:solidFill>
+                <a:latin typeface="Inter" pitchFamily="34" charset="0"/>
+                <a:ea typeface="Inter" pitchFamily="34" charset="-122"/>
+                <a:cs typeface="Inter" pitchFamily="34" charset="-120"/>
+              </a:rPr>
+              <a:t>5</a:t>
+            </a:r>
+            <a:endParaRPr lang="en-US" sz="4000" dirty="0"/>
+          </a:p>
+        </p:txBody>
+      </p:sp>
+      <p:sp>
+        <p:nvSpPr>
+          <p:cNvPr id="10" name="Text 8"/>
+          <p:cNvSpPr txBox="1"/>
+          <p:nvPr/>
+        </p:nvSpPr>
+        <p:spPr>
+          <a:xfrm>
+            <a:off x="3246120" y="2212848"/>
+            <a:ext cx="2606040" cy="365760"/>
+          </a:xfrm>
+          <a:prstGeom prst="rect">
+            <a:avLst/>
+          </a:prstGeom>
+          <a:noFill/>
+          <a:ln/>
+        </p:spPr>
+        <p:txBody>
+          <a:bodyPr wrap="square" lIns="0" tIns="0" rIns="0" bIns="0" rtlCol="0" anchor="ctr"/>
+          <a:lstStyle/>
+          <a:p>
+            <a:pPr algn="ctr" indent="0" marL="0">
+              <a:buNone/>
+            </a:pPr>
+            <a:r>
+              <a:rPr lang="en-US" sz="1600" b="1" dirty="0">
+                <a:solidFill>
+                  <a:srgbClr val="1B2533"/>
+                </a:solidFill>
+                <a:latin typeface="Inter" pitchFamily="34" charset="0"/>
+                <a:ea typeface="Inter" pitchFamily="34" charset="-122"/>
+                <a:cs typeface="Inter" pitchFamily="34" charset="-120"/>
+              </a:rPr>
+              <a:t>you already work</a:t>
+            </a:r>
+            <a:endParaRPr lang="en-US" sz="1600" dirty="0"/>
+          </a:p>
+        </p:txBody>
+      </p:sp>
+      <p:sp>
+        <p:nvSpPr>
+          <p:cNvPr id="11" name="Text 9"/>
+          <p:cNvSpPr txBox="1"/>
+          <p:nvPr/>
+        </p:nvSpPr>
+        <p:spPr>
+          <a:xfrm>
+            <a:off x="3246120" y="2578608"/>
+            <a:ext cx="2606040" cy="320040"/>
+          </a:xfrm>
+          <a:prstGeom prst="rect">
+            <a:avLst/>
+          </a:prstGeom>
+          <a:noFill/>
+          <a:ln/>
+        </p:spPr>
+        <p:txBody>
+          <a:bodyPr wrap="square" lIns="0" tIns="0" rIns="0" bIns="0" rtlCol="0" anchor="ctr"/>
+          <a:lstStyle/>
+          <a:p>
+            <a:pPr algn="ctr" indent="0" marL="0">
+              <a:buNone/>
+            </a:pPr>
+            <a:r>
+              <a:rPr lang="en-US" sz="1250" dirty="0">
+                <a:solidFill>
+                  <a:srgbClr val="5B6778"/>
+                </a:solidFill>
+                <a:latin typeface="Inter" pitchFamily="34" charset="0"/>
+                <a:ea typeface="Inter" pitchFamily="34" charset="-122"/>
+                <a:cs typeface="Inter" pitchFamily="34" charset="-120"/>
+              </a:rPr>
+              <a:t>listed below</a:t>
+            </a:r>
+            <a:endParaRPr lang="en-US" sz="1250" dirty="0"/>
+          </a:p>
+        </p:txBody>
+      </p:sp>
+      <p:sp>
+        <p:nvSpPr>
+          <p:cNvPr id="12" name="Shape 10"/>
+          <p:cNvSpPr/>
+          <p:nvPr/>
+        </p:nvSpPr>
+        <p:spPr>
+          <a:xfrm>
+            <a:off x="6035040" y="1325880"/>
+            <a:ext cx="2606040" cy="1691640"/>
+          </a:xfrm>
+          <a:prstGeom prst="roundRect">
+            <a:avLst>
+              <a:gd name="adj" fmla="val 6486"/>
+            </a:avLst>
+          </a:prstGeom>
+          <a:solidFill>
+            <a:srgbClr val="EEF2F7"/>
+          </a:solidFill>
+          <a:ln w="12700">
+            <a:solidFill>
+              <a:srgbClr val="EEF2F7"/>
+            </a:solidFill>
+            <a:prstDash val="solid"/>
+          </a:ln>
+        </p:spPr>
+      </p:sp>
+      <p:sp>
+        <p:nvSpPr>
+          <p:cNvPr id="13" name="Text 11"/>
+          <p:cNvSpPr txBox="1"/>
+          <p:nvPr/>
+        </p:nvSpPr>
+        <p:spPr>
+          <a:xfrm>
+            <a:off x="6035040" y="1417320"/>
+            <a:ext cx="2606040" cy="777240"/>
+          </a:xfrm>
+          <a:prstGeom prst="rect">
+            <a:avLst/>
+          </a:prstGeom>
+          <a:noFill/>
+          <a:ln/>
+        </p:spPr>
+        <p:txBody>
+          <a:bodyPr wrap="square" lIns="0" tIns="0" rIns="0" bIns="0" rtlCol="0" anchor="ctr"/>
+          <a:lstStyle/>
+          <a:p>
+            <a:pPr algn="ctr" indent="0" marL="0">
+              <a:buNone/>
+            </a:pPr>
+            <a:r>
+              <a:rPr lang="en-US" sz="4000" b="1" dirty="0">
+                <a:solidFill>
+                  <a:srgbClr val="A15C00"/>
+                </a:solidFill>
+                <a:latin typeface="Inter" pitchFamily="34" charset="0"/>
+                <a:ea typeface="Inter" pitchFamily="34" charset="-122"/>
+                <a:cs typeface="Inter" pitchFamily="34" charset="-120"/>
+              </a:rPr>
+              <a:t>12</a:t>
+            </a:r>
+            <a:endParaRPr lang="en-US" sz="4000" dirty="0"/>
+          </a:p>
+        </p:txBody>
+      </p:sp>
+      <p:sp>
+        <p:nvSpPr>
+          <p:cNvPr id="14" name="Text 12"/>
+          <p:cNvSpPr txBox="1"/>
+          <p:nvPr/>
+        </p:nvSpPr>
+        <p:spPr>
+          <a:xfrm>
+            <a:off x="6035040" y="2212848"/>
+            <a:ext cx="2606040" cy="365760"/>
+          </a:xfrm>
+          <a:prstGeom prst="rect">
+            <a:avLst/>
+          </a:prstGeom>
+          <a:noFill/>
+          <a:ln/>
+        </p:spPr>
+        <p:txBody>
+          <a:bodyPr wrap="square" lIns="0" tIns="0" rIns="0" bIns="0" rtlCol="0" anchor="ctr"/>
+          <a:lstStyle/>
+          <a:p>
+            <a:pPr algn="ctr" indent="0" marL="0">
+              <a:buNone/>
+            </a:pPr>
+            <a:r>
+              <a:rPr lang="en-US" sz="1600" b="1" dirty="0">
+                <a:solidFill>
+                  <a:srgbClr val="1B2533"/>
+                </a:solidFill>
+                <a:latin typeface="Inter" pitchFamily="34" charset="0"/>
+                <a:ea typeface="Inter" pitchFamily="34" charset="-122"/>
+                <a:cs typeface="Inter" pitchFamily="34" charset="-120"/>
+              </a:rPr>
+              <a:t>are new</a:t>
+            </a:r>
+            <a:endParaRPr lang="en-US" sz="1600" dirty="0"/>
+          </a:p>
+        </p:txBody>
+      </p:sp>
+      <p:sp>
+        <p:nvSpPr>
+          <p:cNvPr id="15" name="Text 13"/>
+          <p:cNvSpPr txBox="1"/>
+          <p:nvPr/>
+        </p:nvSpPr>
+        <p:spPr>
+          <a:xfrm>
+            <a:off x="6035040" y="2578608"/>
+            <a:ext cx="2606040" cy="320040"/>
+          </a:xfrm>
+          <a:prstGeom prst="rect">
+            <a:avLst/>
+          </a:prstGeom>
+          <a:noFill/>
+          <a:ln/>
+        </p:spPr>
+        <p:txBody>
+          <a:bodyPr wrap="square" lIns="0" tIns="0" rIns="0" bIns="0" rtlCol="0" anchor="ctr"/>
+          <a:lstStyle/>
+          <a:p>
+            <a:pPr algn="ctr" indent="0" marL="0">
+              <a:buNone/>
+            </a:pPr>
+            <a:r>
+              <a:rPr lang="en-US" sz="1250" dirty="0">
+                <a:solidFill>
+                  <a:srgbClr val="5B6778"/>
+                </a:solidFill>
+                <a:latin typeface="Inter" pitchFamily="34" charset="0"/>
+                <a:ea typeface="Inter" pitchFamily="34" charset="-122"/>
+                <a:cs typeface="Inter" pitchFamily="34" charset="-120"/>
+              </a:rPr>
+              <a:t>the next slide lists them</a:t>
+            </a:r>
+            <a:endParaRPr lang="en-US" sz="1250" dirty="0"/>
+          </a:p>
+        </p:txBody>
+      </p:sp>
+      <p:sp>
+        <p:nvSpPr>
+          <p:cNvPr id="16" name="Shape 14"/>
+          <p:cNvSpPr/>
+          <p:nvPr/>
+        </p:nvSpPr>
+        <p:spPr>
+          <a:xfrm>
+            <a:off x="457200" y="3200400"/>
+            <a:ext cx="8229600" cy="777240"/>
+          </a:xfrm>
+          <a:prstGeom prst="roundRect">
+            <a:avLst>
+              <a:gd name="adj" fmla="val 11765"/>
+            </a:avLst>
+          </a:prstGeom>
+          <a:solidFill>
+            <a:srgbClr val="FFFFFF"/>
+          </a:solidFill>
+          <a:ln w="12700">
+            <a:solidFill>
+              <a:srgbClr val="DDE3EA"/>
+            </a:solidFill>
+            <a:prstDash val="solid"/>
+          </a:ln>
+        </p:spPr>
+      </p:sp>
+      <p:sp>
+        <p:nvSpPr>
+          <p:cNvPr id="17" name="Shape 15"/>
+          <p:cNvSpPr/>
+          <p:nvPr/>
+        </p:nvSpPr>
+        <p:spPr>
+          <a:xfrm>
+            <a:off x="640080" y="3364992"/>
+            <a:ext cx="438912" cy="438912"/>
           </a:xfrm>
           <a:prstGeom prst="ellipse">
             <a:avLst/>
@@ -13327,7 +14939,7 @@
       </p:sp>
       <p:pic>
         <p:nvPicPr>
-          <p:cNvPr id="6" name="Image 0" descr="preencoded.png">    </p:cNvPr>
+          <p:cNvPr id="18" name="Image 0" descr="preencoded.png">    </p:cNvPr>
           <p:cNvPicPr>
             <a:picLocks noChangeAspect="1"/>
           </p:cNvPicPr>
@@ -13341,8 +14953,8 @@
         </p:blipFill>
         <p:spPr>
           <a:xfrm>
-            <a:off x="684886" y="1489558"/>
-            <a:ext cx="230429" cy="230429"/>
+            <a:off x="736641" y="3461553"/>
+            <a:ext cx="245791" cy="245791"/>
           </a:xfrm>
           <a:prstGeom prst="rect">
             <a:avLst/>
@@ -13351,14 +14963,14 @@
       </p:pic>
       <p:sp>
         <p:nvSpPr>
-          <p:cNvPr id="7" name="Text 4"/>
-          <p:cNvSpPr txBox="1"/>
-          <p:nvPr/>
-        </p:nvSpPr>
-        <p:spPr>
-          <a:xfrm>
-            <a:off x="1143000" y="1325880"/>
-            <a:ext cx="7406640" cy="566928"/>
+          <p:cNvPr id="19" name="Text 16"/>
+          <p:cNvSpPr txBox="1"/>
+          <p:nvPr/>
+        </p:nvSpPr>
+        <p:spPr>
+          <a:xfrm>
+            <a:off x="1234440" y="3200400"/>
+            <a:ext cx="7315200" cy="777240"/>
           </a:xfrm>
           <a:prstGeom prst="rect">
             <a:avLst/>
@@ -13374,7 +14986,7 @@
               <a:buNone/>
             </a:pPr>
             <a:r>
-              <a:rPr lang="en-US" sz="1250" b="1" dirty="0">
+              <a:rPr lang="en-US" sz="1400" b="1" dirty="0">
                 <a:solidFill>
                   <a:srgbClr val="1E7B4B"/>
                 </a:solidFill>
@@ -13382,13 +14994,16 @@
                 <a:ea typeface="Inter" pitchFamily="34" charset="-122"/>
                 <a:cs typeface="Inter" pitchFamily="34" charset="-120"/>
               </a:rPr>
-              <a:t>You work these today (5)   </a:t>
-            </a:r>
+              <a:t>You work these today</a:t>
+            </a:r>
+            <a:endParaRPr lang="en-US" sz="1400" dirty="0"/>
+          </a:p>
+          <a:p>
             <a:pPr indent="0" marL="0">
               <a:buNone/>
             </a:pPr>
             <a:r>
-              <a:rPr lang="en-US" sz="1250" dirty="0">
+              <a:rPr lang="en-US" sz="1400" dirty="0">
                 <a:solidFill>
                   <a:srgbClr val="1B2533"/>
                 </a:solidFill>
@@ -13398,527 +15013,13 @@
               </a:rPr>
               <a:t>06:20–13:45 · 06:20–14:20 · 06:20–14:50 · 14:00–22:30 · 14:30–22:00</a:t>
             </a:r>
-            <a:endParaRPr lang="en-US" sz="1250" dirty="0"/>
-          </a:p>
-        </p:txBody>
-      </p:sp>
-      <p:sp>
-        <p:nvSpPr>
-          <p:cNvPr id="8" name="Shape 5"/>
-          <p:cNvSpPr/>
-          <p:nvPr/>
-        </p:nvSpPr>
-        <p:spPr>
-          <a:xfrm>
-            <a:off x="457200" y="1984248"/>
-            <a:ext cx="8229600" cy="2057400"/>
-          </a:xfrm>
-          <a:prstGeom prst="roundRect">
-            <a:avLst>
-              <a:gd name="adj" fmla="val 4444"/>
-            </a:avLst>
-          </a:prstGeom>
-          <a:solidFill>
-            <a:srgbClr val="EEF2F7"/>
-          </a:solidFill>
-          <a:ln w="12700">
-            <a:solidFill>
-              <a:srgbClr val="EEF2F7"/>
-            </a:solidFill>
-            <a:prstDash val="solid"/>
-          </a:ln>
-        </p:spPr>
-      </p:sp>
-      <p:sp>
-        <p:nvSpPr>
-          <p:cNvPr id="9" name="Shape 6"/>
-          <p:cNvSpPr/>
-          <p:nvPr/>
-        </p:nvSpPr>
-        <p:spPr>
-          <a:xfrm>
-            <a:off x="594360" y="2075688"/>
-            <a:ext cx="384048" cy="384048"/>
-          </a:xfrm>
-          <a:prstGeom prst="ellipse">
-            <a:avLst/>
-          </a:prstGeom>
-          <a:solidFill>
-            <a:srgbClr val="F5C800"/>
-          </a:solidFill>
-          <a:ln w="12700">
-            <a:solidFill>
-              <a:srgbClr val="F5C800"/>
-            </a:solidFill>
-            <a:prstDash val="solid"/>
-          </a:ln>
-        </p:spPr>
-      </p:sp>
-      <p:pic>
-        <p:nvPicPr>
-          <p:cNvPr id="10" name="Image 1" descr="preencoded.png">    </p:cNvPr>
-          <p:cNvPicPr>
-            <a:picLocks noChangeAspect="1"/>
-          </p:cNvPicPr>
-          <p:nvPr/>
-        </p:nvPicPr>
-        <p:blipFill>
-          <a:blip r:embed="rId2"/>
-          <a:stretch>
-            <a:fillRect/>
-          </a:stretch>
-        </p:blipFill>
-        <p:spPr>
-          <a:xfrm>
-            <a:off x="678851" y="2160179"/>
-            <a:ext cx="215067" cy="215067"/>
-          </a:xfrm>
-          <a:prstGeom prst="rect">
-            <a:avLst/>
-          </a:prstGeom>
-        </p:spPr>
-      </p:pic>
-      <p:sp>
-        <p:nvSpPr>
-          <p:cNvPr id="11" name="Text 7"/>
-          <p:cNvSpPr txBox="1"/>
-          <p:nvPr/>
-        </p:nvSpPr>
-        <p:spPr>
-          <a:xfrm>
-            <a:off x="1097280" y="2075688"/>
-            <a:ext cx="3657600" cy="384048"/>
-          </a:xfrm>
-          <a:prstGeom prst="rect">
-            <a:avLst/>
-          </a:prstGeom>
-          <a:noFill/>
-          <a:ln/>
-        </p:spPr>
-        <p:txBody>
-          <a:bodyPr wrap="square" lIns="0" tIns="0" rIns="0" bIns="0" rtlCol="0" anchor="ctr"/>
-          <a:lstStyle/>
-          <a:p>
-            <a:pPr indent="0" marL="0">
-              <a:buNone/>
-            </a:pPr>
-            <a:r>
-              <a:rPr lang="en-US" sz="1400" b="1" dirty="0">
-                <a:solidFill>
-                  <a:srgbClr val="001E3C"/>
-                </a:solidFill>
-                <a:latin typeface="Inter" pitchFamily="34" charset="0"/>
-                <a:ea typeface="Inter" pitchFamily="34" charset="-122"/>
-                <a:cs typeface="Inter" pitchFamily="34" charset="-120"/>
-              </a:rPr>
-              <a:t>New times (12)</a:t>
-            </a:r>
             <a:endParaRPr lang="en-US" sz="1400" dirty="0"/>
           </a:p>
         </p:txBody>
       </p:sp>
       <p:sp>
         <p:nvSpPr>
-          <p:cNvPr id="12" name="Text 8"/>
-          <p:cNvSpPr txBox="1"/>
-          <p:nvPr/>
-        </p:nvSpPr>
-        <p:spPr>
-          <a:xfrm>
-            <a:off x="640080" y="2542032"/>
-            <a:ext cx="2606040" cy="1463040"/>
-          </a:xfrm>
-          <a:prstGeom prst="rect">
-            <a:avLst/>
-          </a:prstGeom>
-          <a:noFill/>
-          <a:ln/>
-        </p:spPr>
-        <p:txBody>
-          <a:bodyPr wrap="square" lIns="0" tIns="0" rIns="0" bIns="0" rtlCol="0" anchor="t"/>
-          <a:lstStyle/>
-          <a:p>
-            <a:pPr indent="0" marL="0">
-              <a:spcAft>
-                <a:spcPts val="300"/>
-              </a:spcAft>
-              <a:buNone/>
-            </a:pPr>
-            <a:r>
-              <a:rPr lang="en-US" sz="1050" b="1" dirty="0">
-                <a:solidFill>
-                  <a:srgbClr val="001E3C"/>
-                </a:solidFill>
-                <a:latin typeface="Inter" pitchFamily="34" charset="0"/>
-                <a:ea typeface="Inter" pitchFamily="34" charset="-122"/>
-                <a:cs typeface="Inter" pitchFamily="34" charset="-120"/>
-              </a:rPr>
-              <a:t>Weekdays</a:t>
-            </a:r>
-            <a:endParaRPr lang="en-US" sz="1050" dirty="0"/>
-          </a:p>
-          <a:p>
-            <a:pPr marL="127000" indent="-127000">
-              <a:spcAft>
-                <a:spcPts val="300"/>
-              </a:spcAft>
-              <a:buSzPct val="100000"/>
-              <a:buChar char="•"/>
-            </a:pPr>
-            <a:r>
-              <a:rPr lang="en-US" sz="1050" dirty="0">
-                <a:solidFill>
-                  <a:srgbClr val="1B2533"/>
-                </a:solidFill>
-                <a:latin typeface="Inter" pitchFamily="34" charset="0"/>
-                <a:ea typeface="Inter" pitchFamily="34" charset="-122"/>
-                <a:cs typeface="Inter" pitchFamily="34" charset="-120"/>
-              </a:rPr>
-              <a:t>06:20–14:30 — off at 14:30, not 14:20</a:t>
-            </a:r>
-            <a:endParaRPr lang="en-US" sz="1050" dirty="0"/>
-          </a:p>
-          <a:p>
-            <a:pPr marL="127000" indent="-127000">
-              <a:spcAft>
-                <a:spcPts val="300"/>
-              </a:spcAft>
-              <a:buSzPct val="100000"/>
-              <a:buChar char="•"/>
-            </a:pPr>
-            <a:r>
-              <a:rPr lang="en-US" sz="1050" dirty="0">
-                <a:solidFill>
-                  <a:srgbClr val="1B2533"/>
-                </a:solidFill>
-                <a:latin typeface="Inter" pitchFamily="34" charset="0"/>
-                <a:ea typeface="Inter" pitchFamily="34" charset="-122"/>
-                <a:cs typeface="Inter" pitchFamily="34" charset="-120"/>
-              </a:rPr>
-              <a:t>06:20–15:45 — a long early, 9h 25m</a:t>
-            </a:r>
-            <a:endParaRPr lang="en-US" sz="1050" dirty="0"/>
-          </a:p>
-          <a:p>
-            <a:pPr marL="127000" indent="-127000">
-              <a:spcAft>
-                <a:spcPts val="300"/>
-              </a:spcAft>
-              <a:buSzPct val="100000"/>
-              <a:buChar char="•"/>
-            </a:pPr>
-            <a:r>
-              <a:rPr lang="en-US" sz="1050" dirty="0">
-                <a:solidFill>
-                  <a:srgbClr val="1B2533"/>
-                </a:solidFill>
-                <a:latin typeface="Inter" pitchFamily="34" charset="0"/>
-                <a:ea typeface="Inter" pitchFamily="34" charset="-122"/>
-                <a:cs typeface="Inter" pitchFamily="34" charset="-120"/>
-              </a:rPr>
-              <a:t>07:00–16:15 — a new early, 9h 15m</a:t>
-            </a:r>
-            <a:endParaRPr lang="en-US" sz="1050" dirty="0"/>
-          </a:p>
-          <a:p>
-            <a:pPr marL="127000" indent="-127000">
-              <a:spcAft>
-                <a:spcPts val="300"/>
-              </a:spcAft>
-              <a:buSzPct val="100000"/>
-              <a:buChar char="•"/>
-            </a:pPr>
-            <a:r>
-              <a:rPr lang="en-US" sz="1050" dirty="0">
-                <a:solidFill>
-                  <a:srgbClr val="1B2533"/>
-                </a:solidFill>
-                <a:latin typeface="Inter" pitchFamily="34" charset="0"/>
-                <a:ea typeface="Inter" pitchFamily="34" charset="-122"/>
-                <a:cs typeface="Inter" pitchFamily="34" charset="-120"/>
-              </a:rPr>
-              <a:t>14:00–21:00 — a short late, 7h</a:t>
-            </a:r>
-            <a:endParaRPr lang="en-US" sz="1050" dirty="0"/>
-          </a:p>
-          <a:p>
-            <a:pPr marL="127000" indent="-127000">
-              <a:spcAft>
-                <a:spcPts val="300"/>
-              </a:spcAft>
-              <a:buSzPct val="100000"/>
-              <a:buChar char="•"/>
-            </a:pPr>
-            <a:r>
-              <a:rPr lang="en-US" sz="1050" dirty="0">
-                <a:solidFill>
-                  <a:srgbClr val="1B2533"/>
-                </a:solidFill>
-                <a:latin typeface="Inter" pitchFamily="34" charset="0"/>
-                <a:ea typeface="Inter" pitchFamily="34" charset="-122"/>
-                <a:cs typeface="Inter" pitchFamily="34" charset="-120"/>
-              </a:rPr>
-              <a:t>15:45–23:55 — the closer, 30 min later</a:t>
-            </a:r>
-            <a:endParaRPr lang="en-US" sz="1050" dirty="0"/>
-          </a:p>
-        </p:txBody>
-      </p:sp>
-      <p:sp>
-        <p:nvSpPr>
-          <p:cNvPr id="13" name="Text 9"/>
-          <p:cNvSpPr txBox="1"/>
-          <p:nvPr/>
-        </p:nvSpPr>
-        <p:spPr>
-          <a:xfrm>
-            <a:off x="3337560" y="2542032"/>
-            <a:ext cx="2606040" cy="1463040"/>
-          </a:xfrm>
-          <a:prstGeom prst="rect">
-            <a:avLst/>
-          </a:prstGeom>
-          <a:noFill/>
-          <a:ln/>
-        </p:spPr>
-        <p:txBody>
-          <a:bodyPr wrap="square" lIns="0" tIns="0" rIns="0" bIns="0" rtlCol="0" anchor="t"/>
-          <a:lstStyle/>
-          <a:p>
-            <a:pPr indent="0" marL="0">
-              <a:spcAft>
-                <a:spcPts val="300"/>
-              </a:spcAft>
-              <a:buNone/>
-            </a:pPr>
-            <a:r>
-              <a:rPr lang="en-US" sz="1050" b="1" dirty="0">
-                <a:solidFill>
-                  <a:srgbClr val="001E3C"/>
-                </a:solidFill>
-                <a:latin typeface="Inter" pitchFamily="34" charset="0"/>
-                <a:ea typeface="Inter" pitchFamily="34" charset="-122"/>
-                <a:cs typeface="Inter" pitchFamily="34" charset="-120"/>
-              </a:rPr>
-              <a:t>Saturday</a:t>
-            </a:r>
-            <a:endParaRPr lang="en-US" sz="1050" dirty="0"/>
-          </a:p>
-          <a:p>
-            <a:pPr marL="127000" indent="-127000">
-              <a:spcAft>
-                <a:spcPts val="300"/>
-              </a:spcAft>
-              <a:buSzPct val="100000"/>
-              <a:buChar char="•"/>
-            </a:pPr>
-            <a:r>
-              <a:rPr lang="en-US" sz="1050" dirty="0">
-                <a:solidFill>
-                  <a:srgbClr val="1B2533"/>
-                </a:solidFill>
-                <a:latin typeface="Inter" pitchFamily="34" charset="0"/>
-                <a:ea typeface="Inter" pitchFamily="34" charset="-122"/>
-                <a:cs typeface="Inter" pitchFamily="34" charset="-120"/>
-              </a:rPr>
-              <a:t>06:20–15:30 — off at 15:30, not 14:50</a:t>
-            </a:r>
-            <a:endParaRPr lang="en-US" sz="1050" dirty="0"/>
-          </a:p>
-          <a:p>
-            <a:pPr marL="127000" indent="-127000">
-              <a:spcAft>
-                <a:spcPts val="300"/>
-              </a:spcAft>
-              <a:buSzPct val="100000"/>
-              <a:buChar char="•"/>
-            </a:pPr>
-            <a:r>
-              <a:rPr lang="en-US" sz="1050" dirty="0">
-                <a:solidFill>
-                  <a:srgbClr val="1B2533"/>
-                </a:solidFill>
-                <a:latin typeface="Inter" pitchFamily="34" charset="0"/>
-                <a:ea typeface="Inter" pitchFamily="34" charset="-122"/>
-                <a:cs typeface="Inter" pitchFamily="34" charset="-120"/>
-              </a:rPr>
-              <a:t>07:15–16:45 — a new early, 9h 30m</a:t>
-            </a:r>
-            <a:endParaRPr lang="en-US" sz="1050" dirty="0"/>
-          </a:p>
-          <a:p>
-            <a:pPr marL="127000" indent="-127000">
-              <a:spcAft>
-                <a:spcPts val="300"/>
-              </a:spcAft>
-              <a:buSzPct val="100000"/>
-              <a:buChar char="•"/>
-            </a:pPr>
-            <a:r>
-              <a:rPr lang="en-US" sz="1050" dirty="0">
-                <a:solidFill>
-                  <a:srgbClr val="1B2533"/>
-                </a:solidFill>
-                <a:latin typeface="Inter" pitchFamily="34" charset="0"/>
-                <a:ea typeface="Inter" pitchFamily="34" charset="-122"/>
-                <a:cs typeface="Inter" pitchFamily="34" charset="-120"/>
-              </a:rPr>
-              <a:t>14:45–22:45 — a new late, off by 22:45</a:t>
-            </a:r>
-            <a:endParaRPr lang="en-US" sz="1050" dirty="0"/>
-          </a:p>
-          <a:p>
-            <a:pPr marL="127000" indent="-127000">
-              <a:spcAft>
-                <a:spcPts val="300"/>
-              </a:spcAft>
-              <a:buSzPct val="100000"/>
-              <a:buChar char="•"/>
-            </a:pPr>
-            <a:r>
-              <a:rPr lang="en-US" sz="1050" dirty="0">
-                <a:solidFill>
-                  <a:srgbClr val="1B2533"/>
-                </a:solidFill>
-                <a:latin typeface="Inter" pitchFamily="34" charset="0"/>
-                <a:ea typeface="Inter" pitchFamily="34" charset="-122"/>
-                <a:cs typeface="Inter" pitchFamily="34" charset="-120"/>
-              </a:rPr>
-              <a:t>15:45–23:55 — the closer, an hour later</a:t>
-            </a:r>
-            <a:endParaRPr lang="en-US" sz="1050" dirty="0"/>
-          </a:p>
-        </p:txBody>
-      </p:sp>
-      <p:sp>
-        <p:nvSpPr>
-          <p:cNvPr id="14" name="Text 10"/>
-          <p:cNvSpPr txBox="1"/>
-          <p:nvPr/>
-        </p:nvSpPr>
-        <p:spPr>
-          <a:xfrm>
-            <a:off x="6035040" y="2542032"/>
-            <a:ext cx="2606040" cy="1463040"/>
-          </a:xfrm>
-          <a:prstGeom prst="rect">
-            <a:avLst/>
-          </a:prstGeom>
-          <a:noFill/>
-          <a:ln/>
-        </p:spPr>
-        <p:txBody>
-          <a:bodyPr wrap="square" lIns="0" tIns="0" rIns="0" bIns="0" rtlCol="0" anchor="t"/>
-          <a:lstStyle/>
-          <a:p>
-            <a:pPr indent="0" marL="0">
-              <a:spcAft>
-                <a:spcPts val="300"/>
-              </a:spcAft>
-              <a:buNone/>
-            </a:pPr>
-            <a:r>
-              <a:rPr lang="en-US" sz="1050" b="1" dirty="0">
-                <a:solidFill>
-                  <a:srgbClr val="001E3C"/>
-                </a:solidFill>
-                <a:latin typeface="Inter" pitchFamily="34" charset="0"/>
-                <a:ea typeface="Inter" pitchFamily="34" charset="-122"/>
-                <a:cs typeface="Inter" pitchFamily="34" charset="-120"/>
-              </a:rPr>
-              <a:t>Sunday</a:t>
-            </a:r>
-            <a:endParaRPr lang="en-US" sz="1050" dirty="0"/>
-          </a:p>
-          <a:p>
-            <a:pPr marL="127000" indent="-127000">
-              <a:spcAft>
-                <a:spcPts val="300"/>
-              </a:spcAft>
-              <a:buSzPct val="100000"/>
-              <a:buChar char="•"/>
-            </a:pPr>
-            <a:r>
-              <a:rPr lang="en-US" sz="1050" dirty="0">
-                <a:solidFill>
-                  <a:srgbClr val="1B2533"/>
-                </a:solidFill>
-                <a:latin typeface="Inter" pitchFamily="34" charset="0"/>
-                <a:ea typeface="Inter" pitchFamily="34" charset="-122"/>
-                <a:cs typeface="Inter" pitchFamily="34" charset="-120"/>
-              </a:rPr>
-              <a:t>07:15–15:30 — opener, 15 min shorter</a:t>
-            </a:r>
-            <a:endParaRPr lang="en-US" sz="1050" dirty="0"/>
-          </a:p>
-          <a:p>
-            <a:pPr marL="127000" indent="-127000">
-              <a:spcAft>
-                <a:spcPts val="300"/>
-              </a:spcAft>
-              <a:buSzPct val="100000"/>
-              <a:buChar char="•"/>
-            </a:pPr>
-            <a:r>
-              <a:rPr lang="en-US" sz="1050" dirty="0">
-                <a:solidFill>
-                  <a:srgbClr val="1B2533"/>
-                </a:solidFill>
-                <a:latin typeface="Inter" pitchFamily="34" charset="0"/>
-                <a:ea typeface="Inter" pitchFamily="34" charset="-122"/>
-                <a:cs typeface="Inter" pitchFamily="34" charset="-120"/>
-              </a:rPr>
-              <a:t>09:00–18:00 — a new early, 9 hours</a:t>
-            </a:r>
-            <a:endParaRPr lang="en-US" sz="1050" dirty="0"/>
-          </a:p>
-          <a:p>
-            <a:pPr marL="127000" indent="-127000">
-              <a:spcAft>
-                <a:spcPts val="300"/>
-              </a:spcAft>
-              <a:buSzPct val="100000"/>
-              <a:buChar char="•"/>
-            </a:pPr>
-            <a:r>
-              <a:rPr lang="en-US" sz="1050" dirty="0">
-                <a:solidFill>
-                  <a:srgbClr val="1B2533"/>
-                </a:solidFill>
-                <a:latin typeface="Inter" pitchFamily="34" charset="0"/>
-                <a:ea typeface="Inter" pitchFamily="34" charset="-122"/>
-                <a:cs typeface="Inter" pitchFamily="34" charset="-120"/>
-              </a:rPr>
-              <a:t>14:30–22:30 — the ticket-office late</a:t>
-            </a:r>
-            <a:endParaRPr lang="en-US" sz="1050" dirty="0"/>
-          </a:p>
-          <a:p>
-            <a:pPr marL="127000" indent="-127000">
-              <a:spcAft>
-                <a:spcPts val="300"/>
-              </a:spcAft>
-              <a:buSzPct val="100000"/>
-              <a:buChar char="•"/>
-            </a:pPr>
-            <a:r>
-              <a:rPr lang="en-US" sz="1050" dirty="0">
-                <a:solidFill>
-                  <a:srgbClr val="1B2533"/>
-                </a:solidFill>
-                <a:latin typeface="Inter" pitchFamily="34" charset="0"/>
-                <a:ea typeface="Inter" pitchFamily="34" charset="-122"/>
-                <a:cs typeface="Inter" pitchFamily="34" charset="-120"/>
-              </a:rPr>
-              <a:t>15:15–23:25 — the closer, 45 min later</a:t>
-            </a:r>
-            <a:endParaRPr lang="en-US" sz="1050" dirty="0"/>
-          </a:p>
-        </p:txBody>
-      </p:sp>
-      <p:sp>
-        <p:nvSpPr>
-          <p:cNvPr id="15" name="Shape 11"/>
+          <p:cNvPr id="20" name="Shape 17"/>
           <p:cNvSpPr/>
           <p:nvPr/>
         </p:nvSpPr>
@@ -13945,7 +15046,7 @@
       </p:sp>
       <p:sp>
         <p:nvSpPr>
-          <p:cNvPr id="16" name="Text 12"/>
+          <p:cNvPr id="21" name="Text 18"/>
           <p:cNvSpPr txBox="1"/>
           <p:nvPr/>
         </p:nvSpPr>
@@ -13984,7 +15085,7 @@
       </p:sp>
       <p:sp>
         <p:nvSpPr>
-          <p:cNvPr id="17" name="Text 13"/>
+          <p:cNvPr id="22" name="Text 19"/>
           <p:cNvSpPr txBox="1"/>
           <p:nvPr/>
         </p:nvSpPr>
@@ -14086,7 +15187,7 @@
                 <a:ea typeface="Inter" pitchFamily="34" charset="-122"/>
                 <a:cs typeface="Inter" pitchFamily="34" charset="-120"/>
               </a:rPr>
-              <a:t>Rest and weekends</a:t>
+              <a:t>The 12 new times</a:t>
             </a:r>
             <a:endParaRPr lang="en-US" sz="3000" dirty="0"/>
           </a:p>
@@ -14125,7 +15226,7 @@
                 <a:ea typeface="Inter" pitchFamily="34" charset="-122"/>
                 <a:cs typeface="Inter" pitchFamily="34" charset="-120"/>
               </a:rPr>
-              <a:t>The biggest improvement over today</a:t>
+              <a:t>By day, and how each one compares with today</a:t>
             </a:r>
             <a:endParaRPr lang="en-US" sz="1500" dirty="0"/>
           </a:p>
@@ -14133,96 +15234,18 @@
       </p:sp>
       <p:sp>
         <p:nvSpPr>
-          <p:cNvPr id="4" name="Text 2"/>
-          <p:cNvSpPr txBox="1"/>
-          <p:nvPr/>
-        </p:nvSpPr>
-        <p:spPr>
-          <a:xfrm>
-            <a:off x="4663440" y="1417320"/>
-            <a:ext cx="2011680" cy="320040"/>
-          </a:xfrm>
-          <a:prstGeom prst="rect">
-            <a:avLst/>
-          </a:prstGeom>
-          <a:noFill/>
-          <a:ln/>
-        </p:spPr>
-        <p:txBody>
-          <a:bodyPr wrap="square" lIns="0" tIns="0" rIns="0" bIns="0" rtlCol="0" anchor="ctr"/>
-          <a:lstStyle/>
-          <a:p>
-            <a:pPr algn="ctr" indent="0" marL="0">
-              <a:buNone/>
-            </a:pPr>
-            <a:r>
-              <a:rPr lang="en-US" sz="1300" b="1" dirty="0">
-                <a:solidFill>
-                  <a:srgbClr val="5B6778"/>
-                </a:solidFill>
-                <a:latin typeface="Inter" pitchFamily="34" charset="0"/>
-                <a:ea typeface="Inter" pitchFamily="34" charset="-122"/>
-                <a:cs typeface="Inter" pitchFamily="34" charset="-120"/>
-              </a:rPr>
-              <a:t>Today</a:t>
-            </a:r>
-            <a:endParaRPr lang="en-US" sz="1300" dirty="0"/>
-          </a:p>
-        </p:txBody>
-      </p:sp>
-      <p:sp>
-        <p:nvSpPr>
-          <p:cNvPr id="5" name="Text 3"/>
-          <p:cNvSpPr txBox="1"/>
-          <p:nvPr/>
-        </p:nvSpPr>
-        <p:spPr>
-          <a:xfrm>
-            <a:off x="6675120" y="1417320"/>
-            <a:ext cx="2011680" cy="320040"/>
-          </a:xfrm>
-          <a:prstGeom prst="rect">
-            <a:avLst/>
-          </a:prstGeom>
-          <a:noFill/>
-          <a:ln/>
-        </p:spPr>
-        <p:txBody>
-          <a:bodyPr wrap="square" lIns="0" tIns="0" rIns="0" bIns="0" rtlCol="0" anchor="ctr"/>
-          <a:lstStyle/>
-          <a:p>
-            <a:pPr algn="ctr" indent="0" marL="0">
-              <a:buNone/>
-            </a:pPr>
-            <a:r>
-              <a:rPr lang="en-US" sz="1300" b="1" dirty="0">
-                <a:solidFill>
-                  <a:srgbClr val="001E3C"/>
-                </a:solidFill>
-                <a:latin typeface="Inter" pitchFamily="34" charset="0"/>
-                <a:ea typeface="Inter" pitchFamily="34" charset="-122"/>
-                <a:cs typeface="Inter" pitchFamily="34" charset="-120"/>
-              </a:rPr>
-              <a:t>Right Away</a:t>
-            </a:r>
-            <a:endParaRPr lang="en-US" sz="1300" dirty="0"/>
-          </a:p>
-        </p:txBody>
-      </p:sp>
-      <p:sp>
-        <p:nvSpPr>
-          <p:cNvPr id="6" name="Shape 4"/>
+          <p:cNvPr id="4" name="Shape 2"/>
           <p:cNvSpPr/>
           <p:nvPr/>
         </p:nvSpPr>
         <p:spPr>
           <a:xfrm>
-            <a:off x="457200" y="1801368"/>
-            <a:ext cx="8229600" cy="365760"/>
+            <a:off x="457200" y="1325880"/>
+            <a:ext cx="2651760" cy="2697480"/>
           </a:xfrm>
           <a:prstGeom prst="roundRect">
             <a:avLst>
-              <a:gd name="adj" fmla="val 15000"/>
+              <a:gd name="adj" fmla="val 3448"/>
             </a:avLst>
           </a:prstGeom>
           <a:solidFill>
@@ -14238,14 +15261,14 @@
       </p:sp>
       <p:sp>
         <p:nvSpPr>
-          <p:cNvPr id="7" name="Text 5"/>
-          <p:cNvSpPr txBox="1"/>
-          <p:nvPr/>
-        </p:nvSpPr>
-        <p:spPr>
-          <a:xfrm>
-            <a:off x="640080" y="1801368"/>
-            <a:ext cx="4023360" cy="365760"/>
+          <p:cNvPr id="5" name="Text 3"/>
+          <p:cNvSpPr txBox="1"/>
+          <p:nvPr/>
+        </p:nvSpPr>
+        <p:spPr>
+          <a:xfrm>
+            <a:off x="640080" y="1444752"/>
+            <a:ext cx="2286000" cy="365760"/>
           </a:xfrm>
           <a:prstGeom prst="rect">
             <a:avLst/>
@@ -14261,7 +15284,46 @@
               <a:buNone/>
             </a:pPr>
             <a:r>
-              <a:rPr lang="en-US" sz="1400" dirty="0">
+              <a:rPr lang="en-US" sz="1600" b="1" dirty="0">
+                <a:solidFill>
+                  <a:srgbClr val="001E3C"/>
+                </a:solidFill>
+                <a:latin typeface="Inter" pitchFamily="34" charset="0"/>
+                <a:ea typeface="Inter" pitchFamily="34" charset="-122"/>
+                <a:cs typeface="Inter" pitchFamily="34" charset="-120"/>
+              </a:rPr>
+              <a:t>Weekdays</a:t>
+            </a:r>
+            <a:endParaRPr lang="en-US" sz="1600" dirty="0"/>
+          </a:p>
+        </p:txBody>
+      </p:sp>
+      <p:sp>
+        <p:nvSpPr>
+          <p:cNvPr id="6" name="Text 4"/>
+          <p:cNvSpPr txBox="1"/>
+          <p:nvPr/>
+        </p:nvSpPr>
+        <p:spPr>
+          <a:xfrm>
+            <a:off x="640080" y="1847088"/>
+            <a:ext cx="2331720" cy="2130552"/>
+          </a:xfrm>
+          <a:prstGeom prst="rect">
+            <a:avLst/>
+          </a:prstGeom>
+          <a:noFill/>
+          <a:ln/>
+        </p:spPr>
+        <p:txBody>
+          <a:bodyPr wrap="square" lIns="0" tIns="0" rIns="0" bIns="0" rtlCol="0" anchor="t"/>
+          <a:lstStyle/>
+          <a:p>
+            <a:pPr indent="0" marL="0">
+              <a:buNone/>
+            </a:pPr>
+            <a:r>
+              <a:rPr lang="en-US" sz="1200" b="1" dirty="0">
                 <a:solidFill>
                   <a:srgbClr val="1B2533"/>
                 </a:solidFill>
@@ -14269,38 +15331,19 @@
                 <a:ea typeface="Inter" pitchFamily="34" charset="-122"/>
                 <a:cs typeface="Inter" pitchFamily="34" charset="-120"/>
               </a:rPr>
-              <a:t>Full weekends off</a:t>
-            </a:r>
-            <a:endParaRPr lang="en-US" sz="1400" dirty="0"/>
-          </a:p>
-        </p:txBody>
-      </p:sp>
-      <p:sp>
-        <p:nvSpPr>
-          <p:cNvPr id="8" name="Text 6"/>
-          <p:cNvSpPr txBox="1"/>
-          <p:nvPr/>
-        </p:nvSpPr>
-        <p:spPr>
-          <a:xfrm>
-            <a:off x="4663440" y="1801368"/>
-            <a:ext cx="2011680" cy="365760"/>
-          </a:xfrm>
-          <a:prstGeom prst="rect">
-            <a:avLst/>
-          </a:prstGeom>
-          <a:noFill/>
-          <a:ln/>
-        </p:spPr>
-        <p:txBody>
-          <a:bodyPr wrap="square" lIns="0" tIns="0" rIns="0" bIns="0" rtlCol="0" anchor="ctr"/>
-          <a:lstStyle/>
-          <a:p>
-            <a:pPr algn="ctr" indent="0" marL="0">
-              <a:buNone/>
-            </a:pPr>
-            <a:r>
-              <a:rPr lang="en-US" sz="1600" dirty="0">
+              <a:t>06:20–14:30</a:t>
+            </a:r>
+            <a:endParaRPr lang="en-US" sz="1200" dirty="0"/>
+          </a:p>
+          <a:p>
+            <a:pPr indent="0" marL="0">
+              <a:spcAft>
+                <a:spcPts val="400"/>
+              </a:spcAft>
+              <a:buNone/>
+            </a:pPr>
+            <a:r>
+              <a:rPr lang="en-US" sz="1200" dirty="0">
                 <a:solidFill>
                   <a:srgbClr val="5B6778"/>
                 </a:solidFill>
@@ -14308,209 +15351,174 @@
                 <a:ea typeface="Inter" pitchFamily="34" charset="-122"/>
                 <a:cs typeface="Inter" pitchFamily="34" charset="-120"/>
               </a:rPr>
-              <a:t>4 in 20</a:t>
-            </a:r>
-            <a:endParaRPr lang="en-US" sz="1600" dirty="0"/>
-          </a:p>
-        </p:txBody>
-      </p:sp>
-      <p:sp>
-        <p:nvSpPr>
-          <p:cNvPr id="9" name="Text 7"/>
-          <p:cNvSpPr txBox="1"/>
-          <p:nvPr/>
-        </p:nvSpPr>
-        <p:spPr>
-          <a:xfrm>
-            <a:off x="6675120" y="1801368"/>
-            <a:ext cx="2011680" cy="365760"/>
-          </a:xfrm>
-          <a:prstGeom prst="rect">
-            <a:avLst/>
-          </a:prstGeom>
-          <a:noFill/>
-          <a:ln/>
-        </p:spPr>
-        <p:txBody>
-          <a:bodyPr wrap="square" lIns="0" tIns="0" rIns="0" bIns="0" rtlCol="0" anchor="ctr"/>
-          <a:lstStyle/>
-          <a:p>
-            <a:pPr algn="ctr" indent="0" marL="0">
-              <a:buNone/>
-            </a:pPr>
-            <a:r>
-              <a:rPr lang="en-US" sz="1800" b="1" dirty="0">
-                <a:solidFill>
-                  <a:srgbClr val="1E7B4B"/>
-                </a:solidFill>
-                <a:latin typeface="Inter" pitchFamily="34" charset="0"/>
-                <a:ea typeface="Inter" pitchFamily="34" charset="-122"/>
-                <a:cs typeface="Inter" pitchFamily="34" charset="-120"/>
-              </a:rPr>
-              <a:t>6 in 24</a:t>
-            </a:r>
-            <a:endParaRPr lang="en-US" sz="1800" dirty="0"/>
-          </a:p>
-        </p:txBody>
-      </p:sp>
-      <p:sp>
-        <p:nvSpPr>
-          <p:cNvPr id="10" name="Shape 8"/>
+              <a:t>off at 14:30, not 14:20</a:t>
+            </a:r>
+            <a:endParaRPr lang="en-US" sz="1200" dirty="0"/>
+          </a:p>
+          <a:p>
+            <a:pPr indent="0" marL="0">
+              <a:buNone/>
+            </a:pPr>
+            <a:r>
+              <a:rPr lang="en-US" sz="1200" b="1" dirty="0">
+                <a:solidFill>
+                  <a:srgbClr val="1B2533"/>
+                </a:solidFill>
+                <a:latin typeface="Inter" pitchFamily="34" charset="0"/>
+                <a:ea typeface="Inter" pitchFamily="34" charset="-122"/>
+                <a:cs typeface="Inter" pitchFamily="34" charset="-120"/>
+              </a:rPr>
+              <a:t>06:20–15:45</a:t>
+            </a:r>
+            <a:endParaRPr lang="en-US" sz="1200" dirty="0"/>
+          </a:p>
+          <a:p>
+            <a:pPr indent="0" marL="0">
+              <a:spcAft>
+                <a:spcPts val="400"/>
+              </a:spcAft>
+              <a:buNone/>
+            </a:pPr>
+            <a:r>
+              <a:rPr lang="en-US" sz="1200" dirty="0">
+                <a:solidFill>
+                  <a:srgbClr val="5B6778"/>
+                </a:solidFill>
+                <a:latin typeface="Inter" pitchFamily="34" charset="0"/>
+                <a:ea typeface="Inter" pitchFamily="34" charset="-122"/>
+                <a:cs typeface="Inter" pitchFamily="34" charset="-120"/>
+              </a:rPr>
+              <a:t>a long early, 9h 25m</a:t>
+            </a:r>
+            <a:endParaRPr lang="en-US" sz="1200" dirty="0"/>
+          </a:p>
+          <a:p>
+            <a:pPr indent="0" marL="0">
+              <a:buNone/>
+            </a:pPr>
+            <a:r>
+              <a:rPr lang="en-US" sz="1200" b="1" dirty="0">
+                <a:solidFill>
+                  <a:srgbClr val="1B2533"/>
+                </a:solidFill>
+                <a:latin typeface="Inter" pitchFamily="34" charset="0"/>
+                <a:ea typeface="Inter" pitchFamily="34" charset="-122"/>
+                <a:cs typeface="Inter" pitchFamily="34" charset="-120"/>
+              </a:rPr>
+              <a:t>07:00–16:15</a:t>
+            </a:r>
+            <a:endParaRPr lang="en-US" sz="1200" dirty="0"/>
+          </a:p>
+          <a:p>
+            <a:pPr indent="0" marL="0">
+              <a:spcAft>
+                <a:spcPts val="400"/>
+              </a:spcAft>
+              <a:buNone/>
+            </a:pPr>
+            <a:r>
+              <a:rPr lang="en-US" sz="1200" dirty="0">
+                <a:solidFill>
+                  <a:srgbClr val="5B6778"/>
+                </a:solidFill>
+                <a:latin typeface="Inter" pitchFamily="34" charset="0"/>
+                <a:ea typeface="Inter" pitchFamily="34" charset="-122"/>
+                <a:cs typeface="Inter" pitchFamily="34" charset="-120"/>
+              </a:rPr>
+              <a:t>a new early, 9h 15m</a:t>
+            </a:r>
+            <a:endParaRPr lang="en-US" sz="1200" dirty="0"/>
+          </a:p>
+          <a:p>
+            <a:pPr indent="0" marL="0">
+              <a:buNone/>
+            </a:pPr>
+            <a:r>
+              <a:rPr lang="en-US" sz="1200" b="1" dirty="0">
+                <a:solidFill>
+                  <a:srgbClr val="1B2533"/>
+                </a:solidFill>
+                <a:latin typeface="Inter" pitchFamily="34" charset="0"/>
+                <a:ea typeface="Inter" pitchFamily="34" charset="-122"/>
+                <a:cs typeface="Inter" pitchFamily="34" charset="-120"/>
+              </a:rPr>
+              <a:t>14:00–21:00</a:t>
+            </a:r>
+            <a:endParaRPr lang="en-US" sz="1200" dirty="0"/>
+          </a:p>
+          <a:p>
+            <a:pPr indent="0" marL="0">
+              <a:spcAft>
+                <a:spcPts val="400"/>
+              </a:spcAft>
+              <a:buNone/>
+            </a:pPr>
+            <a:r>
+              <a:rPr lang="en-US" sz="1200" dirty="0">
+                <a:solidFill>
+                  <a:srgbClr val="5B6778"/>
+                </a:solidFill>
+                <a:latin typeface="Inter" pitchFamily="34" charset="0"/>
+                <a:ea typeface="Inter" pitchFamily="34" charset="-122"/>
+                <a:cs typeface="Inter" pitchFamily="34" charset="-120"/>
+              </a:rPr>
+              <a:t>a short late, 7h</a:t>
+            </a:r>
+            <a:endParaRPr lang="en-US" sz="1200" dirty="0"/>
+          </a:p>
+          <a:p>
+            <a:pPr indent="0" marL="0">
+              <a:buNone/>
+            </a:pPr>
+            <a:r>
+              <a:rPr lang="en-US" sz="1200" b="1" dirty="0">
+                <a:solidFill>
+                  <a:srgbClr val="1B2533"/>
+                </a:solidFill>
+                <a:latin typeface="Inter" pitchFamily="34" charset="0"/>
+                <a:ea typeface="Inter" pitchFamily="34" charset="-122"/>
+                <a:cs typeface="Inter" pitchFamily="34" charset="-120"/>
+              </a:rPr>
+              <a:t>15:45–23:55</a:t>
+            </a:r>
+            <a:endParaRPr lang="en-US" sz="1200" dirty="0"/>
+          </a:p>
+          <a:p>
+            <a:pPr indent="0" marL="0">
+              <a:spcAft>
+                <a:spcPts val="400"/>
+              </a:spcAft>
+              <a:buNone/>
+            </a:pPr>
+            <a:r>
+              <a:rPr lang="en-US" sz="1200" dirty="0">
+                <a:solidFill>
+                  <a:srgbClr val="5B6778"/>
+                </a:solidFill>
+                <a:latin typeface="Inter" pitchFamily="34" charset="0"/>
+                <a:ea typeface="Inter" pitchFamily="34" charset="-122"/>
+                <a:cs typeface="Inter" pitchFamily="34" charset="-120"/>
+              </a:rPr>
+              <a:t>the closer, 30 min later</a:t>
+            </a:r>
+            <a:endParaRPr lang="en-US" sz="1200" dirty="0"/>
+          </a:p>
+        </p:txBody>
+      </p:sp>
+      <p:sp>
+        <p:nvSpPr>
+          <p:cNvPr id="7" name="Shape 5"/>
           <p:cNvSpPr/>
           <p:nvPr/>
         </p:nvSpPr>
         <p:spPr>
           <a:xfrm>
-            <a:off x="457200" y="2258568"/>
-            <a:ext cx="8229600" cy="365760"/>
+            <a:off x="3246120" y="1325880"/>
+            <a:ext cx="2651760" cy="2697480"/>
           </a:xfrm>
           <a:prstGeom prst="roundRect">
             <a:avLst>
-              <a:gd name="adj" fmla="val 15000"/>
-            </a:avLst>
-          </a:prstGeom>
-          <a:solidFill>
-            <a:srgbClr val="FFFFFF"/>
-          </a:solidFill>
-          <a:ln w="12700">
-            <a:solidFill>
-              <a:srgbClr val="DDE3EA"/>
-            </a:solidFill>
-            <a:prstDash val="solid"/>
-          </a:ln>
-        </p:spPr>
-      </p:sp>
-      <p:sp>
-        <p:nvSpPr>
-          <p:cNvPr id="11" name="Text 9"/>
-          <p:cNvSpPr txBox="1"/>
-          <p:nvPr/>
-        </p:nvSpPr>
-        <p:spPr>
-          <a:xfrm>
-            <a:off x="640080" y="2258568"/>
-            <a:ext cx="4023360" cy="365760"/>
-          </a:xfrm>
-          <a:prstGeom prst="rect">
-            <a:avLst/>
-          </a:prstGeom>
-          <a:noFill/>
-          <a:ln/>
-        </p:spPr>
-        <p:txBody>
-          <a:bodyPr wrap="square" lIns="0" tIns="0" rIns="0" bIns="0" rtlCol="0" anchor="ctr"/>
-          <a:lstStyle/>
-          <a:p>
-            <a:pPr indent="0" marL="0">
-              <a:buNone/>
-            </a:pPr>
-            <a:r>
-              <a:rPr lang="en-US" sz="1400" dirty="0">
-                <a:solidFill>
-                  <a:srgbClr val="1B2533"/>
-                </a:solidFill>
-                <a:latin typeface="Inter" pitchFamily="34" charset="0"/>
-                <a:ea typeface="Inter" pitchFamily="34" charset="-122"/>
-                <a:cs typeface="Inter" pitchFamily="34" charset="-120"/>
-              </a:rPr>
-              <a:t>Most days worked in a row</a:t>
-            </a:r>
-            <a:endParaRPr lang="en-US" sz="1400" dirty="0"/>
-          </a:p>
-        </p:txBody>
-      </p:sp>
-      <p:sp>
-        <p:nvSpPr>
-          <p:cNvPr id="12" name="Text 10"/>
-          <p:cNvSpPr txBox="1"/>
-          <p:nvPr/>
-        </p:nvSpPr>
-        <p:spPr>
-          <a:xfrm>
-            <a:off x="4663440" y="2258568"/>
-            <a:ext cx="2011680" cy="365760"/>
-          </a:xfrm>
-          <a:prstGeom prst="rect">
-            <a:avLst/>
-          </a:prstGeom>
-          <a:noFill/>
-          <a:ln/>
-        </p:spPr>
-        <p:txBody>
-          <a:bodyPr wrap="square" lIns="0" tIns="0" rIns="0" bIns="0" rtlCol="0" anchor="ctr"/>
-          <a:lstStyle/>
-          <a:p>
-            <a:pPr algn="ctr" indent="0" marL="0">
-              <a:buNone/>
-            </a:pPr>
-            <a:r>
-              <a:rPr lang="en-US" sz="1600" dirty="0">
-                <a:solidFill>
-                  <a:srgbClr val="5B6778"/>
-                </a:solidFill>
-                <a:latin typeface="Inter" pitchFamily="34" charset="0"/>
-                <a:ea typeface="Inter" pitchFamily="34" charset="-122"/>
-                <a:cs typeface="Inter" pitchFamily="34" charset="-120"/>
-              </a:rPr>
-              <a:t>9</a:t>
-            </a:r>
-            <a:endParaRPr lang="en-US" sz="1600" dirty="0"/>
-          </a:p>
-        </p:txBody>
-      </p:sp>
-      <p:sp>
-        <p:nvSpPr>
-          <p:cNvPr id="13" name="Text 11"/>
-          <p:cNvSpPr txBox="1"/>
-          <p:nvPr/>
-        </p:nvSpPr>
-        <p:spPr>
-          <a:xfrm>
-            <a:off x="6675120" y="2258568"/>
-            <a:ext cx="2011680" cy="365760"/>
-          </a:xfrm>
-          <a:prstGeom prst="rect">
-            <a:avLst/>
-          </a:prstGeom>
-          <a:noFill/>
-          <a:ln/>
-        </p:spPr>
-        <p:txBody>
-          <a:bodyPr wrap="square" lIns="0" tIns="0" rIns="0" bIns="0" rtlCol="0" anchor="ctr"/>
-          <a:lstStyle/>
-          <a:p>
-            <a:pPr algn="ctr" indent="0" marL="0">
-              <a:buNone/>
-            </a:pPr>
-            <a:r>
-              <a:rPr lang="en-US" sz="1800" b="1" dirty="0">
-                <a:solidFill>
-                  <a:srgbClr val="1E7B4B"/>
-                </a:solidFill>
-                <a:latin typeface="Inter" pitchFamily="34" charset="0"/>
-                <a:ea typeface="Inter" pitchFamily="34" charset="-122"/>
-                <a:cs typeface="Inter" pitchFamily="34" charset="-120"/>
-              </a:rPr>
-              <a:t>6</a:t>
-            </a:r>
-            <a:endParaRPr lang="en-US" sz="1800" dirty="0"/>
-          </a:p>
-        </p:txBody>
-      </p:sp>
-      <p:sp>
-        <p:nvSpPr>
-          <p:cNvPr id="14" name="Shape 12"/>
-          <p:cNvSpPr/>
-          <p:nvPr/>
-        </p:nvSpPr>
-        <p:spPr>
-          <a:xfrm>
-            <a:off x="457200" y="2715768"/>
-            <a:ext cx="8229600" cy="365760"/>
-          </a:xfrm>
-          <a:prstGeom prst="roundRect">
-            <a:avLst>
-              <a:gd name="adj" fmla="val 15000"/>
+              <a:gd name="adj" fmla="val 3448"/>
             </a:avLst>
           </a:prstGeom>
           <a:solidFill>
@@ -14526,14 +15534,14 @@
       </p:sp>
       <p:sp>
         <p:nvSpPr>
-          <p:cNvPr id="15" name="Text 13"/>
-          <p:cNvSpPr txBox="1"/>
-          <p:nvPr/>
-        </p:nvSpPr>
-        <p:spPr>
-          <a:xfrm>
-            <a:off x="640080" y="2715768"/>
-            <a:ext cx="4023360" cy="365760"/>
+          <p:cNvPr id="8" name="Text 6"/>
+          <p:cNvSpPr txBox="1"/>
+          <p:nvPr/>
+        </p:nvSpPr>
+        <p:spPr>
+          <a:xfrm>
+            <a:off x="3429000" y="1444752"/>
+            <a:ext cx="2286000" cy="365760"/>
           </a:xfrm>
           <a:prstGeom prst="rect">
             <a:avLst/>
@@ -14549,7 +15557,46 @@
               <a:buNone/>
             </a:pPr>
             <a:r>
-              <a:rPr lang="en-US" sz="1400" dirty="0">
+              <a:rPr lang="en-US" sz="1600" b="1" dirty="0">
+                <a:solidFill>
+                  <a:srgbClr val="001E3C"/>
+                </a:solidFill>
+                <a:latin typeface="Inter" pitchFamily="34" charset="0"/>
+                <a:ea typeface="Inter" pitchFamily="34" charset="-122"/>
+                <a:cs typeface="Inter" pitchFamily="34" charset="-120"/>
+              </a:rPr>
+              <a:t>Saturday</a:t>
+            </a:r>
+            <a:endParaRPr lang="en-US" sz="1600" dirty="0"/>
+          </a:p>
+        </p:txBody>
+      </p:sp>
+      <p:sp>
+        <p:nvSpPr>
+          <p:cNvPr id="9" name="Text 7"/>
+          <p:cNvSpPr txBox="1"/>
+          <p:nvPr/>
+        </p:nvSpPr>
+        <p:spPr>
+          <a:xfrm>
+            <a:off x="3429000" y="1847088"/>
+            <a:ext cx="2331720" cy="2130552"/>
+          </a:xfrm>
+          <a:prstGeom prst="rect">
+            <a:avLst/>
+          </a:prstGeom>
+          <a:noFill/>
+          <a:ln/>
+        </p:spPr>
+        <p:txBody>
+          <a:bodyPr wrap="square" lIns="0" tIns="0" rIns="0" bIns="0" rtlCol="0" anchor="t"/>
+          <a:lstStyle/>
+          <a:p>
+            <a:pPr indent="0" marL="0">
+              <a:buNone/>
+            </a:pPr>
+            <a:r>
+              <a:rPr lang="en-US" sz="1200" b="1" dirty="0">
                 <a:solidFill>
                   <a:srgbClr val="1B2533"/>
                 </a:solidFill>
@@ -14557,38 +15604,19 @@
                 <a:ea typeface="Inter" pitchFamily="34" charset="-122"/>
                 <a:cs typeface="Inter" pitchFamily="34" charset="-120"/>
               </a:rPr>
-              <a:t>Rest-day breaks of two days or more</a:t>
-            </a:r>
-            <a:endParaRPr lang="en-US" sz="1400" dirty="0"/>
-          </a:p>
-        </p:txBody>
-      </p:sp>
-      <p:sp>
-        <p:nvSpPr>
-          <p:cNvPr id="16" name="Text 14"/>
-          <p:cNvSpPr txBox="1"/>
-          <p:nvPr/>
-        </p:nvSpPr>
-        <p:spPr>
-          <a:xfrm>
-            <a:off x="4663440" y="2715768"/>
-            <a:ext cx="2011680" cy="365760"/>
-          </a:xfrm>
-          <a:prstGeom prst="rect">
-            <a:avLst/>
-          </a:prstGeom>
-          <a:noFill/>
-          <a:ln/>
-        </p:spPr>
-        <p:txBody>
-          <a:bodyPr wrap="square" lIns="0" tIns="0" rIns="0" bIns="0" rtlCol="0" anchor="ctr"/>
-          <a:lstStyle/>
-          <a:p>
-            <a:pPr algn="ctr" indent="0" marL="0">
-              <a:buNone/>
-            </a:pPr>
-            <a:r>
-              <a:rPr lang="en-US" sz="1600" dirty="0">
+              <a:t>06:20–15:30</a:t>
+            </a:r>
+            <a:endParaRPr lang="en-US" sz="1200" dirty="0"/>
+          </a:p>
+          <a:p>
+            <a:pPr indent="0" marL="0">
+              <a:spcAft>
+                <a:spcPts val="400"/>
+              </a:spcAft>
+              <a:buNone/>
+            </a:pPr>
+            <a:r>
+              <a:rPr lang="en-US" sz="1200" dirty="0">
                 <a:solidFill>
                   <a:srgbClr val="5B6778"/>
                 </a:solidFill>
@@ -14596,209 +15624,137 @@
                 <a:ea typeface="Inter" pitchFamily="34" charset="-122"/>
                 <a:cs typeface="Inter" pitchFamily="34" charset="-120"/>
               </a:rPr>
-              <a:t>13 of 17</a:t>
-            </a:r>
-            <a:endParaRPr lang="en-US" sz="1600" dirty="0"/>
-          </a:p>
-        </p:txBody>
-      </p:sp>
-      <p:sp>
-        <p:nvSpPr>
-          <p:cNvPr id="17" name="Text 15"/>
-          <p:cNvSpPr txBox="1"/>
-          <p:nvPr/>
-        </p:nvSpPr>
-        <p:spPr>
-          <a:xfrm>
-            <a:off x="6675120" y="2715768"/>
-            <a:ext cx="2011680" cy="365760"/>
-          </a:xfrm>
-          <a:prstGeom prst="rect">
-            <a:avLst/>
-          </a:prstGeom>
-          <a:noFill/>
-          <a:ln/>
-        </p:spPr>
-        <p:txBody>
-          <a:bodyPr wrap="square" lIns="0" tIns="0" rIns="0" bIns="0" rtlCol="0" anchor="ctr"/>
-          <a:lstStyle/>
-          <a:p>
-            <a:pPr algn="ctr" indent="0" marL="0">
-              <a:buNone/>
-            </a:pPr>
-            <a:r>
-              <a:rPr lang="en-US" sz="1800" b="1" dirty="0">
-                <a:solidFill>
-                  <a:srgbClr val="1E7B4B"/>
-                </a:solidFill>
-                <a:latin typeface="Inter" pitchFamily="34" charset="0"/>
-                <a:ea typeface="Inter" pitchFamily="34" charset="-122"/>
-                <a:cs typeface="Inter" pitchFamily="34" charset="-120"/>
-              </a:rPr>
-              <a:t>22 of 24</a:t>
-            </a:r>
-            <a:endParaRPr lang="en-US" sz="1800" dirty="0"/>
-          </a:p>
-        </p:txBody>
-      </p:sp>
-      <p:sp>
-        <p:nvSpPr>
-          <p:cNvPr id="18" name="Shape 16"/>
+              <a:t>off at 15:30, not 14:50</a:t>
+            </a:r>
+            <a:endParaRPr lang="en-US" sz="1200" dirty="0"/>
+          </a:p>
+          <a:p>
+            <a:pPr indent="0" marL="0">
+              <a:buNone/>
+            </a:pPr>
+            <a:r>
+              <a:rPr lang="en-US" sz="1200" b="1" dirty="0">
+                <a:solidFill>
+                  <a:srgbClr val="1B2533"/>
+                </a:solidFill>
+                <a:latin typeface="Inter" pitchFamily="34" charset="0"/>
+                <a:ea typeface="Inter" pitchFamily="34" charset="-122"/>
+                <a:cs typeface="Inter" pitchFamily="34" charset="-120"/>
+              </a:rPr>
+              <a:t>07:15–16:45</a:t>
+            </a:r>
+            <a:endParaRPr lang="en-US" sz="1200" dirty="0"/>
+          </a:p>
+          <a:p>
+            <a:pPr indent="0" marL="0">
+              <a:spcAft>
+                <a:spcPts val="400"/>
+              </a:spcAft>
+              <a:buNone/>
+            </a:pPr>
+            <a:r>
+              <a:rPr lang="en-US" sz="1200" dirty="0">
+                <a:solidFill>
+                  <a:srgbClr val="5B6778"/>
+                </a:solidFill>
+                <a:latin typeface="Inter" pitchFamily="34" charset="0"/>
+                <a:ea typeface="Inter" pitchFamily="34" charset="-122"/>
+                <a:cs typeface="Inter" pitchFamily="34" charset="-120"/>
+              </a:rPr>
+              <a:t>a new early, 9h 30m</a:t>
+            </a:r>
+            <a:endParaRPr lang="en-US" sz="1200" dirty="0"/>
+          </a:p>
+          <a:p>
+            <a:pPr indent="0" marL="0">
+              <a:buNone/>
+            </a:pPr>
+            <a:r>
+              <a:rPr lang="en-US" sz="1200" b="1" dirty="0">
+                <a:solidFill>
+                  <a:srgbClr val="1B2533"/>
+                </a:solidFill>
+                <a:latin typeface="Inter" pitchFamily="34" charset="0"/>
+                <a:ea typeface="Inter" pitchFamily="34" charset="-122"/>
+                <a:cs typeface="Inter" pitchFamily="34" charset="-120"/>
+              </a:rPr>
+              <a:t>14:45–22:45</a:t>
+            </a:r>
+            <a:endParaRPr lang="en-US" sz="1200" dirty="0"/>
+          </a:p>
+          <a:p>
+            <a:pPr indent="0" marL="0">
+              <a:spcAft>
+                <a:spcPts val="400"/>
+              </a:spcAft>
+              <a:buNone/>
+            </a:pPr>
+            <a:r>
+              <a:rPr lang="en-US" sz="1200" dirty="0">
+                <a:solidFill>
+                  <a:srgbClr val="5B6778"/>
+                </a:solidFill>
+                <a:latin typeface="Inter" pitchFamily="34" charset="0"/>
+                <a:ea typeface="Inter" pitchFamily="34" charset="-122"/>
+                <a:cs typeface="Inter" pitchFamily="34" charset="-120"/>
+              </a:rPr>
+              <a:t>a new late, off by 22:45</a:t>
+            </a:r>
+            <a:endParaRPr lang="en-US" sz="1200" dirty="0"/>
+          </a:p>
+          <a:p>
+            <a:pPr indent="0" marL="0">
+              <a:buNone/>
+            </a:pPr>
+            <a:r>
+              <a:rPr lang="en-US" sz="1200" b="1" dirty="0">
+                <a:solidFill>
+                  <a:srgbClr val="1B2533"/>
+                </a:solidFill>
+                <a:latin typeface="Inter" pitchFamily="34" charset="0"/>
+                <a:ea typeface="Inter" pitchFamily="34" charset="-122"/>
+                <a:cs typeface="Inter" pitchFamily="34" charset="-120"/>
+              </a:rPr>
+              <a:t>15:45–23:55</a:t>
+            </a:r>
+            <a:endParaRPr lang="en-US" sz="1200" dirty="0"/>
+          </a:p>
+          <a:p>
+            <a:pPr indent="0" marL="0">
+              <a:spcAft>
+                <a:spcPts val="400"/>
+              </a:spcAft>
+              <a:buNone/>
+            </a:pPr>
+            <a:r>
+              <a:rPr lang="en-US" sz="1200" dirty="0">
+                <a:solidFill>
+                  <a:srgbClr val="5B6778"/>
+                </a:solidFill>
+                <a:latin typeface="Inter" pitchFamily="34" charset="0"/>
+                <a:ea typeface="Inter" pitchFamily="34" charset="-122"/>
+                <a:cs typeface="Inter" pitchFamily="34" charset="-120"/>
+              </a:rPr>
+              <a:t>the closer, an hour later</a:t>
+            </a:r>
+            <a:endParaRPr lang="en-US" sz="1200" dirty="0"/>
+          </a:p>
+        </p:txBody>
+      </p:sp>
+      <p:sp>
+        <p:nvSpPr>
+          <p:cNvPr id="10" name="Shape 8"/>
           <p:cNvSpPr/>
           <p:nvPr/>
         </p:nvSpPr>
         <p:spPr>
           <a:xfrm>
-            <a:off x="457200" y="3172968"/>
-            <a:ext cx="8229600" cy="365760"/>
+            <a:off x="6035040" y="1325880"/>
+            <a:ext cx="2651760" cy="2697480"/>
           </a:xfrm>
           <a:prstGeom prst="roundRect">
             <a:avLst>
-              <a:gd name="adj" fmla="val 15000"/>
-            </a:avLst>
-          </a:prstGeom>
-          <a:solidFill>
-            <a:srgbClr val="FFFFFF"/>
-          </a:solidFill>
-          <a:ln w="12700">
-            <a:solidFill>
-              <a:srgbClr val="DDE3EA"/>
-            </a:solidFill>
-            <a:prstDash val="solid"/>
-          </a:ln>
-        </p:spPr>
-      </p:sp>
-      <p:sp>
-        <p:nvSpPr>
-          <p:cNvPr id="19" name="Text 17"/>
-          <p:cNvSpPr txBox="1"/>
-          <p:nvPr/>
-        </p:nvSpPr>
-        <p:spPr>
-          <a:xfrm>
-            <a:off x="640080" y="3172968"/>
-            <a:ext cx="4023360" cy="365760"/>
-          </a:xfrm>
-          <a:prstGeom prst="rect">
-            <a:avLst/>
-          </a:prstGeom>
-          <a:noFill/>
-          <a:ln/>
-        </p:spPr>
-        <p:txBody>
-          <a:bodyPr wrap="square" lIns="0" tIns="0" rIns="0" bIns="0" rtlCol="0" anchor="ctr"/>
-          <a:lstStyle/>
-          <a:p>
-            <a:pPr indent="0" marL="0">
-              <a:buNone/>
-            </a:pPr>
-            <a:r>
-              <a:rPr lang="en-US" sz="1400" dirty="0">
-                <a:solidFill>
-                  <a:srgbClr val="1B2533"/>
-                </a:solidFill>
-                <a:latin typeface="Inter" pitchFamily="34" charset="0"/>
-                <a:ea typeface="Inter" pitchFamily="34" charset="-122"/>
-                <a:cs typeface="Inter" pitchFamily="34" charset="-120"/>
-              </a:rPr>
-              <a:t>Shortest gap between two shifts</a:t>
-            </a:r>
-            <a:endParaRPr lang="en-US" sz="1400" dirty="0"/>
-          </a:p>
-        </p:txBody>
-      </p:sp>
-      <p:sp>
-        <p:nvSpPr>
-          <p:cNvPr id="20" name="Text 18"/>
-          <p:cNvSpPr txBox="1"/>
-          <p:nvPr/>
-        </p:nvSpPr>
-        <p:spPr>
-          <a:xfrm>
-            <a:off x="4663440" y="3172968"/>
-            <a:ext cx="2011680" cy="365760"/>
-          </a:xfrm>
-          <a:prstGeom prst="rect">
-            <a:avLst/>
-          </a:prstGeom>
-          <a:noFill/>
-          <a:ln/>
-        </p:spPr>
-        <p:txBody>
-          <a:bodyPr wrap="square" lIns="0" tIns="0" rIns="0" bIns="0" rtlCol="0" anchor="ctr"/>
-          <a:lstStyle/>
-          <a:p>
-            <a:pPr algn="ctr" indent="0" marL="0">
-              <a:buNone/>
-            </a:pPr>
-            <a:r>
-              <a:rPr lang="en-US" sz="1600" dirty="0">
-                <a:solidFill>
-                  <a:srgbClr val="5B6778"/>
-                </a:solidFill>
-                <a:latin typeface="Inter" pitchFamily="34" charset="0"/>
-                <a:ea typeface="Inter" pitchFamily="34" charset="-122"/>
-                <a:cs typeface="Inter" pitchFamily="34" charset="-120"/>
-              </a:rPr>
-              <a:t>12h 30m</a:t>
-            </a:r>
-            <a:endParaRPr lang="en-US" sz="1600" dirty="0"/>
-          </a:p>
-        </p:txBody>
-      </p:sp>
-      <p:sp>
-        <p:nvSpPr>
-          <p:cNvPr id="21" name="Text 19"/>
-          <p:cNvSpPr txBox="1"/>
-          <p:nvPr/>
-        </p:nvSpPr>
-        <p:spPr>
-          <a:xfrm>
-            <a:off x="6675120" y="3172968"/>
-            <a:ext cx="2011680" cy="365760"/>
-          </a:xfrm>
-          <a:prstGeom prst="rect">
-            <a:avLst/>
-          </a:prstGeom>
-          <a:noFill/>
-          <a:ln/>
-        </p:spPr>
-        <p:txBody>
-          <a:bodyPr wrap="square" lIns="0" tIns="0" rIns="0" bIns="0" rtlCol="0" anchor="ctr"/>
-          <a:lstStyle/>
-          <a:p>
-            <a:pPr algn="ctr" indent="0" marL="0">
-              <a:buNone/>
-            </a:pPr>
-            <a:r>
-              <a:rPr lang="en-US" sz="1800" b="1" dirty="0">
-                <a:solidFill>
-                  <a:srgbClr val="1E7B4B"/>
-                </a:solidFill>
-                <a:latin typeface="Inter" pitchFamily="34" charset="0"/>
-                <a:ea typeface="Inter" pitchFamily="34" charset="-122"/>
-                <a:cs typeface="Inter" pitchFamily="34" charset="-120"/>
-              </a:rPr>
-              <a:t>14h 05m</a:t>
-            </a:r>
-            <a:endParaRPr lang="en-US" sz="1800" dirty="0"/>
-          </a:p>
-        </p:txBody>
-      </p:sp>
-      <p:sp>
-        <p:nvSpPr>
-          <p:cNvPr id="22" name="Shape 20"/>
-          <p:cNvSpPr/>
-          <p:nvPr/>
-        </p:nvSpPr>
-        <p:spPr>
-          <a:xfrm>
-            <a:off x="457200" y="3630168"/>
-            <a:ext cx="8229600" cy="365760"/>
-          </a:xfrm>
-          <a:prstGeom prst="roundRect">
-            <a:avLst>
-              <a:gd name="adj" fmla="val 15000"/>
+              <a:gd name="adj" fmla="val 3448"/>
             </a:avLst>
           </a:prstGeom>
           <a:solidFill>
@@ -14814,14 +15770,14 @@
       </p:sp>
       <p:sp>
         <p:nvSpPr>
-          <p:cNvPr id="23" name="Text 21"/>
-          <p:cNvSpPr txBox="1"/>
-          <p:nvPr/>
-        </p:nvSpPr>
-        <p:spPr>
-          <a:xfrm>
-            <a:off x="640080" y="3630168"/>
-            <a:ext cx="4023360" cy="365760"/>
+          <p:cNvPr id="11" name="Text 9"/>
+          <p:cNvSpPr txBox="1"/>
+          <p:nvPr/>
+        </p:nvSpPr>
+        <p:spPr>
+          <a:xfrm>
+            <a:off x="6217920" y="1444752"/>
+            <a:ext cx="2286000" cy="365760"/>
           </a:xfrm>
           <a:prstGeom prst="rect">
             <a:avLst/>
@@ -14837,7 +15793,46 @@
               <a:buNone/>
             </a:pPr>
             <a:r>
-              <a:rPr lang="en-US" sz="1400" dirty="0">
+              <a:rPr lang="en-US" sz="1600" b="1" dirty="0">
+                <a:solidFill>
+                  <a:srgbClr val="001E3C"/>
+                </a:solidFill>
+                <a:latin typeface="Inter" pitchFamily="34" charset="0"/>
+                <a:ea typeface="Inter" pitchFamily="34" charset="-122"/>
+                <a:cs typeface="Inter" pitchFamily="34" charset="-120"/>
+              </a:rPr>
+              <a:t>Sunday</a:t>
+            </a:r>
+            <a:endParaRPr lang="en-US" sz="1600" dirty="0"/>
+          </a:p>
+        </p:txBody>
+      </p:sp>
+      <p:sp>
+        <p:nvSpPr>
+          <p:cNvPr id="12" name="Text 10"/>
+          <p:cNvSpPr txBox="1"/>
+          <p:nvPr/>
+        </p:nvSpPr>
+        <p:spPr>
+          <a:xfrm>
+            <a:off x="6217920" y="1847088"/>
+            <a:ext cx="2331720" cy="2130552"/>
+          </a:xfrm>
+          <a:prstGeom prst="rect">
+            <a:avLst/>
+          </a:prstGeom>
+          <a:noFill/>
+          <a:ln/>
+        </p:spPr>
+        <p:txBody>
+          <a:bodyPr wrap="square" lIns="0" tIns="0" rIns="0" bIns="0" rtlCol="0" anchor="t"/>
+          <a:lstStyle/>
+          <a:p>
+            <a:pPr indent="0" marL="0">
+              <a:buNone/>
+            </a:pPr>
+            <a:r>
+              <a:rPr lang="en-US" sz="1200" b="1" dirty="0">
                 <a:solidFill>
                   <a:srgbClr val="1B2533"/>
                 </a:solidFill>
@@ -14845,38 +15840,19 @@
                 <a:ea typeface="Inter" pitchFamily="34" charset="-122"/>
                 <a:cs typeface="Inter" pitchFamily="34" charset="-120"/>
               </a:rPr>
-              <a:t>Weeks on one turn, Monday to Friday</a:t>
-            </a:r>
-            <a:endParaRPr lang="en-US" sz="1400" dirty="0"/>
-          </a:p>
-        </p:txBody>
-      </p:sp>
-      <p:sp>
-        <p:nvSpPr>
-          <p:cNvPr id="24" name="Text 22"/>
-          <p:cNvSpPr txBox="1"/>
-          <p:nvPr/>
-        </p:nvSpPr>
-        <p:spPr>
-          <a:xfrm>
-            <a:off x="4663440" y="3630168"/>
-            <a:ext cx="2011680" cy="365760"/>
-          </a:xfrm>
-          <a:prstGeom prst="rect">
-            <a:avLst/>
-          </a:prstGeom>
-          <a:noFill/>
-          <a:ln/>
-        </p:spPr>
-        <p:txBody>
-          <a:bodyPr wrap="square" lIns="0" tIns="0" rIns="0" bIns="0" rtlCol="0" anchor="ctr"/>
-          <a:lstStyle/>
-          <a:p>
-            <a:pPr algn="ctr" indent="0" marL="0">
-              <a:buNone/>
-            </a:pPr>
-            <a:r>
-              <a:rPr lang="en-US" sz="1600" dirty="0">
+              <a:t>07:15–15:30</a:t>
+            </a:r>
+            <a:endParaRPr lang="en-US" sz="1200" dirty="0"/>
+          </a:p>
+          <a:p>
+            <a:pPr indent="0" marL="0">
+              <a:spcAft>
+                <a:spcPts val="400"/>
+              </a:spcAft>
+              <a:buNone/>
+            </a:pPr>
+            <a:r>
+              <a:rPr lang="en-US" sz="1200" dirty="0">
                 <a:solidFill>
                   <a:srgbClr val="5B6778"/>
                 </a:solidFill>
@@ -14884,54 +15860,126 @@
                 <a:ea typeface="Inter" pitchFamily="34" charset="-122"/>
                 <a:cs typeface="Inter" pitchFamily="34" charset="-120"/>
               </a:rPr>
-              <a:t>7 of 16</a:t>
-            </a:r>
-            <a:endParaRPr lang="en-US" sz="1600" dirty="0"/>
-          </a:p>
-        </p:txBody>
-      </p:sp>
-      <p:sp>
-        <p:nvSpPr>
-          <p:cNvPr id="25" name="Text 23"/>
-          <p:cNvSpPr txBox="1"/>
-          <p:nvPr/>
-        </p:nvSpPr>
-        <p:spPr>
-          <a:xfrm>
-            <a:off x="6675120" y="3630168"/>
-            <a:ext cx="2011680" cy="365760"/>
-          </a:xfrm>
-          <a:prstGeom prst="rect">
-            <a:avLst/>
-          </a:prstGeom>
-          <a:noFill/>
-          <a:ln/>
-        </p:spPr>
-        <p:txBody>
-          <a:bodyPr wrap="square" lIns="0" tIns="0" rIns="0" bIns="0" rtlCol="0" anchor="ctr"/>
-          <a:lstStyle/>
-          <a:p>
-            <a:pPr algn="ctr" indent="0" marL="0">
-              <a:buNone/>
-            </a:pPr>
-            <a:r>
-              <a:rPr lang="en-US" sz="1800" b="1" dirty="0">
-                <a:solidFill>
-                  <a:srgbClr val="1E7B4B"/>
-                </a:solidFill>
-                <a:latin typeface="Inter" pitchFamily="34" charset="0"/>
-                <a:ea typeface="Inter" pitchFamily="34" charset="-122"/>
-                <a:cs typeface="Inter" pitchFamily="34" charset="-120"/>
-              </a:rPr>
-              <a:t>14 of 20</a:t>
-            </a:r>
-            <a:endParaRPr lang="en-US" sz="1800" dirty="0"/>
-          </a:p>
-        </p:txBody>
-      </p:sp>
-      <p:sp>
-        <p:nvSpPr>
-          <p:cNvPr id="26" name="Shape 24"/>
+              <a:t>the opener, 15 min shorter</a:t>
+            </a:r>
+            <a:endParaRPr lang="en-US" sz="1200" dirty="0"/>
+          </a:p>
+          <a:p>
+            <a:pPr indent="0" marL="0">
+              <a:buNone/>
+            </a:pPr>
+            <a:r>
+              <a:rPr lang="en-US" sz="1200" b="1" dirty="0">
+                <a:solidFill>
+                  <a:srgbClr val="1B2533"/>
+                </a:solidFill>
+                <a:latin typeface="Inter" pitchFamily="34" charset="0"/>
+                <a:ea typeface="Inter" pitchFamily="34" charset="-122"/>
+                <a:cs typeface="Inter" pitchFamily="34" charset="-120"/>
+              </a:rPr>
+              <a:t>09:00–18:00</a:t>
+            </a:r>
+            <a:endParaRPr lang="en-US" sz="1200" dirty="0"/>
+          </a:p>
+          <a:p>
+            <a:pPr indent="0" marL="0">
+              <a:spcAft>
+                <a:spcPts val="400"/>
+              </a:spcAft>
+              <a:buNone/>
+            </a:pPr>
+            <a:r>
+              <a:rPr lang="en-US" sz="1200" dirty="0">
+                <a:solidFill>
+                  <a:srgbClr val="5B6778"/>
+                </a:solidFill>
+                <a:latin typeface="Inter" pitchFamily="34" charset="0"/>
+                <a:ea typeface="Inter" pitchFamily="34" charset="-122"/>
+                <a:cs typeface="Inter" pitchFamily="34" charset="-120"/>
+              </a:rPr>
+              <a:t>a new early, 9 hours</a:t>
+            </a:r>
+            <a:endParaRPr lang="en-US" sz="1200" dirty="0"/>
+          </a:p>
+          <a:p>
+            <a:pPr indent="0" marL="0">
+              <a:buNone/>
+            </a:pPr>
+            <a:r>
+              <a:rPr lang="en-US" sz="1200" b="1" dirty="0">
+                <a:solidFill>
+                  <a:srgbClr val="1B2533"/>
+                </a:solidFill>
+                <a:latin typeface="Inter" pitchFamily="34" charset="0"/>
+                <a:ea typeface="Inter" pitchFamily="34" charset="-122"/>
+                <a:cs typeface="Inter" pitchFamily="34" charset="-120"/>
+              </a:rPr>
+              <a:t>14:30–22:30</a:t>
+            </a:r>
+            <a:endParaRPr lang="en-US" sz="1200" dirty="0"/>
+          </a:p>
+          <a:p>
+            <a:pPr indent="0" marL="0">
+              <a:spcAft>
+                <a:spcPts val="400"/>
+              </a:spcAft>
+              <a:buNone/>
+            </a:pPr>
+            <a:r>
+              <a:rPr lang="en-US" sz="1200" dirty="0">
+                <a:solidFill>
+                  <a:srgbClr val="5B6778"/>
+                </a:solidFill>
+                <a:latin typeface="Inter" pitchFamily="34" charset="0"/>
+                <a:ea typeface="Inter" pitchFamily="34" charset="-122"/>
+                <a:cs typeface="Inter" pitchFamily="34" charset="-120"/>
+              </a:rPr>
+              <a:t>the ticket-office late</a:t>
+            </a:r>
+            <a:endParaRPr lang="en-US" sz="1200" dirty="0"/>
+          </a:p>
+          <a:p>
+            <a:pPr indent="0" marL="0">
+              <a:buNone/>
+            </a:pPr>
+            <a:r>
+              <a:rPr lang="en-US" sz="1200" b="1" dirty="0">
+                <a:solidFill>
+                  <a:srgbClr val="1B2533"/>
+                </a:solidFill>
+                <a:latin typeface="Inter" pitchFamily="34" charset="0"/>
+                <a:ea typeface="Inter" pitchFamily="34" charset="-122"/>
+                <a:cs typeface="Inter" pitchFamily="34" charset="-120"/>
+              </a:rPr>
+              <a:t>15:15–23:25</a:t>
+            </a:r>
+            <a:endParaRPr lang="en-US" sz="1200" dirty="0"/>
+          </a:p>
+          <a:p>
+            <a:pPr indent="0" marL="0">
+              <a:spcAft>
+                <a:spcPts val="400"/>
+              </a:spcAft>
+              <a:buNone/>
+            </a:pPr>
+            <a:r>
+              <a:rPr lang="en-US" sz="1200" dirty="0">
+                <a:solidFill>
+                  <a:srgbClr val="5B6778"/>
+                </a:solidFill>
+                <a:latin typeface="Inter" pitchFamily="34" charset="0"/>
+                <a:ea typeface="Inter" pitchFamily="34" charset="-122"/>
+                <a:cs typeface="Inter" pitchFamily="34" charset="-120"/>
+              </a:rPr>
+              <a:t>the closer, 45 min later</a:t>
+            </a:r>
+            <a:endParaRPr lang="en-US" sz="1200" dirty="0"/>
+          </a:p>
+        </p:txBody>
+      </p:sp>
+      <p:sp>
+        <p:nvSpPr>
+          <p:cNvPr id="13" name="Shape 11"/>
           <p:cNvSpPr/>
           <p:nvPr/>
         </p:nvSpPr>
@@ -14958,7 +16006,7 @@
       </p:sp>
       <p:sp>
         <p:nvSpPr>
-          <p:cNvPr id="27" name="Text 25"/>
+          <p:cNvPr id="14" name="Text 12"/>
           <p:cNvSpPr txBox="1"/>
           <p:nvPr/>
         </p:nvSpPr>
@@ -14989,7 +16037,7 @@
                 <a:ea typeface="Inter" pitchFamily="34" charset="-122"/>
                 <a:cs typeface="Inter" pitchFamily="34" charset="-120"/>
               </a:rPr>
-              <a:t>A weekend off one week in four, never more than six days on, and more rest.</a:t>
+              <a:t>Some are small nudges; some are genuinely new, including earlies of 9h 15m to 9h 30m.</a:t>
             </a:r>
             <a:endParaRPr lang="en-US" sz="1400" dirty="0"/>
           </a:p>
@@ -14997,7 +16045,7 @@
       </p:sp>
       <p:sp>
         <p:nvSpPr>
-          <p:cNvPr id="28" name="Text 26"/>
+          <p:cNvPr id="15" name="Text 13"/>
           <p:cNvSpPr txBox="1"/>
           <p:nvPr/>
         </p:nvSpPr>

--- a/docs/proposals/presentations/Right-Away-for-colleagues.pptx
+++ b/docs/proposals/presentations/Right-Away-for-colleagues.pptx
@@ -2807,7 +2807,7 @@
                 <a:ea typeface="Inter" pitchFamily="34" charset="-122"/>
                 <a:cs typeface="Inter" pitchFamily="34" charset="-120"/>
               </a:rPr>
-              <a:t>9</a:t>
+              <a:t>7 (up to 9)</a:t>
             </a:r>
             <a:endParaRPr lang="en-US" sz="1600" dirty="0"/>
           </a:p>
@@ -5654,7 +5654,7 @@
                 <a:ea typeface="Inter" pitchFamily="34" charset="-122"/>
                 <a:cs typeface="Inter" pitchFamily="34" charset="-120"/>
               </a:rPr>
-              <a:t>5</a:t>
+              <a:t>4 (up to 5)</a:t>
             </a:r>
             <a:endParaRPr lang="en-US" sz="1600" dirty="0"/>
           </a:p>
@@ -8031,7 +8031,7 @@
                           <a:ea typeface="Inter" pitchFamily="34" charset="-122"/>
                           <a:cs typeface="Inter" pitchFamily="34" charset="-120"/>
                         </a:rPr>
-                        <a:t>9</a:t>
+                        <a:t>7 (up to 9)</a:t>
                       </a:r>
                       <a:endParaRPr lang="en-US" sz="1200" dirty="0">
                         <a:latin typeface="Inter" charset="0"/>
@@ -8855,7 +8855,7 @@
                           <a:ea typeface="Inter" pitchFamily="34" charset="-122"/>
                           <a:cs typeface="Inter" pitchFamily="34" charset="-120"/>
                         </a:rPr>
-                        <a:t>5</a:t>
+                        <a:t>4 (up to 5)</a:t>
                       </a:r>
                       <a:endParaRPr lang="en-US" sz="1200" dirty="0">
                         <a:latin typeface="Inter" charset="0"/>
@@ -9727,7 +9727,7 @@
                 <a:ea typeface="Inter" pitchFamily="34" charset="-122"/>
                 <a:cs typeface="Inter" pitchFamily="34" charset="-120"/>
               </a:rPr>
-              <a:t>today it can be 9</a:t>
+              <a:t>today 7, up to 9</a:t>
             </a:r>
             <a:endParaRPr lang="en-US" sz="1200" dirty="0"/>
           </a:p>

--- a/docs/proposals/presentations/Right-Away-for-colleagues.pptx
+++ b/docs/proposals/presentations/Right-Away-for-colleagues.pptx
@@ -1221,7 +1221,7 @@
           <a:p>
             <a:r>
               <a:rPr lang="en-US" dirty="0"/>
-              <a:t>This is the whole pitch on one slide. Same 35-hour week as now. Never more than six days in a row. One full weekend off in every four weeks, against one in five today. Never fewer than three on the station floor. And every closing shift is shorter: the weekday closer by 30 minutes, the Sunday closer by 45 and the Saturday closer by an hour. Right Away was built so the people on the floor follow the trains through the day.</a:t>
+              <a:t>This is the whole pitch on one slide. Same 35-hour week as now. Never more than six days in a row. One full weekend off in every four weeks, against one in five today. At least three rostered on the station floor at all times. And every closing shift is shorter: the weekday closer by 30 minutes, the Sunday closer by 45 and the Saturday closer by an hour. Right Away was built so the people on the floor follow the trains through the day.</a:t>
             </a:r>
             <a:endParaRPr lang="en-US" dirty="0"/>
           </a:p>
@@ -5471,7 +5471,7 @@
                 <a:ea typeface="Inter" pitchFamily="34" charset="-122"/>
                 <a:cs typeface="Inter" pitchFamily="34" charset="-120"/>
               </a:rPr>
-              <a:t>Fewest ever on the station floor</a:t>
+              <a:t>Fewest rostered on the floor</a:t>
             </a:r>
             <a:endParaRPr lang="en-US" sz="1400" dirty="0"/>
           </a:p>
@@ -5759,7 +5759,7 @@
                 <a:ea typeface="Inter" pitchFamily="34" charset="-122"/>
                 <a:cs typeface="Inter" pitchFamily="34" charset="-120"/>
               </a:rPr>
-              <a:t>Never fewer than three on the floor, and no avoidable fatigue warnings in the fixed rota.</a:t>
+              <a:t>At least three rostered on the floor, and no avoidable fatigue warnings in the fixed rota.</a:t>
             </a:r>
             <a:endParaRPr lang="en-US" sz="1400" dirty="0"/>
           </a:p>
@@ -6433,7 +6433,7 @@
                 <a:ea typeface="Inter" pitchFamily="34" charset="-122"/>
                 <a:cs typeface="Inter" pitchFamily="34" charset="-120"/>
               </a:rPr>
-              <a:t>About 59 a year each at 23:00 or later, against 39 today.</a:t>
+              <a:t>About 59 a year each at 23:00 or later on the fixed rota, against 39 today.</a:t>
             </a:r>
             <a:endParaRPr lang="en-US" sz="1250" dirty="0"/>
           </a:p>
@@ -9581,7 +9581,7 @@
                 <a:ea typeface="Inter" pitchFamily="34" charset="-122"/>
                 <a:cs typeface="Inter" pitchFamily="34" charset="-120"/>
               </a:rPr>
-              <a:t>no extra hours</a:t>
+              <a:t>no extra contracted hours</a:t>
             </a:r>
             <a:endParaRPr lang="en-US" sz="1200" dirty="0"/>
           </a:p>
@@ -9980,7 +9980,7 @@
                 <a:ea typeface="Inter" pitchFamily="34" charset="-122"/>
                 <a:cs typeface="Inter" pitchFamily="34" charset="-120"/>
               </a:rPr>
-              <a:t>never fewer on the station floor</a:t>
+              <a:t>fewest rostered on the floor</a:t>
             </a:r>
             <a:endParaRPr lang="en-US" sz="1400" dirty="0"/>
           </a:p>

--- a/docs/proposals/presentations/Right-Away-for-colleagues.pptx
+++ b/docs/proposals/presentations/Right-Away-for-colleagues.pptx
@@ -781,7 +781,7 @@
           <a:p>
             <a:r>
               <a:rPr lang="en-US" dirty="0"/>
-              <a:t>Leave is only needed on working days Monday to Saturday; rest days and Sundays cost nothing. Today there is one unusual stretch of the roster where 14 days buys 30 days off — Right Away spreads rest days more evenly, so its best is 28. On average it is about the same, and at its worst it is never worse than today. Four full weeks off (Sunday to Saturday) takes 15 days of leave instead of 14. The exact averages depend on where you count a booking as starting, so quote them as “about the same”.</a:t>
+              <a:t>Leave is only needed on working days Monday to Saturday; rest days and Sundays cost nothing. Today there is one unusual stretch of the roster where 14 days buys 30 days off — Right Away spreads rest days more evenly, so its best is 28. On average it is about the same, and at its worst it is never worse than today. Four full weeks off (Sunday to Saturday) takes at least 15 days of leave, instead of 14 at best today. The exact averages depend on where you count a booking as starting, so quote them as “about the same”.</a:t>
             </a:r>
             <a:endParaRPr lang="en-US" dirty="0"/>
           </a:p>
@@ -869,7 +869,7 @@
           <a:p>
             <a:r>
               <a:rPr lang="en-US" dirty="0"/>
-              <a:t>Right Away puts the people on the floor where the trains are: through the day, the number on the station floor rises and falls with the December timetable far more closely than today’s link does — on weekdays about half as far off, on a Saturday about a fifth. The Office of Rail and Road and the rail industry publish lists of rota patterns that tend to tire people. Today’s link shows five of them; Right Away shows none. Two more — early starts and a weekly rotation — come with every weekly link at a 06:20 station, so they are listed on the sheet for information but not counted against any design.</a:t>
+              <a:t>Right Away puts the people on the floor where the trains are: through the day, the number on the station floor rises and falls with the December timetable far more closely than today’s link does — on weekdays a score about half of today’s, on a Saturday about a fifth (lower is closer). The Office of Rail and Road and the rail industry publish lists of rota patterns that tend to tire people. Today’s link shows four of them in the fixed rota (up to five where a cover week falls badly); Right Away shows none. Two more — early starts and a weekly rotation — come with every weekly link at a 06:20 station, so they are listed on the sheet for information but not counted against any design.</a:t>
             </a:r>
             <a:endParaRPr lang="en-US" dirty="0"/>
           </a:p>
@@ -1221,7 +1221,7 @@
           <a:p>
             <a:r>
               <a:rPr lang="en-US" dirty="0"/>
-              <a:t>This is the whole pitch on one slide. Same 35-hour week as now. Never more than six days in a row. One full weekend off in every four weeks, against one in five today. At least three rostered on the station floor at all times. And every closing shift is shorter: the weekday closer by 30 minutes, the Sunday closer by 45 and the Saturday closer by an hour. Right Away was built so the people on the floor follow the trains through the day.</a:t>
+              <a:t>This is the whole pitch on one slide. Same 35-hour week as now. Never more than six days in a row. One full weekend off in every four weeks, against one in five today — though each person works about four more Saturdays a year. At least three rostered on the station floor at all times. And every closing shift is shorter: the weekday closer by 30 minutes, the Sunday closer by 45 and the Saturday closer by an hour. Right Away was built so the people on the floor follow the trains through the day.</a:t>
             </a:r>
             <a:endParaRPr lang="en-US" dirty="0"/>
           </a:p>
@@ -1309,7 +1309,7 @@
           <a:p>
             <a:r>
               <a:rPr lang="en-US" dirty="0"/>
-              <a:t>The change is coming whatever we do: the December 2026 timetable and the new staffing levels mean the link has to be redrawn. The question is which version we want. The staffing levels, the 24 people and the Sunday cover are confirmed: nine rules the proposal is scored on. Fourteen on a Saturday is one of three flexible aims, worked towards but not scored.</a:t>
+              <a:t>The change is coming whatever we do: the December 2026 timetable and the new staffing levels mean the link has to be redrawn. The question is which version we want. The staffing levels, the 24 people and the Sunday cover were confirmed verbally on 29 September 2026: nine rules the proposal is scored on. Fourteen on a Saturday is one of three flexible aims, worked towards but not scored.</a:t>
             </a:r>
             <a:endParaRPr lang="en-US" dirty="0"/>
           </a:p>
@@ -1661,7 +1661,7 @@
           <a:p>
             <a:r>
               <a:rPr lang="en-US" dirty="0"/>
-              <a:t>Be straight about this one — it is the change people will notice most. December needs three on duty to the close and five still on at 22:00, where today’s weekdays have two and four, so more late finishes have to go somewhere. Spread over 24 people that is about 20 more a year each finishing at 23:00 or later. Early 06:20 starts hardly change. And because the shortest gap between two shifts is 14h 05m, nobody finishes late and starts early the next morning.</a:t>
+              <a:t>Be straight about this one — it is the change people will notice most. About 20 more a year each finish at 23:00 or later. Only part of that is the December rules: three on duty to the close every day, where today’s weekdays have two, adds about six or seven a year each once it is spread over 24 people. The rest comes from how this design places its late shifts, not from the rules, so it is a fair question to ask. Early 06:20 starts hardly change. And because the shortest gap between two shifts is 14h 05m, nobody finishes late and starts early the next morning.</a:t>
             </a:r>
             <a:endParaRPr lang="en-US" dirty="0"/>
           </a:p>
@@ -3955,7 +3955,7 @@
                 <a:ea typeface="Inter" pitchFamily="34" charset="-122"/>
                 <a:cs typeface="Inter" pitchFamily="34" charset="-120"/>
               </a:rPr>
-              <a:t>The Sunday finish stays where it is. That is agreed practice and will remain so.</a:t>
+              <a:t>The Sunday finish stays where it is. That is agreed practice (settled 28 Sep 2026).</a:t>
             </a:r>
             <a:endParaRPr lang="en-US" sz="1300" dirty="0"/>
           </a:p>
@@ -4746,7 +4746,7 @@
                 <a:ea typeface="Inter" pitchFamily="34" charset="-122"/>
                 <a:cs typeface="Inter" pitchFamily="34" charset="-120"/>
               </a:rPr>
-              <a:t>Leave needed for four full weeks off</a:t>
+              <a:t>Leave needed for four full weeks off, at best</a:t>
             </a:r>
             <a:endParaRPr lang="en-US" sz="1400" dirty="0"/>
           </a:p>
@@ -4890,7 +4890,7 @@
                 <a:ea typeface="Inter" pitchFamily="34" charset="-122"/>
                 <a:cs typeface="Inter" pitchFamily="34" charset="-120"/>
               </a:rPr>
-              <a:t>About the same. A cover week still counts as 4 days of leave, exactly as now.</a:t>
+              <a:t>About the same. A cover week still counts as at most 4 days of leave, as now.</a:t>
             </a:r>
             <a:endParaRPr lang="en-US" sz="1400" dirty="0"/>
           </a:p>
@@ -5039,7 +5039,7 @@
                 <a:ea typeface="Inter" pitchFamily="34" charset="-122"/>
                 <a:cs typeface="Inter" pitchFamily="34" charset="-120"/>
               </a:rPr>
-              <a:t>More people on duty with you, all day</a:t>
+              <a:t>More people rostered every day, at the open and the close</a:t>
             </a:r>
             <a:endParaRPr lang="en-US" sz="1500" dirty="0"/>
           </a:p>
@@ -9039,7 +9039,7 @@
                 <a:ea typeface="Inter" pitchFamily="34" charset="-122"/>
                 <a:cs typeface="Inter" pitchFamily="34" charset="-120"/>
               </a:rPr>
-              <a:t>Same hours, fewer contracted days, shorter closers, more weekends, more colleagues.</a:t>
+              <a:t>Same hours, fewer contracted days, shorter closers, more full weekends off, more colleagues.</a:t>
             </a:r>
             <a:endParaRPr lang="en-US" sz="1400" dirty="0"/>
           </a:p>
@@ -10231,7 +10231,7 @@
                 <a:ea typeface="Inter" pitchFamily="34" charset="-122"/>
                 <a:cs typeface="Inter" pitchFamily="34" charset="-120"/>
               </a:rPr>
-              <a:t>Same hours, shorter closing shifts, more weekends — and staff where the trains are.</a:t>
+              <a:t>Same hours, shorter closing shifts, more full weekends off — and staff where the trains are.</a:t>
             </a:r>
             <a:endParaRPr lang="en-US" sz="1400" dirty="0"/>
           </a:p>
@@ -14259,7 +14259,7 @@
                 <a:ea typeface="Inter" pitchFamily="34" charset="-122"/>
                 <a:cs typeface="Inter" pitchFamily="34" charset="-120"/>
               </a:rPr>
-              <a:t>December needs more people at the close — but every closing shift is shorter.</a:t>
+              <a:t>More late finishes, only partly from the December rules — but every closing shift is shorter.</a:t>
             </a:r>
             <a:endParaRPr lang="en-US" sz="1400" dirty="0"/>
           </a:p>

--- a/docs/proposals/presentations/Right-Away-for-colleagues.pptx
+++ b/docs/proposals/presentations/Right-Away-for-colleagues.pptx
@@ -4746,7 +4746,7 @@
                 <a:ea typeface="Inter" pitchFamily="34" charset="-122"/>
                 <a:cs typeface="Inter" pitchFamily="34" charset="-120"/>
               </a:rPr>
-              <a:t>Leave needed for four full weeks off, at best</a:t>
+              <a:t>Leave for four full weeks off, at best</a:t>
             </a:r>
             <a:endParaRPr lang="en-US" sz="1400" dirty="0"/>
           </a:p>
@@ -5923,7 +5923,7 @@
         <p:spPr>
           <a:xfrm>
             <a:off x="457200" y="1371600"/>
-            <a:ext cx="4023360" cy="804672"/>
+            <a:ext cx="4023360" cy="975272"/>
           </a:xfrm>
           <a:prstGeom prst="roundRect">
             <a:avLst>
@@ -5949,7 +5949,7 @@
         </p:nvSpPr>
         <p:spPr>
           <a:xfrm>
-            <a:off x="640080" y="1444752"/>
+            <a:off x="640080" y="1530052"/>
             <a:ext cx="3703320" cy="310896"/>
           </a:xfrm>
           <a:prstGeom prst="rect">
@@ -5988,7 +5988,7 @@
         </p:nvSpPr>
         <p:spPr>
           <a:xfrm>
-            <a:off x="640080" y="1755648"/>
+            <a:off x="640080" y="1840948"/>
             <a:ext cx="3657600" cy="347472"/>
           </a:xfrm>
           <a:prstGeom prst="rect">
@@ -5998,7 +5998,7 @@
           <a:ln/>
         </p:spPr>
         <p:txBody>
-          <a:bodyPr wrap="square" lIns="0" tIns="0" rIns="0" bIns="0" rtlCol="0" anchor="ctr"/>
+          <a:bodyPr anchor="t" wrap="square" lIns="0" tIns="0" rIns="0" bIns="0" rtlCol="0"/>
           <a:lstStyle/>
           <a:p>
             <a:pPr indent="0" marL="0">
@@ -6028,7 +6028,7 @@
         <p:spPr>
           <a:xfrm>
             <a:off x="4663440" y="1371600"/>
-            <a:ext cx="4023360" cy="804672"/>
+            <a:ext cx="4023360" cy="975272"/>
           </a:xfrm>
           <a:prstGeom prst="roundRect">
             <a:avLst>
@@ -6054,7 +6054,7 @@
         </p:nvSpPr>
         <p:spPr>
           <a:xfrm>
-            <a:off x="4846320" y="1444752"/>
+            <a:off x="4846320" y="1530052"/>
             <a:ext cx="3703320" cy="310896"/>
           </a:xfrm>
           <a:prstGeom prst="rect">
@@ -6093,7 +6093,7 @@
         </p:nvSpPr>
         <p:spPr>
           <a:xfrm>
-            <a:off x="4846320" y="1755648"/>
+            <a:off x="4846320" y="1840948"/>
             <a:ext cx="3657600" cy="347472"/>
           </a:xfrm>
           <a:prstGeom prst="rect">
@@ -6103,7 +6103,7 @@
           <a:ln/>
         </p:spPr>
         <p:txBody>
-          <a:bodyPr wrap="square" lIns="0" tIns="0" rIns="0" bIns="0" rtlCol="0" anchor="ctr"/>
+          <a:bodyPr anchor="t" wrap="square" lIns="0" tIns="0" rIns="0" bIns="0" rtlCol="0"/>
           <a:lstStyle/>
           <a:p>
             <a:pPr indent="0" marL="0">
@@ -6132,8 +6132,8 @@
         </p:nvSpPr>
         <p:spPr>
           <a:xfrm>
-            <a:off x="457200" y="2286000"/>
-            <a:ext cx="4023360" cy="804672"/>
+            <a:off x="457200" y="2456600"/>
+            <a:ext cx="4023360" cy="975272"/>
           </a:xfrm>
           <a:prstGeom prst="roundRect">
             <a:avLst>
@@ -6159,7 +6159,7 @@
         </p:nvSpPr>
         <p:spPr>
           <a:xfrm>
-            <a:off x="640080" y="2359152"/>
+            <a:off x="640080" y="2615052"/>
             <a:ext cx="3703320" cy="310896"/>
           </a:xfrm>
           <a:prstGeom prst="rect">
@@ -6198,7 +6198,7 @@
         </p:nvSpPr>
         <p:spPr>
           <a:xfrm>
-            <a:off x="640080" y="2670048"/>
+            <a:off x="640080" y="2925948"/>
             <a:ext cx="3657600" cy="347472"/>
           </a:xfrm>
           <a:prstGeom prst="rect">
@@ -6208,7 +6208,7 @@
           <a:ln/>
         </p:spPr>
         <p:txBody>
-          <a:bodyPr wrap="square" lIns="0" tIns="0" rIns="0" bIns="0" rtlCol="0" anchor="ctr"/>
+          <a:bodyPr anchor="t" wrap="square" lIns="0" tIns="0" rIns="0" bIns="0" rtlCol="0"/>
           <a:lstStyle/>
           <a:p>
             <a:pPr indent="0" marL="0">
@@ -6237,8 +6237,8 @@
         </p:nvSpPr>
         <p:spPr>
           <a:xfrm>
-            <a:off x="4663440" y="2286000"/>
-            <a:ext cx="4023360" cy="804672"/>
+            <a:off x="4663440" y="2456600"/>
+            <a:ext cx="4023360" cy="975272"/>
           </a:xfrm>
           <a:prstGeom prst="roundRect">
             <a:avLst>
@@ -6264,7 +6264,7 @@
         </p:nvSpPr>
         <p:spPr>
           <a:xfrm>
-            <a:off x="4846320" y="2359152"/>
+            <a:off x="4846320" y="2615052"/>
             <a:ext cx="3703320" cy="310896"/>
           </a:xfrm>
           <a:prstGeom prst="rect">
@@ -6303,7 +6303,7 @@
         </p:nvSpPr>
         <p:spPr>
           <a:xfrm>
-            <a:off x="4846320" y="2670048"/>
+            <a:off x="4846320" y="2925948"/>
             <a:ext cx="3657600" cy="347472"/>
           </a:xfrm>
           <a:prstGeom prst="rect">
@@ -6313,7 +6313,7 @@
           <a:ln/>
         </p:spPr>
         <p:txBody>
-          <a:bodyPr wrap="square" lIns="0" tIns="0" rIns="0" bIns="0" rtlCol="0" anchor="ctr"/>
+          <a:bodyPr anchor="t" wrap="square" lIns="0" tIns="0" rIns="0" bIns="0" rtlCol="0"/>
           <a:lstStyle/>
           <a:p>
             <a:pPr indent="0" marL="0">
@@ -6342,8 +6342,8 @@
         </p:nvSpPr>
         <p:spPr>
           <a:xfrm>
-            <a:off x="457200" y="3200400"/>
-            <a:ext cx="4023360" cy="804672"/>
+            <a:off x="457200" y="3541600"/>
+            <a:ext cx="4023360" cy="975272"/>
           </a:xfrm>
           <a:prstGeom prst="roundRect">
             <a:avLst>
@@ -6369,7 +6369,7 @@
         </p:nvSpPr>
         <p:spPr>
           <a:xfrm>
-            <a:off x="640080" y="3273552"/>
+            <a:off x="640080" y="3700052"/>
             <a:ext cx="3703320" cy="310896"/>
           </a:xfrm>
           <a:prstGeom prst="rect">
@@ -6408,7 +6408,7 @@
         </p:nvSpPr>
         <p:spPr>
           <a:xfrm>
-            <a:off x="640080" y="3584448"/>
+            <a:off x="640080" y="4010948"/>
             <a:ext cx="3657600" cy="347472"/>
           </a:xfrm>
           <a:prstGeom prst="rect">
@@ -6418,7 +6418,7 @@
           <a:ln/>
         </p:spPr>
         <p:txBody>
-          <a:bodyPr wrap="square" lIns="0" tIns="0" rIns="0" bIns="0" rtlCol="0" anchor="ctr"/>
+          <a:bodyPr anchor="t" wrap="square" lIns="0" tIns="0" rIns="0" bIns="0" rtlCol="0"/>
           <a:lstStyle/>
           <a:p>
             <a:pPr indent="0" marL="0">
@@ -6447,8 +6447,8 @@
         </p:nvSpPr>
         <p:spPr>
           <a:xfrm>
-            <a:off x="4663440" y="3200400"/>
-            <a:ext cx="4023360" cy="804672"/>
+            <a:off x="4663440" y="3541600"/>
+            <a:ext cx="4023360" cy="975272"/>
           </a:xfrm>
           <a:prstGeom prst="roundRect">
             <a:avLst>
@@ -6474,7 +6474,7 @@
         </p:nvSpPr>
         <p:spPr>
           <a:xfrm>
-            <a:off x="4846320" y="3273552"/>
+            <a:off x="4846320" y="3700052"/>
             <a:ext cx="3703320" cy="310896"/>
           </a:xfrm>
           <a:prstGeom prst="rect">
@@ -6513,7 +6513,7 @@
         </p:nvSpPr>
         <p:spPr>
           <a:xfrm>
-            <a:off x="4846320" y="3584448"/>
+            <a:off x="4846320" y="4010948"/>
             <a:ext cx="3657600" cy="347472"/>
           </a:xfrm>
           <a:prstGeom prst="rect">
@@ -6523,7 +6523,7 @@
           <a:ln/>
         </p:spPr>
         <p:txBody>
-          <a:bodyPr wrap="square" lIns="0" tIns="0" rIns="0" bIns="0" rtlCol="0" anchor="ctr"/>
+          <a:bodyPr anchor="t" wrap="square" lIns="0" tIns="0" rIns="0" bIns="0" rtlCol="0"/>
           <a:lstStyle/>
           <a:p>
             <a:pPr indent="0" marL="0">
@@ -9039,7 +9039,7 @@
                 <a:ea typeface="Inter" pitchFamily="34" charset="-122"/>
                 <a:cs typeface="Inter" pitchFamily="34" charset="-120"/>
               </a:rPr>
-              <a:t>Same hours, fewer contracted days, shorter closers, more full weekends off, more colleagues.</a:t>
+              <a:t>Same hours, fewer contracted days, shorter closers, more full weekends off.</a:t>
             </a:r>
             <a:endParaRPr lang="en-US" sz="1400" dirty="0"/>
           </a:p>
@@ -10231,7 +10231,7 @@
                 <a:ea typeface="Inter" pitchFamily="34" charset="-122"/>
                 <a:cs typeface="Inter" pitchFamily="34" charset="-120"/>
               </a:rPr>
-              <a:t>Same hours, shorter closing shifts, more full weekends off — and staff where the trains are.</a:t>
+              <a:t>Same hours, shorter closers, more full weekends off — and staff where the trains are.</a:t>
             </a:r>
             <a:endParaRPr lang="en-US" sz="1400" dirty="0"/>
           </a:p>
@@ -10521,7 +10521,7 @@
         </p:nvSpPr>
         <p:spPr>
           <a:xfrm>
-            <a:off x="457200" y="2029968"/>
+            <a:off x="457200" y="2233968"/>
             <a:ext cx="457200" cy="457200"/>
           </a:xfrm>
           <a:prstGeom prst="ellipse">
@@ -10554,7 +10554,7 @@
         </p:blipFill>
         <p:spPr>
           <a:xfrm>
-            <a:off x="557784" y="2130552"/>
+            <a:off x="557784" y="2334552"/>
             <a:ext cx="256032" cy="256032"/>
           </a:xfrm>
           <a:prstGeom prst="rect">
@@ -10570,7 +10570,7 @@
         </p:nvSpPr>
         <p:spPr>
           <a:xfrm>
-            <a:off x="1097280" y="1993392"/>
+            <a:off x="1097280" y="2197392"/>
             <a:ext cx="7589520" cy="292608"/>
           </a:xfrm>
           <a:prstGeom prst="rect">
@@ -10609,7 +10609,7 @@
         </p:nvSpPr>
         <p:spPr>
           <a:xfrm>
-            <a:off x="1097280" y="2276856"/>
+            <a:off x="1097280" y="2480856"/>
             <a:ext cx="7589520" cy="274320"/>
           </a:xfrm>
           <a:prstGeom prst="rect">
@@ -10648,7 +10648,7 @@
         </p:nvSpPr>
         <p:spPr>
           <a:xfrm>
-            <a:off x="457200" y="2688336"/>
+            <a:off x="457200" y="3096336"/>
             <a:ext cx="457200" cy="457200"/>
           </a:xfrm>
           <a:prstGeom prst="ellipse">
@@ -10681,7 +10681,7 @@
         </p:blipFill>
         <p:spPr>
           <a:xfrm>
-            <a:off x="557784" y="2788920"/>
+            <a:off x="557784" y="3196920"/>
             <a:ext cx="256032" cy="256032"/>
           </a:xfrm>
           <a:prstGeom prst="rect">
@@ -10697,7 +10697,7 @@
         </p:nvSpPr>
         <p:spPr>
           <a:xfrm>
-            <a:off x="1097280" y="2651760"/>
+            <a:off x="1097280" y="3059760"/>
             <a:ext cx="7589520" cy="292608"/>
           </a:xfrm>
           <a:prstGeom prst="rect">
@@ -10736,7 +10736,7 @@
         </p:nvSpPr>
         <p:spPr>
           <a:xfrm>
-            <a:off x="1097280" y="2935224"/>
+            <a:off x="1097280" y="3343224"/>
             <a:ext cx="7589520" cy="274320"/>
           </a:xfrm>
           <a:prstGeom prst="rect">
@@ -10775,7 +10775,7 @@
         </p:nvSpPr>
         <p:spPr>
           <a:xfrm>
-            <a:off x="457200" y="3346704"/>
+            <a:off x="457200" y="3958704"/>
             <a:ext cx="457200" cy="457200"/>
           </a:xfrm>
           <a:prstGeom prst="ellipse">
@@ -10808,7 +10808,7 @@
         </p:blipFill>
         <p:spPr>
           <a:xfrm>
-            <a:off x="557784" y="3447288"/>
+            <a:off x="557784" y="4059288"/>
             <a:ext cx="256032" cy="256032"/>
           </a:xfrm>
           <a:prstGeom prst="rect">
@@ -10824,7 +10824,7 @@
         </p:nvSpPr>
         <p:spPr>
           <a:xfrm>
-            <a:off x="1097280" y="3310128"/>
+            <a:off x="1097280" y="3922128"/>
             <a:ext cx="7589520" cy="292608"/>
           </a:xfrm>
           <a:prstGeom prst="rect">
@@ -10863,7 +10863,7 @@
         </p:nvSpPr>
         <p:spPr>
           <a:xfrm>
-            <a:off x="1097280" y="3593592"/>
+            <a:off x="1097280" y="4205592"/>
             <a:ext cx="7589520" cy="274320"/>
           </a:xfrm>
           <a:prstGeom prst="rect">
@@ -14259,7 +14259,7 @@
                 <a:ea typeface="Inter" pitchFamily="34" charset="-122"/>
                 <a:cs typeface="Inter" pitchFamily="34" charset="-120"/>
               </a:rPr>
-              <a:t>More late finishes, only partly from the December rules — but every closing shift is shorter.</a:t>
+              <a:t>More late finishes, only partly from the rules — but every closing shift is shorter.</a:t>
             </a:r>
             <a:endParaRPr lang="en-US" sz="1400" dirty="0"/>
           </a:p>

--- a/docs/proposals/presentations/Right-Away-for-colleagues.pptx
+++ b/docs/proposals/presentations/Right-Away-for-colleagues.pptx
@@ -781,7 +781,7 @@
           <a:p>
             <a:r>
               <a:rPr lang="en-US" dirty="0"/>
-              <a:t>Leave is only needed on working days Monday to Saturday; rest days and Sundays cost nothing. Today there is one unusual stretch of the roster where 14 days buys 30 days off — Right Away spreads rest days more evenly, so its best is 28. On average it is about the same, and at its worst it is never worse than today. Four full weeks off (Sunday to Saturday) takes 15 days of leave instead of 14. The exact averages depend on where you count a booking as starting, so quote them as “about the same”.</a:t>
+              <a:t>Leave is only needed on working days Monday to Saturday; rest days and Sundays cost nothing. Today there is one unusual stretch of the roster where 14 days buys 30 days off — Right Away spreads rest days more evenly, so its best is 28. On average it is about the same, and at its worst it is never worse than today. Four full weeks off (Sunday to Saturday) takes at least 15 days of leave, instead of 14 at best today. The exact averages depend on where you count a booking as starting, so quote them as “about the same”.</a:t>
             </a:r>
             <a:endParaRPr lang="en-US" dirty="0"/>
           </a:p>
@@ -869,7 +869,7 @@
           <a:p>
             <a:r>
               <a:rPr lang="en-US" dirty="0"/>
-              <a:t>Right Away puts the people on the floor where the trains are: through the day, the number on the station floor rises and falls with the December timetable far more closely than today’s link does — on weekdays about half as far off, on a Saturday about a fifth. The Office of Rail and Road and the rail industry publish lists of rota patterns that tend to tire people. Today’s link shows five of them; Right Away shows none. Two more — early starts and a weekly rotation — come with every weekly link at a 06:20 station, so they are listed on the sheet for information but not counted against any design.</a:t>
+              <a:t>Right Away puts the people on the floor where the trains are: through the day, the number on the station floor rises and falls with the December timetable far more closely than today’s link does — on weekdays a score about half of today’s, on a Saturday about a fifth (lower is closer). The Office of Rail and Road and the rail industry publish lists of rota patterns that tend to tire people. Today’s link shows four of them in the fixed rota (up to five where a cover week falls badly); Right Away shows none. Two more — early starts and a weekly rotation — come with every weekly link at a 06:20 station, so they are listed on the sheet for information but not counted against any design.</a:t>
             </a:r>
             <a:endParaRPr lang="en-US" dirty="0"/>
           </a:p>
@@ -1221,7 +1221,7 @@
           <a:p>
             <a:r>
               <a:rPr lang="en-US" dirty="0"/>
-              <a:t>This is the whole pitch on one slide. Same 35-hour week as now. Never more than six days in a row. One full weekend off in every four weeks, against one in five today. Never fewer than three on the station floor. And every closing shift is shorter: the weekday closer by 30 minutes, the Sunday closer by 45 and the Saturday closer by an hour. Right Away was built so the people on the floor follow the trains through the day.</a:t>
+              <a:t>This is the whole pitch on one slide. Same 35-hour week as now. Never more than six days in a row. One full weekend off in every four weeks, against one in five today — though each person works about four more Saturdays a year. At least three rostered on the station floor at all times. And every closing shift is shorter: the weekday closer by 30 minutes, the Sunday closer by 45 and the Saturday closer by an hour. Right Away was built so the people on the floor follow the trains through the day.</a:t>
             </a:r>
             <a:endParaRPr lang="en-US" dirty="0"/>
           </a:p>
@@ -1309,7 +1309,7 @@
           <a:p>
             <a:r>
               <a:rPr lang="en-US" dirty="0"/>
-              <a:t>The change is coming whatever we do: the December 2026 timetable and the new staffing levels mean the link has to be redrawn. The question is which version we want. The staffing levels, the 24 people and the Sunday cover are confirmed: nine rules the proposal is scored on. Fourteen on a Saturday is one of three flexible aims, worked towards but not scored.</a:t>
+              <a:t>The change is coming whatever we do: the December 2026 timetable and the new staffing levels mean the link has to be redrawn. The question is which version we want. The staffing levels, the 24 people and the Sunday cover were confirmed verbally on 29 September 2026: nine rules the proposal is scored on. Fourteen on a Saturday is one of three flexible aims, worked towards but not scored.</a:t>
             </a:r>
             <a:endParaRPr lang="en-US" dirty="0"/>
           </a:p>
@@ -1661,7 +1661,7 @@
           <a:p>
             <a:r>
               <a:rPr lang="en-US" dirty="0"/>
-              <a:t>Be straight about this one — it is the change people will notice most. December needs three on duty to the close and five still on at 22:00, where today’s weekdays have two and four, so more late finishes have to go somewhere. Spread over 24 people that is about 20 more a year each finishing at 23:00 or later. Early 06:20 starts hardly change. And because the shortest gap between two shifts is 14h 05m, nobody finishes late and starts early the next morning.</a:t>
+              <a:t>Be straight about this one — it is the change people will notice most. About 20 more a year each finish at 23:00 or later. Only part of that is the December rules: three on duty to the close every day, where today’s weekdays have two, adds about six or seven a year each once it is spread over 24 people. The rest comes from how this design places its late shifts, not from the rules, so it is a fair question to ask. Early 06:20 starts hardly change. And because the shortest gap between two shifts is 14h 05m, nobody finishes late and starts early the next morning.</a:t>
             </a:r>
             <a:endParaRPr lang="en-US" dirty="0"/>
           </a:p>
@@ -2807,7 +2807,7 @@
                 <a:ea typeface="Inter" pitchFamily="34" charset="-122"/>
                 <a:cs typeface="Inter" pitchFamily="34" charset="-120"/>
               </a:rPr>
-              <a:t>9</a:t>
+              <a:t>7 (up to 9)</a:t>
             </a:r>
             <a:endParaRPr lang="en-US" sz="1600" dirty="0"/>
           </a:p>
@@ -3955,7 +3955,7 @@
                 <a:ea typeface="Inter" pitchFamily="34" charset="-122"/>
                 <a:cs typeface="Inter" pitchFamily="34" charset="-120"/>
               </a:rPr>
-              <a:t>The Sunday finish stays where it is. That is agreed practice and will remain so.</a:t>
+              <a:t>The Sunday finish stays where it is. That is agreed practice (settled 28 Sep 2026).</a:t>
             </a:r>
             <a:endParaRPr lang="en-US" sz="1300" dirty="0"/>
           </a:p>
@@ -4746,7 +4746,7 @@
                 <a:ea typeface="Inter" pitchFamily="34" charset="-122"/>
                 <a:cs typeface="Inter" pitchFamily="34" charset="-120"/>
               </a:rPr>
-              <a:t>Leave needed for four full weeks off</a:t>
+              <a:t>Leave for four full weeks off, at best</a:t>
             </a:r>
             <a:endParaRPr lang="en-US" sz="1400" dirty="0"/>
           </a:p>
@@ -4890,7 +4890,7 @@
                 <a:ea typeface="Inter" pitchFamily="34" charset="-122"/>
                 <a:cs typeface="Inter" pitchFamily="34" charset="-120"/>
               </a:rPr>
-              <a:t>About the same. A cover week still counts as 4 days of leave, exactly as now.</a:t>
+              <a:t>About the same. A cover week still counts as at most 4 days of leave, as now.</a:t>
             </a:r>
             <a:endParaRPr lang="en-US" sz="1400" dirty="0"/>
           </a:p>
@@ -5039,7 +5039,7 @@
                 <a:ea typeface="Inter" pitchFamily="34" charset="-122"/>
                 <a:cs typeface="Inter" pitchFamily="34" charset="-120"/>
               </a:rPr>
-              <a:t>More people on duty with you, all day</a:t>
+              <a:t>More people rostered every day, at the open and the close</a:t>
             </a:r>
             <a:endParaRPr lang="en-US" sz="1500" dirty="0"/>
           </a:p>
@@ -5471,7 +5471,7 @@
                 <a:ea typeface="Inter" pitchFamily="34" charset="-122"/>
                 <a:cs typeface="Inter" pitchFamily="34" charset="-120"/>
               </a:rPr>
-              <a:t>Fewest ever on the station floor</a:t>
+              <a:t>Fewest rostered on the floor</a:t>
             </a:r>
             <a:endParaRPr lang="en-US" sz="1400" dirty="0"/>
           </a:p>
@@ -5654,7 +5654,7 @@
                 <a:ea typeface="Inter" pitchFamily="34" charset="-122"/>
                 <a:cs typeface="Inter" pitchFamily="34" charset="-120"/>
               </a:rPr>
-              <a:t>5</a:t>
+              <a:t>4 (up to 5)</a:t>
             </a:r>
             <a:endParaRPr lang="en-US" sz="1600" dirty="0"/>
           </a:p>
@@ -5759,7 +5759,7 @@
                 <a:ea typeface="Inter" pitchFamily="34" charset="-122"/>
                 <a:cs typeface="Inter" pitchFamily="34" charset="-120"/>
               </a:rPr>
-              <a:t>Never fewer than three on the floor, and no avoidable fatigue warnings in the fixed rota.</a:t>
+              <a:t>At least three rostered on the floor, and no avoidable fatigue warnings in the fixed rota.</a:t>
             </a:r>
             <a:endParaRPr lang="en-US" sz="1400" dirty="0"/>
           </a:p>
@@ -5923,7 +5923,7 @@
         <p:spPr>
           <a:xfrm>
             <a:off x="457200" y="1371600"/>
-            <a:ext cx="4023360" cy="804672"/>
+            <a:ext cx="4023360" cy="975272"/>
           </a:xfrm>
           <a:prstGeom prst="roundRect">
             <a:avLst>
@@ -5949,7 +5949,7 @@
         </p:nvSpPr>
         <p:spPr>
           <a:xfrm>
-            <a:off x="640080" y="1444752"/>
+            <a:off x="640080" y="1530052"/>
             <a:ext cx="3703320" cy="310896"/>
           </a:xfrm>
           <a:prstGeom prst="rect">
@@ -5988,7 +5988,7 @@
         </p:nvSpPr>
         <p:spPr>
           <a:xfrm>
-            <a:off x="640080" y="1755648"/>
+            <a:off x="640080" y="1840948"/>
             <a:ext cx="3657600" cy="347472"/>
           </a:xfrm>
           <a:prstGeom prst="rect">
@@ -5998,7 +5998,7 @@
           <a:ln/>
         </p:spPr>
         <p:txBody>
-          <a:bodyPr wrap="square" lIns="0" tIns="0" rIns="0" bIns="0" rtlCol="0" anchor="ctr"/>
+          <a:bodyPr anchor="t" wrap="square" lIns="0" tIns="0" rIns="0" bIns="0" rtlCol="0"/>
           <a:lstStyle/>
           <a:p>
             <a:pPr indent="0" marL="0">
@@ -6028,7 +6028,7 @@
         <p:spPr>
           <a:xfrm>
             <a:off x="4663440" y="1371600"/>
-            <a:ext cx="4023360" cy="804672"/>
+            <a:ext cx="4023360" cy="975272"/>
           </a:xfrm>
           <a:prstGeom prst="roundRect">
             <a:avLst>
@@ -6054,7 +6054,7 @@
         </p:nvSpPr>
         <p:spPr>
           <a:xfrm>
-            <a:off x="4846320" y="1444752"/>
+            <a:off x="4846320" y="1530052"/>
             <a:ext cx="3703320" cy="310896"/>
           </a:xfrm>
           <a:prstGeom prst="rect">
@@ -6093,7 +6093,7 @@
         </p:nvSpPr>
         <p:spPr>
           <a:xfrm>
-            <a:off x="4846320" y="1755648"/>
+            <a:off x="4846320" y="1840948"/>
             <a:ext cx="3657600" cy="347472"/>
           </a:xfrm>
           <a:prstGeom prst="rect">
@@ -6103,7 +6103,7 @@
           <a:ln/>
         </p:spPr>
         <p:txBody>
-          <a:bodyPr wrap="square" lIns="0" tIns="0" rIns="0" bIns="0" rtlCol="0" anchor="ctr"/>
+          <a:bodyPr anchor="t" wrap="square" lIns="0" tIns="0" rIns="0" bIns="0" rtlCol="0"/>
           <a:lstStyle/>
           <a:p>
             <a:pPr indent="0" marL="0">
@@ -6132,8 +6132,8 @@
         </p:nvSpPr>
         <p:spPr>
           <a:xfrm>
-            <a:off x="457200" y="2286000"/>
-            <a:ext cx="4023360" cy="804672"/>
+            <a:off x="457200" y="2456600"/>
+            <a:ext cx="4023360" cy="975272"/>
           </a:xfrm>
           <a:prstGeom prst="roundRect">
             <a:avLst>
@@ -6159,7 +6159,7 @@
         </p:nvSpPr>
         <p:spPr>
           <a:xfrm>
-            <a:off x="640080" y="2359152"/>
+            <a:off x="640080" y="2615052"/>
             <a:ext cx="3703320" cy="310896"/>
           </a:xfrm>
           <a:prstGeom prst="rect">
@@ -6198,7 +6198,7 @@
         </p:nvSpPr>
         <p:spPr>
           <a:xfrm>
-            <a:off x="640080" y="2670048"/>
+            <a:off x="640080" y="2925948"/>
             <a:ext cx="3657600" cy="347472"/>
           </a:xfrm>
           <a:prstGeom prst="rect">
@@ -6208,7 +6208,7 @@
           <a:ln/>
         </p:spPr>
         <p:txBody>
-          <a:bodyPr wrap="square" lIns="0" tIns="0" rIns="0" bIns="0" rtlCol="0" anchor="ctr"/>
+          <a:bodyPr anchor="t" wrap="square" lIns="0" tIns="0" rIns="0" bIns="0" rtlCol="0"/>
           <a:lstStyle/>
           <a:p>
             <a:pPr indent="0" marL="0">
@@ -6237,8 +6237,8 @@
         </p:nvSpPr>
         <p:spPr>
           <a:xfrm>
-            <a:off x="4663440" y="2286000"/>
-            <a:ext cx="4023360" cy="804672"/>
+            <a:off x="4663440" y="2456600"/>
+            <a:ext cx="4023360" cy="975272"/>
           </a:xfrm>
           <a:prstGeom prst="roundRect">
             <a:avLst>
@@ -6264,7 +6264,7 @@
         </p:nvSpPr>
         <p:spPr>
           <a:xfrm>
-            <a:off x="4846320" y="2359152"/>
+            <a:off x="4846320" y="2615052"/>
             <a:ext cx="3703320" cy="310896"/>
           </a:xfrm>
           <a:prstGeom prst="rect">
@@ -6303,7 +6303,7 @@
         </p:nvSpPr>
         <p:spPr>
           <a:xfrm>
-            <a:off x="4846320" y="2670048"/>
+            <a:off x="4846320" y="2925948"/>
             <a:ext cx="3657600" cy="347472"/>
           </a:xfrm>
           <a:prstGeom prst="rect">
@@ -6313,7 +6313,7 @@
           <a:ln/>
         </p:spPr>
         <p:txBody>
-          <a:bodyPr wrap="square" lIns="0" tIns="0" rIns="0" bIns="0" rtlCol="0" anchor="ctr"/>
+          <a:bodyPr anchor="t" wrap="square" lIns="0" tIns="0" rIns="0" bIns="0" rtlCol="0"/>
           <a:lstStyle/>
           <a:p>
             <a:pPr indent="0" marL="0">
@@ -6342,8 +6342,8 @@
         </p:nvSpPr>
         <p:spPr>
           <a:xfrm>
-            <a:off x="457200" y="3200400"/>
-            <a:ext cx="4023360" cy="804672"/>
+            <a:off x="457200" y="3541600"/>
+            <a:ext cx="4023360" cy="975272"/>
           </a:xfrm>
           <a:prstGeom prst="roundRect">
             <a:avLst>
@@ -6369,7 +6369,7 @@
         </p:nvSpPr>
         <p:spPr>
           <a:xfrm>
-            <a:off x="640080" y="3273552"/>
+            <a:off x="640080" y="3700052"/>
             <a:ext cx="3703320" cy="310896"/>
           </a:xfrm>
           <a:prstGeom prst="rect">
@@ -6408,7 +6408,7 @@
         </p:nvSpPr>
         <p:spPr>
           <a:xfrm>
-            <a:off x="640080" y="3584448"/>
+            <a:off x="640080" y="4010948"/>
             <a:ext cx="3657600" cy="347472"/>
           </a:xfrm>
           <a:prstGeom prst="rect">
@@ -6418,7 +6418,7 @@
           <a:ln/>
         </p:spPr>
         <p:txBody>
-          <a:bodyPr wrap="square" lIns="0" tIns="0" rIns="0" bIns="0" rtlCol="0" anchor="ctr"/>
+          <a:bodyPr anchor="t" wrap="square" lIns="0" tIns="0" rIns="0" bIns="0" rtlCol="0"/>
           <a:lstStyle/>
           <a:p>
             <a:pPr indent="0" marL="0">
@@ -6433,7 +6433,7 @@
                 <a:ea typeface="Inter" pitchFamily="34" charset="-122"/>
                 <a:cs typeface="Inter" pitchFamily="34" charset="-120"/>
               </a:rPr>
-              <a:t>About 59 a year each at 23:00 or later, against 39 today.</a:t>
+              <a:t>About 59 a year each at 23:00 or later on the fixed rota, against 39 today.</a:t>
             </a:r>
             <a:endParaRPr lang="en-US" sz="1250" dirty="0"/>
           </a:p>
@@ -6447,8 +6447,8 @@
         </p:nvSpPr>
         <p:spPr>
           <a:xfrm>
-            <a:off x="4663440" y="3200400"/>
-            <a:ext cx="4023360" cy="804672"/>
+            <a:off x="4663440" y="3541600"/>
+            <a:ext cx="4023360" cy="975272"/>
           </a:xfrm>
           <a:prstGeom prst="roundRect">
             <a:avLst>
@@ -6474,7 +6474,7 @@
         </p:nvSpPr>
         <p:spPr>
           <a:xfrm>
-            <a:off x="4846320" y="3273552"/>
+            <a:off x="4846320" y="3700052"/>
             <a:ext cx="3703320" cy="310896"/>
           </a:xfrm>
           <a:prstGeom prst="rect">
@@ -6513,7 +6513,7 @@
         </p:nvSpPr>
         <p:spPr>
           <a:xfrm>
-            <a:off x="4846320" y="3584448"/>
+            <a:off x="4846320" y="4010948"/>
             <a:ext cx="3657600" cy="347472"/>
           </a:xfrm>
           <a:prstGeom prst="rect">
@@ -6523,7 +6523,7 @@
           <a:ln/>
         </p:spPr>
         <p:txBody>
-          <a:bodyPr wrap="square" lIns="0" tIns="0" rIns="0" bIns="0" rtlCol="0" anchor="ctr"/>
+          <a:bodyPr anchor="t" wrap="square" lIns="0" tIns="0" rIns="0" bIns="0" rtlCol="0"/>
           <a:lstStyle/>
           <a:p>
             <a:pPr indent="0" marL="0">
@@ -8031,7 +8031,7 @@
                           <a:ea typeface="Inter" pitchFamily="34" charset="-122"/>
                           <a:cs typeface="Inter" pitchFamily="34" charset="-120"/>
                         </a:rPr>
-                        <a:t>9</a:t>
+                        <a:t>7 (up to 9)</a:t>
                       </a:r>
                       <a:endParaRPr lang="en-US" sz="1200" dirty="0">
                         <a:latin typeface="Inter" charset="0"/>
@@ -8855,7 +8855,7 @@
                           <a:ea typeface="Inter" pitchFamily="34" charset="-122"/>
                           <a:cs typeface="Inter" pitchFamily="34" charset="-120"/>
                         </a:rPr>
-                        <a:t>5</a:t>
+                        <a:t>4 (up to 5)</a:t>
                       </a:r>
                       <a:endParaRPr lang="en-US" sz="1200" dirty="0">
                         <a:latin typeface="Inter" charset="0"/>
@@ -9039,7 +9039,7 @@
                 <a:ea typeface="Inter" pitchFamily="34" charset="-122"/>
                 <a:cs typeface="Inter" pitchFamily="34" charset="-120"/>
               </a:rPr>
-              <a:t>Same hours, fewer contracted days, shorter closers, more weekends, more colleagues.</a:t>
+              <a:t>Same hours, fewer contracted days, shorter closers, more full weekends off.</a:t>
             </a:r>
             <a:endParaRPr lang="en-US" sz="1400" dirty="0"/>
           </a:p>
@@ -9581,7 +9581,7 @@
                 <a:ea typeface="Inter" pitchFamily="34" charset="-122"/>
                 <a:cs typeface="Inter" pitchFamily="34" charset="-120"/>
               </a:rPr>
-              <a:t>no extra hours</a:t>
+              <a:t>no extra contracted hours</a:t>
             </a:r>
             <a:endParaRPr lang="en-US" sz="1200" dirty="0"/>
           </a:p>
@@ -9727,7 +9727,7 @@
                 <a:ea typeface="Inter" pitchFamily="34" charset="-122"/>
                 <a:cs typeface="Inter" pitchFamily="34" charset="-120"/>
               </a:rPr>
-              <a:t>today it can be 9</a:t>
+              <a:t>today 7, up to 9</a:t>
             </a:r>
             <a:endParaRPr lang="en-US" sz="1200" dirty="0"/>
           </a:p>
@@ -9980,7 +9980,7 @@
                 <a:ea typeface="Inter" pitchFamily="34" charset="-122"/>
                 <a:cs typeface="Inter" pitchFamily="34" charset="-120"/>
               </a:rPr>
-              <a:t>never fewer on the station floor</a:t>
+              <a:t>fewest rostered on the floor</a:t>
             </a:r>
             <a:endParaRPr lang="en-US" sz="1400" dirty="0"/>
           </a:p>
@@ -10231,7 +10231,7 @@
                 <a:ea typeface="Inter" pitchFamily="34" charset="-122"/>
                 <a:cs typeface="Inter" pitchFamily="34" charset="-120"/>
               </a:rPr>
-              <a:t>Same hours, shorter closing shifts, more weekends — and staff where the trains are.</a:t>
+              <a:t>Same hours, shorter closers, more full weekends off — and staff where the trains are.</a:t>
             </a:r>
             <a:endParaRPr lang="en-US" sz="1400" dirty="0"/>
           </a:p>
@@ -10521,7 +10521,7 @@
         </p:nvSpPr>
         <p:spPr>
           <a:xfrm>
-            <a:off x="457200" y="2029968"/>
+            <a:off x="457200" y="2233968"/>
             <a:ext cx="457200" cy="457200"/>
           </a:xfrm>
           <a:prstGeom prst="ellipse">
@@ -10554,7 +10554,7 @@
         </p:blipFill>
         <p:spPr>
           <a:xfrm>
-            <a:off x="557784" y="2130552"/>
+            <a:off x="557784" y="2334552"/>
             <a:ext cx="256032" cy="256032"/>
           </a:xfrm>
           <a:prstGeom prst="rect">
@@ -10570,7 +10570,7 @@
         </p:nvSpPr>
         <p:spPr>
           <a:xfrm>
-            <a:off x="1097280" y="1993392"/>
+            <a:off x="1097280" y="2197392"/>
             <a:ext cx="7589520" cy="292608"/>
           </a:xfrm>
           <a:prstGeom prst="rect">
@@ -10609,7 +10609,7 @@
         </p:nvSpPr>
         <p:spPr>
           <a:xfrm>
-            <a:off x="1097280" y="2276856"/>
+            <a:off x="1097280" y="2480856"/>
             <a:ext cx="7589520" cy="274320"/>
           </a:xfrm>
           <a:prstGeom prst="rect">
@@ -10648,7 +10648,7 @@
         </p:nvSpPr>
         <p:spPr>
           <a:xfrm>
-            <a:off x="457200" y="2688336"/>
+            <a:off x="457200" y="3096336"/>
             <a:ext cx="457200" cy="457200"/>
           </a:xfrm>
           <a:prstGeom prst="ellipse">
@@ -10681,7 +10681,7 @@
         </p:blipFill>
         <p:spPr>
           <a:xfrm>
-            <a:off x="557784" y="2788920"/>
+            <a:off x="557784" y="3196920"/>
             <a:ext cx="256032" cy="256032"/>
           </a:xfrm>
           <a:prstGeom prst="rect">
@@ -10697,7 +10697,7 @@
         </p:nvSpPr>
         <p:spPr>
           <a:xfrm>
-            <a:off x="1097280" y="2651760"/>
+            <a:off x="1097280" y="3059760"/>
             <a:ext cx="7589520" cy="292608"/>
           </a:xfrm>
           <a:prstGeom prst="rect">
@@ -10736,7 +10736,7 @@
         </p:nvSpPr>
         <p:spPr>
           <a:xfrm>
-            <a:off x="1097280" y="2935224"/>
+            <a:off x="1097280" y="3343224"/>
             <a:ext cx="7589520" cy="274320"/>
           </a:xfrm>
           <a:prstGeom prst="rect">
@@ -10775,7 +10775,7 @@
         </p:nvSpPr>
         <p:spPr>
           <a:xfrm>
-            <a:off x="457200" y="3346704"/>
+            <a:off x="457200" y="3958704"/>
             <a:ext cx="457200" cy="457200"/>
           </a:xfrm>
           <a:prstGeom prst="ellipse">
@@ -10808,7 +10808,7 @@
         </p:blipFill>
         <p:spPr>
           <a:xfrm>
-            <a:off x="557784" y="3447288"/>
+            <a:off x="557784" y="4059288"/>
             <a:ext cx="256032" cy="256032"/>
           </a:xfrm>
           <a:prstGeom prst="rect">
@@ -10824,7 +10824,7 @@
         </p:nvSpPr>
         <p:spPr>
           <a:xfrm>
-            <a:off x="1097280" y="3310128"/>
+            <a:off x="1097280" y="3922128"/>
             <a:ext cx="7589520" cy="292608"/>
           </a:xfrm>
           <a:prstGeom prst="rect">
@@ -10863,7 +10863,7 @@
         </p:nvSpPr>
         <p:spPr>
           <a:xfrm>
-            <a:off x="1097280" y="3593592"/>
+            <a:off x="1097280" y="4205592"/>
             <a:ext cx="7589520" cy="274320"/>
           </a:xfrm>
           <a:prstGeom prst="rect">
@@ -14259,7 +14259,7 @@
                 <a:ea typeface="Inter" pitchFamily="34" charset="-122"/>
                 <a:cs typeface="Inter" pitchFamily="34" charset="-120"/>
               </a:rPr>
-              <a:t>December needs more people at the close — but every closing shift is shorter.</a:t>
+              <a:t>More late finishes, only partly from the rules — but every closing shift is shorter.</a:t>
             </a:r>
             <a:endParaRPr lang="en-US" sz="1400" dirty="0"/>
           </a:p>
